--- a/yocto_training_all_session_decks/session_decks/D4S3_DayToDay_Ops.pptx
+++ b/yocto_training_all_session_decks/session_decks/D4S3_DayToDay_Ops.pptx
@@ -5,27 +5,27 @@
     <p:sldMasterId id="2147483648" r:id="rId1"/>
   </p:sldMasterIdLst>
   <p:notesMasterIdLst>
-    <p:notesMasterId r:id="rId8"/>
+    <p:notesMasterId r:id="rId12"/>
   </p:notesMasterIdLst>
   <p:handoutMasterIdLst>
-    <p:handoutMasterId r:id="rId9"/>
+    <p:handoutMasterId r:id="rId13"/>
   </p:handoutMasterIdLst>
   <p:sldIdLst>
-    <p:sldId id="1007" r:id="rId18"/>
-    <p:sldId id="1008" r:id="rId19"/>
-    <p:sldId id="1009" r:id="rId20"/>
-    <p:sldId id="1010" r:id="rId21"/>
-    <p:sldId id="1011" r:id="rId22"/>
-    <p:sldId id="1012" r:id="rId23"/>
-    <p:sldId id="1013" r:id="rId24"/>
-    <p:sldId id="1014" r:id="rId25"/>
-    <p:sldId id="1015" r:id="rId26"/>
-    <p:sldId id="1016" r:id="rId27"/>
+    <p:sldId id="1007" r:id="rId2"/>
+    <p:sldId id="1008" r:id="rId3"/>
+    <p:sldId id="1009" r:id="rId4"/>
+    <p:sldId id="1010" r:id="rId5"/>
+    <p:sldId id="1011" r:id="rId6"/>
+    <p:sldId id="1012" r:id="rId7"/>
+    <p:sldId id="1013" r:id="rId8"/>
+    <p:sldId id="1014" r:id="rId9"/>
+    <p:sldId id="1015" r:id="rId10"/>
+    <p:sldId id="1016" r:id="rId11"/>
   </p:sldIdLst>
   <p:sldSz cx="12192000" cy="6858000"/>
   <p:notesSz cx="6858000" cy="9144000"/>
   <p:custDataLst>
-    <p:tags r:id="rId10"/>
+    <p:tags r:id="rId14"/>
   </p:custDataLst>
   <p:defaultTextStyle>
     <a:defPPr>
@@ -2931,7 +2931,7 @@
           <a:p>
             <a:fld id="{0CEC647C-F50C-4F78-AA33-D7AA6CDA18EE}" type="datetimeFigureOut">
               <a:rPr lang="en-US" smtClean="0"/>
-              <a:t>7/13/2025</a:t>
+              <a:t>6/12/2026</a:t>
             </a:fld>
             <a:endParaRPr lang="en-US"/>
           </a:p>
@@ -3096,7 +3096,7 @@
           <a:p>
             <a:fld id="{3A83341F-E62C-483B-84B4-966F8BE46097}" type="datetimeFigureOut">
               <a:rPr lang="en-US" smtClean="0"/>
-              <a:t>7/13/2025</a:t>
+              <a:t>6/12/2026</a:t>
             </a:fld>
             <a:endParaRPr lang="en-US"/>
           </a:p>
@@ -5180,8 +5180,8 @@
 </p:sldMaster>
 </file>
 
-<file path=ppt/slides/slide10.xml><?xml version="1.0" encoding="utf-8"?>
-<p:sld xmlns:a="http://schemas.openxmlformats.org/drawingml/2006/main" xmlns:p="http://schemas.openxmlformats.org/presentationml/2006/main" xmlns:r="http://schemas.openxmlformats.org/officeDocument/2006/relationships">
+<file path=ppt/slides/slide1.xml><?xml version="1.0" encoding="utf-8"?>
+<p:sld xmlns:a="http://schemas.openxmlformats.org/drawingml/2006/main" xmlns:r="http://schemas.openxmlformats.org/officeDocument/2006/relationships" xmlns:p="http://schemas.openxmlformats.org/presentationml/2006/main">
   <p:cSld>
     <p:spTree>
       <p:nvGrpSpPr>
@@ -5189,7 +5189,93 @@
         <p:cNvGrpSpPr/>
         <p:nvPr/>
       </p:nvGrpSpPr>
-      <p:grpSpPr/>
+      <p:grpSpPr>
+        <a:xfrm>
+          <a:off x="0" y="0"/>
+          <a:ext cx="0" cy="0"/>
+          <a:chOff x="0" y="0"/>
+          <a:chExt cx="0" cy="0"/>
+        </a:xfrm>
+      </p:grpSpPr>
+      <p:sp>
+        <p:nvSpPr>
+          <p:cNvPr id="2" name="Title 1"/>
+          <p:cNvSpPr>
+            <a:spLocks noGrp="1"/>
+          </p:cNvSpPr>
+          <p:nvPr>
+            <p:ph type="ctrTitle"/>
+          </p:nvPr>
+        </p:nvSpPr>
+        <p:spPr/>
+        <p:txBody>
+          <a:bodyPr/>
+          <a:lstStyle/>
+          <a:p>
+            <a:r>
+              <a:rPr sz="4400" b="1">
+                <a:solidFill>
+                  <a:srgbClr val="FFFFFF"/>
+                </a:solidFill>
+                <a:latin typeface="Calibri"/>
+              </a:rPr>
+              <a:t>Day-to-Day Operations</a:t>
+            </a:r>
+          </a:p>
+        </p:txBody>
+      </p:sp>
+      <p:sp>
+        <p:nvSpPr>
+          <p:cNvPr id="3" name="Subtitle 2"/>
+          <p:cNvSpPr>
+            <a:spLocks noGrp="1"/>
+          </p:cNvSpPr>
+          <p:nvPr>
+            <p:ph type="subTitle" idx="1"/>
+          </p:nvPr>
+        </p:nvSpPr>
+        <p:spPr/>
+        <p:txBody>
+          <a:bodyPr/>
+          <a:lstStyle/>
+          <a:p>
+            <a:r>
+              <a:rPr sz="1800" dirty="0">
+                <a:solidFill>
+                  <a:srgbClr val="FFFFFF"/>
+                </a:solidFill>
+                <a:latin typeface="Calibri"/>
+              </a:rPr>
+              <a:t>Running a Yocto-built Linux in production</a:t>
+            </a:r>
+          </a:p>
+        </p:txBody>
+      </p:sp>
+    </p:spTree>
+  </p:cSld>
+  <p:clrMapOvr>
+    <a:masterClrMapping/>
+  </p:clrMapOvr>
+</p:sld>
+</file>
+
+<file path=ppt/slides/slide10.xml><?xml version="1.0" encoding="utf-8"?>
+<p:sld xmlns:a="http://schemas.openxmlformats.org/drawingml/2006/main" xmlns:r="http://schemas.openxmlformats.org/officeDocument/2006/relationships" xmlns:p="http://schemas.openxmlformats.org/presentationml/2006/main">
+  <p:cSld>
+    <p:spTree>
+      <p:nvGrpSpPr>
+        <p:cNvPr id="1" name=""/>
+        <p:cNvGrpSpPr/>
+        <p:nvPr/>
+      </p:nvGrpSpPr>
+      <p:grpSpPr>
+        <a:xfrm>
+          <a:off x="0" y="0"/>
+          <a:ext cx="0" cy="0"/>
+          <a:chOff x="0" y="0"/>
+          <a:chExt cx="0" cy="0"/>
+        </a:xfrm>
+      </p:grpSpPr>
       <p:sp>
         <p:nvSpPr>
           <p:cNvPr id="2" name="Title 1"/>
@@ -5208,11 +5294,11 @@
             <a:r>
               <a:rPr sz="3200" b="1">
                 <a:solidFill>
-                  <a:srgbClr val="CC0066"/>
+                  <a:srgbClr val="663399"/>
                 </a:solidFill>
                 <a:latin typeface="Calibri"/>
               </a:rPr>
-              <a:t>systemd Service Management</a:t>
+              <a:t>Session Summary</a:t>
             </a:r>
           </a:p>
         </p:txBody>
@@ -5234,7 +5320,7 @@
           <a:noFill/>
         </p:spPr>
         <p:txBody>
-          <a:bodyPr wrap="square" anchor="t" lIns="45720" rIns="45720">
+          <a:bodyPr wrap="square" lIns="45720" rIns="45720" anchor="t">
             <a:spAutoFit/>
           </a:bodyPr>
           <a:lstStyle/>
@@ -5247,7 +5333,952 @@
                 </a:solidFill>
                 <a:latin typeface="Calibri"/>
               </a:rPr>
-              <a:t>Commands you'll use weekly.</a:t>
+              <a:t>5 things to remember from this session.</a:t>
+            </a:r>
+          </a:p>
+        </p:txBody>
+      </p:sp>
+      <p:sp>
+        <p:nvSpPr>
+          <p:cNvPr id="4" name="Rounded Rectangle 3"/>
+          <p:cNvSpPr/>
+          <p:nvPr/>
+        </p:nvSpPr>
+        <p:spPr>
+          <a:xfrm>
+            <a:off x="822960" y="1874519"/>
+            <a:ext cx="457200" cy="548640"/>
+          </a:xfrm>
+          <a:prstGeom prst="roundRect">
+            <a:avLst/>
+          </a:prstGeom>
+          <a:solidFill>
+            <a:srgbClr val="CC0066"/>
+          </a:solidFill>
+          <a:ln>
+            <a:noFill/>
+          </a:ln>
+          <a:effectLst/>
+        </p:spPr>
+        <p:style>
+          <a:lnRef idx="1">
+            <a:schemeClr val="accent1"/>
+          </a:lnRef>
+          <a:fillRef idx="3">
+            <a:schemeClr val="accent1"/>
+          </a:fillRef>
+          <a:effectRef idx="2">
+            <a:schemeClr val="accent1"/>
+          </a:effectRef>
+          <a:fontRef idx="minor">
+            <a:schemeClr val="lt1"/>
+          </a:fontRef>
+        </p:style>
+        <p:txBody>
+          <a:bodyPr lIns="0" rIns="0" rtlCol="0" anchor="ctr"/>
+          <a:lstStyle/>
+          <a:p>
+            <a:pPr algn="ctr"/>
+            <a:r>
+              <a:rPr sz="2200" b="1">
+                <a:solidFill>
+                  <a:srgbClr val="FFFFFF"/>
+                </a:solidFill>
+                <a:latin typeface="Calibri"/>
+              </a:rPr>
+              <a:t>1</a:t>
+            </a:r>
+          </a:p>
+        </p:txBody>
+      </p:sp>
+      <p:sp>
+        <p:nvSpPr>
+          <p:cNvPr id="5" name="TextBox 4"/>
+          <p:cNvSpPr txBox="1"/>
+          <p:nvPr/>
+        </p:nvSpPr>
+        <p:spPr>
+          <a:xfrm>
+            <a:off x="1417320" y="1874519"/>
+            <a:ext cx="10058400" cy="320040"/>
+          </a:xfrm>
+          <a:prstGeom prst="rect">
+            <a:avLst/>
+          </a:prstGeom>
+          <a:noFill/>
+        </p:spPr>
+        <p:txBody>
+          <a:bodyPr wrap="square" lIns="45720" rIns="45720" anchor="t">
+            <a:spAutoFit/>
+          </a:bodyPr>
+          <a:lstStyle/>
+          <a:p>
+            <a:pPr algn="l"/>
+            <a:r>
+              <a:rPr sz="1600" b="1" i="0">
+                <a:solidFill>
+                  <a:srgbClr val="663399"/>
+                </a:solidFill>
+                <a:latin typeface="Calibri"/>
+              </a:rPr>
+              <a:t>SSH hygiene is non-negotiable on shipped devices</a:t>
+            </a:r>
+          </a:p>
+        </p:txBody>
+      </p:sp>
+      <p:sp>
+        <p:nvSpPr>
+          <p:cNvPr id="6" name="TextBox 5"/>
+          <p:cNvSpPr txBox="1"/>
+          <p:nvPr/>
+        </p:nvSpPr>
+        <p:spPr>
+          <a:xfrm>
+            <a:off x="1417320" y="2185415"/>
+            <a:ext cx="10058400" cy="320040"/>
+          </a:xfrm>
+          <a:prstGeom prst="rect">
+            <a:avLst/>
+          </a:prstGeom>
+          <a:noFill/>
+        </p:spPr>
+        <p:txBody>
+          <a:bodyPr wrap="square" lIns="45720" rIns="45720" anchor="t">
+            <a:spAutoFit/>
+          </a:bodyPr>
+          <a:lstStyle/>
+          <a:p>
+            <a:pPr algn="l"/>
+            <a:r>
+              <a:rPr sz="1300" b="0" i="0">
+                <a:solidFill>
+                  <a:srgbClr val="333333"/>
+                </a:solidFill>
+                <a:latin typeface="Calibri"/>
+              </a:rPr>
+              <a:t>Keys only, no root, allowed users specified — bake it into the image</a:t>
+            </a:r>
+          </a:p>
+        </p:txBody>
+      </p:sp>
+      <p:sp>
+        <p:nvSpPr>
+          <p:cNvPr id="7" name="Rounded Rectangle 6"/>
+          <p:cNvSpPr/>
+          <p:nvPr/>
+        </p:nvSpPr>
+        <p:spPr>
+          <a:xfrm>
+            <a:off x="822960" y="2587752"/>
+            <a:ext cx="457200" cy="548640"/>
+          </a:xfrm>
+          <a:prstGeom prst="roundRect">
+            <a:avLst/>
+          </a:prstGeom>
+          <a:solidFill>
+            <a:srgbClr val="CC0066"/>
+          </a:solidFill>
+          <a:ln>
+            <a:noFill/>
+          </a:ln>
+          <a:effectLst/>
+        </p:spPr>
+        <p:style>
+          <a:lnRef idx="1">
+            <a:schemeClr val="accent1"/>
+          </a:lnRef>
+          <a:fillRef idx="3">
+            <a:schemeClr val="accent1"/>
+          </a:fillRef>
+          <a:effectRef idx="2">
+            <a:schemeClr val="accent1"/>
+          </a:effectRef>
+          <a:fontRef idx="minor">
+            <a:schemeClr val="lt1"/>
+          </a:fontRef>
+        </p:style>
+        <p:txBody>
+          <a:bodyPr lIns="0" rIns="0" rtlCol="0" anchor="ctr"/>
+          <a:lstStyle/>
+          <a:p>
+            <a:pPr algn="ctr"/>
+            <a:r>
+              <a:rPr sz="2200" b="1">
+                <a:solidFill>
+                  <a:srgbClr val="FFFFFF"/>
+                </a:solidFill>
+                <a:latin typeface="Calibri"/>
+              </a:rPr>
+              <a:t>2</a:t>
+            </a:r>
+          </a:p>
+        </p:txBody>
+      </p:sp>
+      <p:sp>
+        <p:nvSpPr>
+          <p:cNvPr id="8" name="TextBox 7"/>
+          <p:cNvSpPr txBox="1"/>
+          <p:nvPr/>
+        </p:nvSpPr>
+        <p:spPr>
+          <a:xfrm>
+            <a:off x="1417320" y="2587752"/>
+            <a:ext cx="10058400" cy="320040"/>
+          </a:xfrm>
+          <a:prstGeom prst="rect">
+            <a:avLst/>
+          </a:prstGeom>
+          <a:noFill/>
+        </p:spPr>
+        <p:txBody>
+          <a:bodyPr wrap="square" lIns="45720" rIns="45720" anchor="t">
+            <a:spAutoFit/>
+          </a:bodyPr>
+          <a:lstStyle/>
+          <a:p>
+            <a:pPr algn="l"/>
+            <a:r>
+              <a:rPr sz="1600" b="1" i="0">
+                <a:solidFill>
+                  <a:srgbClr val="663399"/>
+                </a:solidFill>
+                <a:latin typeface="Calibri"/>
+              </a:rPr>
+              <a:t>systemctl + journalctl cover 90% of ops tasks</a:t>
+            </a:r>
+          </a:p>
+        </p:txBody>
+      </p:sp>
+      <p:sp>
+        <p:nvSpPr>
+          <p:cNvPr id="9" name="TextBox 8"/>
+          <p:cNvSpPr txBox="1"/>
+          <p:nvPr/>
+        </p:nvSpPr>
+        <p:spPr>
+          <a:xfrm>
+            <a:off x="1417320" y="2898648"/>
+            <a:ext cx="10058400" cy="320040"/>
+          </a:xfrm>
+          <a:prstGeom prst="rect">
+            <a:avLst/>
+          </a:prstGeom>
+          <a:noFill/>
+        </p:spPr>
+        <p:txBody>
+          <a:bodyPr wrap="square" lIns="45720" rIns="45720" anchor="t">
+            <a:spAutoFit/>
+          </a:bodyPr>
+          <a:lstStyle/>
+          <a:p>
+            <a:pPr algn="l"/>
+            <a:r>
+              <a:rPr sz="1300" b="0" i="0">
+                <a:solidFill>
+                  <a:srgbClr val="333333"/>
+                </a:solidFill>
+                <a:latin typeface="Calibri"/>
+              </a:rPr>
+              <a:t>Status, start/stop, edit overrides, query logs by service/time/boot</a:t>
+            </a:r>
+          </a:p>
+        </p:txBody>
+      </p:sp>
+      <p:sp>
+        <p:nvSpPr>
+          <p:cNvPr id="10" name="Rounded Rectangle 9"/>
+          <p:cNvSpPr/>
+          <p:nvPr/>
+        </p:nvSpPr>
+        <p:spPr>
+          <a:xfrm>
+            <a:off x="822960" y="3300984"/>
+            <a:ext cx="457200" cy="548640"/>
+          </a:xfrm>
+          <a:prstGeom prst="roundRect">
+            <a:avLst/>
+          </a:prstGeom>
+          <a:solidFill>
+            <a:srgbClr val="CC0066"/>
+          </a:solidFill>
+          <a:ln>
+            <a:noFill/>
+          </a:ln>
+          <a:effectLst/>
+        </p:spPr>
+        <p:style>
+          <a:lnRef idx="1">
+            <a:schemeClr val="accent1"/>
+          </a:lnRef>
+          <a:fillRef idx="3">
+            <a:schemeClr val="accent1"/>
+          </a:fillRef>
+          <a:effectRef idx="2">
+            <a:schemeClr val="accent1"/>
+          </a:effectRef>
+          <a:fontRef idx="minor">
+            <a:schemeClr val="lt1"/>
+          </a:fontRef>
+        </p:style>
+        <p:txBody>
+          <a:bodyPr lIns="0" rIns="0" rtlCol="0" anchor="ctr"/>
+          <a:lstStyle/>
+          <a:p>
+            <a:pPr algn="ctr"/>
+            <a:r>
+              <a:rPr sz="2200" b="1">
+                <a:solidFill>
+                  <a:srgbClr val="FFFFFF"/>
+                </a:solidFill>
+                <a:latin typeface="Calibri"/>
+              </a:rPr>
+              <a:t>3</a:t>
+            </a:r>
+          </a:p>
+        </p:txBody>
+      </p:sp>
+      <p:sp>
+        <p:nvSpPr>
+          <p:cNvPr id="11" name="TextBox 10"/>
+          <p:cNvSpPr txBox="1"/>
+          <p:nvPr/>
+        </p:nvSpPr>
+        <p:spPr>
+          <a:xfrm>
+            <a:off x="1417320" y="3300984"/>
+            <a:ext cx="10058400" cy="320040"/>
+          </a:xfrm>
+          <a:prstGeom prst="rect">
+            <a:avLst/>
+          </a:prstGeom>
+          <a:noFill/>
+        </p:spPr>
+        <p:txBody>
+          <a:bodyPr wrap="square" lIns="45720" rIns="45720" anchor="t">
+            <a:spAutoFit/>
+          </a:bodyPr>
+          <a:lstStyle/>
+          <a:p>
+            <a:pPr algn="l"/>
+            <a:r>
+              <a:rPr sz="1600" b="1" i="0">
+                <a:solidFill>
+                  <a:srgbClr val="663399"/>
+                </a:solidFill>
+                <a:latin typeface="Calibri"/>
+              </a:rPr>
+              <a:t>Persistent journald survives reboots</a:t>
+            </a:r>
+          </a:p>
+        </p:txBody>
+      </p:sp>
+      <p:sp>
+        <p:nvSpPr>
+          <p:cNvPr id="12" name="TextBox 11"/>
+          <p:cNvSpPr txBox="1"/>
+          <p:nvPr/>
+        </p:nvSpPr>
+        <p:spPr>
+          <a:xfrm>
+            <a:off x="1417320" y="3611879"/>
+            <a:ext cx="10058400" cy="320040"/>
+          </a:xfrm>
+          <a:prstGeom prst="rect">
+            <a:avLst/>
+          </a:prstGeom>
+          <a:noFill/>
+        </p:spPr>
+        <p:txBody>
+          <a:bodyPr wrap="square" lIns="45720" rIns="45720" anchor="t">
+            <a:spAutoFit/>
+          </a:bodyPr>
+          <a:lstStyle/>
+          <a:p>
+            <a:pPr algn="l"/>
+            <a:r>
+              <a:rPr sz="1300" b="0" i="0">
+                <a:solidFill>
+                  <a:srgbClr val="333333"/>
+                </a:solidFill>
+                <a:latin typeface="Calibri"/>
+              </a:rPr>
+              <a:t>Worth enabling for field debugging — bound the size</a:t>
+            </a:r>
+          </a:p>
+        </p:txBody>
+      </p:sp>
+      <p:sp>
+        <p:nvSpPr>
+          <p:cNvPr id="13" name="Rounded Rectangle 12"/>
+          <p:cNvSpPr/>
+          <p:nvPr/>
+        </p:nvSpPr>
+        <p:spPr>
+          <a:xfrm>
+            <a:off x="822960" y="4014215"/>
+            <a:ext cx="457200" cy="548640"/>
+          </a:xfrm>
+          <a:prstGeom prst="roundRect">
+            <a:avLst/>
+          </a:prstGeom>
+          <a:solidFill>
+            <a:srgbClr val="CC0066"/>
+          </a:solidFill>
+          <a:ln>
+            <a:noFill/>
+          </a:ln>
+          <a:effectLst/>
+        </p:spPr>
+        <p:style>
+          <a:lnRef idx="1">
+            <a:schemeClr val="accent1"/>
+          </a:lnRef>
+          <a:fillRef idx="3">
+            <a:schemeClr val="accent1"/>
+          </a:fillRef>
+          <a:effectRef idx="2">
+            <a:schemeClr val="accent1"/>
+          </a:effectRef>
+          <a:fontRef idx="minor">
+            <a:schemeClr val="lt1"/>
+          </a:fontRef>
+        </p:style>
+        <p:txBody>
+          <a:bodyPr lIns="0" rIns="0" rtlCol="0" anchor="ctr"/>
+          <a:lstStyle/>
+          <a:p>
+            <a:pPr algn="ctr"/>
+            <a:r>
+              <a:rPr sz="2200" b="1">
+                <a:solidFill>
+                  <a:srgbClr val="FFFFFF"/>
+                </a:solidFill>
+                <a:latin typeface="Calibri"/>
+              </a:rPr>
+              <a:t>4</a:t>
+            </a:r>
+          </a:p>
+        </p:txBody>
+      </p:sp>
+      <p:sp>
+        <p:nvSpPr>
+          <p:cNvPr id="14" name="TextBox 13"/>
+          <p:cNvSpPr txBox="1"/>
+          <p:nvPr/>
+        </p:nvSpPr>
+        <p:spPr>
+          <a:xfrm>
+            <a:off x="1417320" y="4014215"/>
+            <a:ext cx="10058400" cy="320040"/>
+          </a:xfrm>
+          <a:prstGeom prst="rect">
+            <a:avLst/>
+          </a:prstGeom>
+          <a:noFill/>
+        </p:spPr>
+        <p:txBody>
+          <a:bodyPr wrap="square" lIns="45720" rIns="45720" anchor="t">
+            <a:spAutoFit/>
+          </a:bodyPr>
+          <a:lstStyle/>
+          <a:p>
+            <a:pPr algn="l"/>
+            <a:r>
+              <a:rPr sz="1600" b="1" i="0">
+                <a:solidFill>
+                  <a:srgbClr val="663399"/>
+                </a:solidFill>
+                <a:latin typeface="Calibri"/>
+              </a:rPr>
+              <a:t>Networking field issues follow a pattern</a:t>
+            </a:r>
+          </a:p>
+        </p:txBody>
+      </p:sp>
+      <p:sp>
+        <p:nvSpPr>
+          <p:cNvPr id="15" name="TextBox 14"/>
+          <p:cNvSpPr txBox="1"/>
+          <p:nvPr/>
+        </p:nvSpPr>
+        <p:spPr>
+          <a:xfrm>
+            <a:off x="1417320" y="4325112"/>
+            <a:ext cx="10058400" cy="320040"/>
+          </a:xfrm>
+          <a:prstGeom prst="rect">
+            <a:avLst/>
+          </a:prstGeom>
+          <a:noFill/>
+        </p:spPr>
+        <p:txBody>
+          <a:bodyPr wrap="square" lIns="45720" rIns="45720" anchor="t">
+            <a:spAutoFit/>
+          </a:bodyPr>
+          <a:lstStyle/>
+          <a:p>
+            <a:pPr algn="l"/>
+            <a:r>
+              <a:rPr sz="1300" b="0" i="0">
+                <a:solidFill>
+                  <a:srgbClr val="333333"/>
+                </a:solidFill>
+                <a:latin typeface="Calibri"/>
+              </a:rPr>
+              <a:t>IP → route → DNS → ping → check journald for systemd-networkd or NM</a:t>
+            </a:r>
+          </a:p>
+        </p:txBody>
+      </p:sp>
+      <p:sp>
+        <p:nvSpPr>
+          <p:cNvPr id="16" name="Rounded Rectangle 15"/>
+          <p:cNvSpPr/>
+          <p:nvPr/>
+        </p:nvSpPr>
+        <p:spPr>
+          <a:xfrm>
+            <a:off x="822960" y="4727448"/>
+            <a:ext cx="457200" cy="548640"/>
+          </a:xfrm>
+          <a:prstGeom prst="roundRect">
+            <a:avLst/>
+          </a:prstGeom>
+          <a:solidFill>
+            <a:srgbClr val="CC0066"/>
+          </a:solidFill>
+          <a:ln>
+            <a:noFill/>
+          </a:ln>
+          <a:effectLst/>
+        </p:spPr>
+        <p:style>
+          <a:lnRef idx="1">
+            <a:schemeClr val="accent1"/>
+          </a:lnRef>
+          <a:fillRef idx="3">
+            <a:schemeClr val="accent1"/>
+          </a:fillRef>
+          <a:effectRef idx="2">
+            <a:schemeClr val="accent1"/>
+          </a:effectRef>
+          <a:fontRef idx="minor">
+            <a:schemeClr val="lt1"/>
+          </a:fontRef>
+        </p:style>
+        <p:txBody>
+          <a:bodyPr lIns="0" rIns="0" rtlCol="0" anchor="ctr"/>
+          <a:lstStyle/>
+          <a:p>
+            <a:pPr algn="ctr"/>
+            <a:r>
+              <a:rPr sz="2200" b="1">
+                <a:solidFill>
+                  <a:srgbClr val="FFFFFF"/>
+                </a:solidFill>
+                <a:latin typeface="Calibri"/>
+              </a:rPr>
+              <a:t>5</a:t>
+            </a:r>
+          </a:p>
+        </p:txBody>
+      </p:sp>
+      <p:sp>
+        <p:nvSpPr>
+          <p:cNvPr id="17" name="TextBox 16"/>
+          <p:cNvSpPr txBox="1"/>
+          <p:nvPr/>
+        </p:nvSpPr>
+        <p:spPr>
+          <a:xfrm>
+            <a:off x="1417320" y="4727448"/>
+            <a:ext cx="10058400" cy="320040"/>
+          </a:xfrm>
+          <a:prstGeom prst="rect">
+            <a:avLst/>
+          </a:prstGeom>
+          <a:noFill/>
+        </p:spPr>
+        <p:txBody>
+          <a:bodyPr wrap="square" lIns="45720" rIns="45720" anchor="t">
+            <a:spAutoFit/>
+          </a:bodyPr>
+          <a:lstStyle/>
+          <a:p>
+            <a:pPr algn="l"/>
+            <a:r>
+              <a:rPr sz="1600" b="1" i="0">
+                <a:solidFill>
+                  <a:srgbClr val="663399"/>
+                </a:solidFill>
+                <a:latin typeface="Calibri"/>
+              </a:rPr>
+              <a:t>Storage reliability needs design, not luck</a:t>
+            </a:r>
+          </a:p>
+        </p:txBody>
+      </p:sp>
+      <p:sp>
+        <p:nvSpPr>
+          <p:cNvPr id="18" name="TextBox 17"/>
+          <p:cNvSpPr txBox="1"/>
+          <p:nvPr/>
+        </p:nvSpPr>
+        <p:spPr>
+          <a:xfrm>
+            <a:off x="1417320" y="5038344"/>
+            <a:ext cx="10058400" cy="320040"/>
+          </a:xfrm>
+          <a:prstGeom prst="rect">
+            <a:avLst/>
+          </a:prstGeom>
+          <a:noFill/>
+        </p:spPr>
+        <p:txBody>
+          <a:bodyPr wrap="square" lIns="45720" rIns="45720" anchor="t">
+            <a:spAutoFit/>
+          </a:bodyPr>
+          <a:lstStyle/>
+          <a:p>
+            <a:pPr algn="l"/>
+            <a:r>
+              <a:rPr sz="1300" b="0" i="0">
+                <a:solidFill>
+                  <a:srgbClr val="333333"/>
+                </a:solidFill>
+                <a:latin typeface="Calibri"/>
+              </a:rPr>
+              <a:t>tmpfs for volatile, RO+overlay for tamper-resistant, fs choice matters</a:t>
+            </a:r>
+          </a:p>
+        </p:txBody>
+      </p:sp>
+      <p:sp>
+        <p:nvSpPr>
+          <p:cNvPr id="19" name="Rounded Rectangle 18"/>
+          <p:cNvSpPr/>
+          <p:nvPr/>
+        </p:nvSpPr>
+        <p:spPr>
+          <a:xfrm>
+            <a:off x="822960" y="5669280"/>
+            <a:ext cx="10561320" cy="640080"/>
+          </a:xfrm>
+          <a:prstGeom prst="roundRect">
+            <a:avLst/>
+          </a:prstGeom>
+          <a:solidFill>
+            <a:srgbClr val="FBE6F0"/>
+          </a:solidFill>
+          <a:ln>
+            <a:noFill/>
+          </a:ln>
+          <a:effectLst/>
+        </p:spPr>
+        <p:style>
+          <a:lnRef idx="1">
+            <a:schemeClr val="accent1"/>
+          </a:lnRef>
+          <a:fillRef idx="3">
+            <a:schemeClr val="accent1"/>
+          </a:fillRef>
+          <a:effectRef idx="2">
+            <a:schemeClr val="accent1"/>
+          </a:effectRef>
+          <a:fontRef idx="minor">
+            <a:schemeClr val="lt1"/>
+          </a:fontRef>
+        </p:style>
+        <p:txBody>
+          <a:bodyPr lIns="228600" rtlCol="0" anchor="ctr"/>
+          <a:lstStyle/>
+          <a:p>
+            <a:pPr algn="ctr"/>
+            <a:r>
+              <a:rPr sz="1400" b="1">
+                <a:solidFill>
+                  <a:srgbClr val="663399"/>
+                </a:solidFill>
+                <a:latin typeface="Calibri"/>
+              </a:rPr>
+              <a:t>Next session  →  </a:t>
+            </a:r>
+            <a:r>
+              <a:rPr sz="1400">
+                <a:solidFill>
+                  <a:srgbClr val="333333"/>
+                </a:solidFill>
+                <a:latin typeface="Calibri"/>
+              </a:rPr>
+              <a:t>Deploying and Debugging Applications </a:t>
+            </a:r>
+          </a:p>
+        </p:txBody>
+      </p:sp>
+    </p:spTree>
+  </p:cSld>
+  <p:clrMapOvr>
+    <a:masterClrMapping/>
+  </p:clrMapOvr>
+</p:sld>
+</file>
+
+<file path=ppt/slides/slide2.xml><?xml version="1.0" encoding="utf-8"?>
+<p:sld xmlns:a="http://schemas.openxmlformats.org/drawingml/2006/main" xmlns:r="http://schemas.openxmlformats.org/officeDocument/2006/relationships" xmlns:p="http://schemas.openxmlformats.org/presentationml/2006/main">
+  <p:cSld>
+    <p:spTree>
+      <p:nvGrpSpPr>
+        <p:cNvPr id="1" name=""/>
+        <p:cNvGrpSpPr/>
+        <p:nvPr/>
+      </p:nvGrpSpPr>
+      <p:grpSpPr>
+        <a:xfrm>
+          <a:off x="0" y="0"/>
+          <a:ext cx="0" cy="0"/>
+          <a:chOff x="0" y="0"/>
+          <a:chExt cx="0" cy="0"/>
+        </a:xfrm>
+      </p:grpSpPr>
+      <p:sp>
+        <p:nvSpPr>
+          <p:cNvPr id="2" name="Title 1"/>
+          <p:cNvSpPr>
+            <a:spLocks noGrp="1"/>
+          </p:cNvSpPr>
+          <p:nvPr>
+            <p:ph type="title"/>
+          </p:nvPr>
+        </p:nvSpPr>
+        <p:spPr/>
+        <p:txBody>
+          <a:bodyPr/>
+          <a:lstStyle/>
+          <a:p>
+            <a:r>
+              <a:rPr sz="3200" b="1" dirty="0">
+                <a:latin typeface="Calibri"/>
+              </a:rPr>
+              <a:t>Session Agenda</a:t>
+            </a:r>
+          </a:p>
+        </p:txBody>
+      </p:sp>
+      <p:sp>
+        <p:nvSpPr>
+          <p:cNvPr id="3" name="TextBox 2"/>
+          <p:cNvSpPr txBox="1"/>
+          <p:nvPr/>
+        </p:nvSpPr>
+        <p:spPr>
+          <a:xfrm>
+            <a:off x="822960" y="1463040"/>
+            <a:ext cx="10515600" cy="5029200"/>
+          </a:xfrm>
+          <a:prstGeom prst="rect">
+            <a:avLst/>
+          </a:prstGeom>
+          <a:noFill/>
+        </p:spPr>
+        <p:txBody>
+          <a:bodyPr wrap="square" lIns="45720" rIns="45720">
+            <a:spAutoFit/>
+          </a:bodyPr>
+          <a:lstStyle/>
+          <a:p>
+            <a:pPr>
+              <a:spcAft>
+                <a:spcPts val="600"/>
+              </a:spcAft>
+            </a:pPr>
+            <a:r>
+              <a:rPr sz="2000" b="0" i="0">
+                <a:solidFill>
+                  <a:srgbClr val="333333"/>
+                </a:solidFill>
+                <a:latin typeface="Calibri"/>
+              </a:rPr>
+              <a:t>1.  User access and SSH key management</a:t>
+            </a:r>
+          </a:p>
+          <a:p>
+            <a:pPr>
+              <a:spcAft>
+                <a:spcPts val="600"/>
+              </a:spcAft>
+            </a:pPr>
+            <a:r>
+              <a:rPr sz="2000" b="0" i="0">
+                <a:solidFill>
+                  <a:srgbClr val="333333"/>
+                </a:solidFill>
+                <a:latin typeface="Calibri"/>
+              </a:rPr>
+              <a:t>2.  systemd service management</a:t>
+            </a:r>
+          </a:p>
+          <a:p>
+            <a:pPr>
+              <a:spcAft>
+                <a:spcPts val="600"/>
+              </a:spcAft>
+            </a:pPr>
+            <a:r>
+              <a:rPr sz="2000" b="0" i="0">
+                <a:solidFill>
+                  <a:srgbClr val="333333"/>
+                </a:solidFill>
+                <a:latin typeface="Calibri"/>
+              </a:rPr>
+              <a:t>3.  journalctl patterns for investigation</a:t>
+            </a:r>
+          </a:p>
+          <a:p>
+            <a:pPr>
+              <a:spcAft>
+                <a:spcPts val="600"/>
+              </a:spcAft>
+            </a:pPr>
+            <a:r>
+              <a:rPr sz="2000" b="0" i="0">
+                <a:solidFill>
+                  <a:srgbClr val="333333"/>
+                </a:solidFill>
+                <a:latin typeface="Calibri"/>
+              </a:rPr>
+              <a:t>4.  Persistent logs and crash collection</a:t>
+            </a:r>
+          </a:p>
+          <a:p>
+            <a:pPr>
+              <a:spcAft>
+                <a:spcPts val="600"/>
+              </a:spcAft>
+            </a:pPr>
+            <a:r>
+              <a:rPr sz="2000" b="0" i="0">
+                <a:solidFill>
+                  <a:srgbClr val="333333"/>
+                </a:solidFill>
+                <a:latin typeface="Calibri"/>
+              </a:rPr>
+              <a:t>5.  Networking in the field</a:t>
+            </a:r>
+          </a:p>
+          <a:p>
+            <a:pPr>
+              <a:spcAft>
+                <a:spcPts val="600"/>
+              </a:spcAft>
+            </a:pPr>
+            <a:r>
+              <a:rPr sz="2000" b="0" i="0">
+                <a:solidFill>
+                  <a:srgbClr val="333333"/>
+                </a:solidFill>
+                <a:latin typeface="Calibri"/>
+              </a:rPr>
+              <a:t>6.  Storage reliability — fs checks, wear</a:t>
+            </a:r>
+          </a:p>
+          <a:p>
+            <a:pPr>
+              <a:spcAft>
+                <a:spcPts val="600"/>
+              </a:spcAft>
+            </a:pPr>
+            <a:r>
+              <a:rPr sz="2000" b="0" i="0">
+                <a:solidFill>
+                  <a:srgbClr val="333333"/>
+                </a:solidFill>
+                <a:latin typeface="Calibri"/>
+              </a:rPr>
+              <a:t>7.  Hands-on lab</a:t>
+            </a:r>
+          </a:p>
+        </p:txBody>
+      </p:sp>
+    </p:spTree>
+  </p:cSld>
+  <p:clrMapOvr>
+    <a:masterClrMapping/>
+  </p:clrMapOvr>
+</p:sld>
+</file>
+
+<file path=ppt/slides/slide3.xml><?xml version="1.0" encoding="utf-8"?>
+<p:sld xmlns:a="http://schemas.openxmlformats.org/drawingml/2006/main" xmlns:r="http://schemas.openxmlformats.org/officeDocument/2006/relationships" xmlns:p="http://schemas.openxmlformats.org/presentationml/2006/main">
+  <p:cSld>
+    <p:spTree>
+      <p:nvGrpSpPr>
+        <p:cNvPr id="1" name=""/>
+        <p:cNvGrpSpPr/>
+        <p:nvPr/>
+      </p:nvGrpSpPr>
+      <p:grpSpPr>
+        <a:xfrm>
+          <a:off x="0" y="0"/>
+          <a:ext cx="0" cy="0"/>
+          <a:chOff x="0" y="0"/>
+          <a:chExt cx="0" cy="0"/>
+        </a:xfrm>
+      </p:grpSpPr>
+      <p:sp>
+        <p:nvSpPr>
+          <p:cNvPr id="2" name="Title 1"/>
+          <p:cNvSpPr>
+            <a:spLocks noGrp="1"/>
+          </p:cNvSpPr>
+          <p:nvPr>
+            <p:ph type="title"/>
+          </p:nvPr>
+        </p:nvSpPr>
+        <p:spPr/>
+        <p:txBody>
+          <a:bodyPr/>
+          <a:lstStyle/>
+          <a:p>
+            <a:r>
+              <a:rPr sz="3200" b="1" dirty="0">
+                <a:latin typeface="Calibri"/>
+              </a:rPr>
+              <a:t>User Access &amp; SSH Keys</a:t>
+            </a:r>
+          </a:p>
+        </p:txBody>
+      </p:sp>
+      <p:sp>
+        <p:nvSpPr>
+          <p:cNvPr id="3" name="TextBox 2"/>
+          <p:cNvSpPr txBox="1"/>
+          <p:nvPr/>
+        </p:nvSpPr>
+        <p:spPr>
+          <a:xfrm>
+            <a:off x="822960" y="1417320"/>
+            <a:ext cx="10515600" cy="365760"/>
+          </a:xfrm>
+          <a:prstGeom prst="rect">
+            <a:avLst/>
+          </a:prstGeom>
+          <a:noFill/>
+        </p:spPr>
+        <p:txBody>
+          <a:bodyPr wrap="square" lIns="45720" rIns="45720" anchor="t">
+            <a:spAutoFit/>
+          </a:bodyPr>
+          <a:lstStyle/>
+          <a:p>
+            <a:pPr algn="l"/>
+            <a:r>
+              <a:rPr sz="1500" b="0" i="1">
+                <a:solidFill>
+                  <a:srgbClr val="666666"/>
+                </a:solidFill>
+                <a:latin typeface="Calibri"/>
+              </a:rPr>
+              <a:t>Day-1 security on every device you ship.</a:t>
             </a:r>
           </a:p>
         </p:txBody>
@@ -5295,6 +6326,7 @@
           <a:lstStyle/>
           <a:p>
             <a:pPr algn="ctr"/>
+            <a:endParaRPr/>
           </a:p>
         </p:txBody>
       </p:sp>
@@ -5339,6 +6371,7 @@
           <a:lstStyle/>
           <a:p>
             <a:pPr algn="ctr"/>
+            <a:endParaRPr/>
           </a:p>
         </p:txBody>
       </p:sp>
@@ -5351,7 +6384,7 @@
         <p:spPr>
           <a:xfrm>
             <a:off x="1005840" y="1874519"/>
-            <a:ext cx="10241280" cy="4389120"/>
+            <a:ext cx="10241280" cy="3816429"/>
           </a:xfrm>
           <a:prstGeom prst="rect">
             <a:avLst/>
@@ -5376,7 +6409,7 @@
                 </a:solidFill>
                 <a:latin typeface="Consolas"/>
               </a:rPr>
-              <a:t># Start, stop, restart</a:t>
+              <a:t># Create a non-root maintenance user</a:t>
             </a:r>
           </a:p>
           <a:p>
@@ -5392,7 +6425,7 @@
                 </a:solidFill>
                 <a:latin typeface="Consolas"/>
               </a:rPr>
-              <a:t>systemctl start hello-trainergw</a:t>
+              <a:t>sudo adduser --disabled-password --gecos '' admin</a:t>
             </a:r>
           </a:p>
           <a:p>
@@ -5408,7 +6441,7 @@
                 </a:solidFill>
                 <a:latin typeface="Consolas"/>
               </a:rPr>
-              <a:t>systemctl stop hello-trainergw</a:t>
+              <a:t>sudo usermod -aG sudo admin</a:t>
             </a:r>
           </a:p>
           <a:p>
@@ -5424,7 +6457,71 @@
                 </a:solidFill>
                 <a:latin typeface="Consolas"/>
               </a:rPr>
-              <a:t>systemctl restart hello-trainergw</a:t>
+              <a:t> </a:t>
+            </a:r>
+          </a:p>
+          <a:p>
+            <a:pPr>
+              <a:spcAft>
+                <a:spcPts val="0"/>
+              </a:spcAft>
+            </a:pPr>
+            <a:r>
+              <a:rPr sz="1100" i="1">
+                <a:solidFill>
+                  <a:srgbClr val="808080"/>
+                </a:solidFill>
+                <a:latin typeface="Consolas"/>
+              </a:rPr>
+              <a:t># Deploy your public key (from your workstation, into the image)</a:t>
+            </a:r>
+          </a:p>
+          <a:p>
+            <a:pPr>
+              <a:spcAft>
+                <a:spcPts val="0"/>
+              </a:spcAft>
+            </a:pPr>
+            <a:r>
+              <a:rPr sz="1100" i="1">
+                <a:solidFill>
+                  <a:srgbClr val="808080"/>
+                </a:solidFill>
+                <a:latin typeface="Consolas"/>
+              </a:rPr>
+              <a:t># Either:</a:t>
+            </a:r>
+          </a:p>
+          <a:p>
+            <a:pPr>
+              <a:spcAft>
+                <a:spcPts val="0"/>
+              </a:spcAft>
+            </a:pPr>
+            <a:r>
+              <a:rPr sz="1100" i="1">
+                <a:solidFill>
+                  <a:srgbClr val="808080"/>
+                </a:solidFill>
+                <a:latin typeface="Consolas"/>
+              </a:rPr>
+              <a:t>#   - Ship in image: write authorized_keys into ROOTFS_POSTPROCESS_COMMAND</a:t>
+            </a:r>
+          </a:p>
+          <a:p>
+            <a:pPr>
+              <a:spcAft>
+                <a:spcPts val="0"/>
+              </a:spcAft>
+            </a:pPr>
+            <a:r>
+              <a:rPr sz="1100" i="1">
+                <a:solidFill>
+                  <a:srgbClr val="808080"/>
+                </a:solidFill>
+                <a:latin typeface="Consolas"/>
+              </a:rPr>
+              <a:t>#   - Deploy at first boot via a systemd one-shot service</a:t>
             </a:r>
           </a:p>
           <a:p>
@@ -5440,7 +6537,23 @@
                 </a:solidFill>
                 <a:latin typeface="Consolas"/>
               </a:rPr>
-              <a:t>systemctl reload hello-trainergw    # SIGHUP without restart</a:t>
+              <a:t> </a:t>
+            </a:r>
+          </a:p>
+          <a:p>
+            <a:pPr>
+              <a:spcAft>
+                <a:spcPts val="0"/>
+              </a:spcAft>
+            </a:pPr>
+            <a:r>
+              <a:rPr sz="1100" i="1">
+                <a:solidFill>
+                  <a:srgbClr val="808080"/>
+                </a:solidFill>
+                <a:latin typeface="Consolas"/>
+              </a:rPr>
+              <a:t># On a running device:</a:t>
             </a:r>
           </a:p>
           <a:p>
@@ -5456,6 +6569,70 @@
                 </a:solidFill>
                 <a:latin typeface="Consolas"/>
               </a:rPr>
+              <a:t>mkdir -p /home/admin/.ssh &amp;&amp; chmod 700 /home/admin/.ssh</a:t>
+            </a:r>
+          </a:p>
+          <a:p>
+            <a:pPr>
+              <a:spcAft>
+                <a:spcPts val="0"/>
+              </a:spcAft>
+            </a:pPr>
+            <a:r>
+              <a:rPr sz="1100">
+                <a:solidFill>
+                  <a:srgbClr val="2D2D2D"/>
+                </a:solidFill>
+                <a:latin typeface="Consolas"/>
+              </a:rPr>
+              <a:t>echo "ssh-ed25519 AAAAC..." &gt; /home/admin/.ssh/authorized_keys</a:t>
+            </a:r>
+          </a:p>
+          <a:p>
+            <a:pPr>
+              <a:spcAft>
+                <a:spcPts val="0"/>
+              </a:spcAft>
+            </a:pPr>
+            <a:r>
+              <a:rPr sz="1100">
+                <a:solidFill>
+                  <a:srgbClr val="2D2D2D"/>
+                </a:solidFill>
+                <a:latin typeface="Consolas"/>
+              </a:rPr>
+              <a:t>chmod 600 /home/admin/.ssh/authorized_keys</a:t>
+            </a:r>
+          </a:p>
+          <a:p>
+            <a:pPr>
+              <a:spcAft>
+                <a:spcPts val="0"/>
+              </a:spcAft>
+            </a:pPr>
+            <a:r>
+              <a:rPr sz="1100">
+                <a:solidFill>
+                  <a:srgbClr val="2D2D2D"/>
+                </a:solidFill>
+                <a:latin typeface="Consolas"/>
+              </a:rPr>
+              <a:t>chown -R admin:admin /home/admin/.ssh</a:t>
+            </a:r>
+          </a:p>
+          <a:p>
+            <a:pPr>
+              <a:spcAft>
+                <a:spcPts val="0"/>
+              </a:spcAft>
+            </a:pPr>
+            <a:r>
+              <a:rPr sz="1100">
+                <a:solidFill>
+                  <a:srgbClr val="2D2D2D"/>
+                </a:solidFill>
+                <a:latin typeface="Consolas"/>
+              </a:rPr>
               <a:t> </a:t>
             </a:r>
           </a:p>
@@ -5472,7 +6649,71 @@
                 </a:solidFill>
                 <a:latin typeface="Consolas"/>
               </a:rPr>
-              <a:t># Enable to start at boot</a:t>
+              <a:t># Lock down sshd</a:t>
+            </a:r>
+          </a:p>
+          <a:p>
+            <a:pPr>
+              <a:spcAft>
+                <a:spcPts val="0"/>
+              </a:spcAft>
+            </a:pPr>
+            <a:r>
+              <a:rPr sz="1100" i="1">
+                <a:solidFill>
+                  <a:srgbClr val="808080"/>
+                </a:solidFill>
+                <a:latin typeface="Consolas"/>
+              </a:rPr>
+              <a:t># /etc/ssh/sshd_config:</a:t>
+            </a:r>
+          </a:p>
+          <a:p>
+            <a:pPr>
+              <a:spcAft>
+                <a:spcPts val="0"/>
+              </a:spcAft>
+            </a:pPr>
+            <a:r>
+              <a:rPr sz="1100" i="1">
+                <a:solidFill>
+                  <a:srgbClr val="808080"/>
+                </a:solidFill>
+                <a:latin typeface="Consolas"/>
+              </a:rPr>
+              <a:t>#   PasswordAuthentication no</a:t>
+            </a:r>
+          </a:p>
+          <a:p>
+            <a:pPr>
+              <a:spcAft>
+                <a:spcPts val="0"/>
+              </a:spcAft>
+            </a:pPr>
+            <a:r>
+              <a:rPr sz="1100" i="1">
+                <a:solidFill>
+                  <a:srgbClr val="808080"/>
+                </a:solidFill>
+                <a:latin typeface="Consolas"/>
+              </a:rPr>
+              <a:t>#   PermitRootLogin no</a:t>
+            </a:r>
+          </a:p>
+          <a:p>
+            <a:pPr>
+              <a:spcAft>
+                <a:spcPts val="0"/>
+              </a:spcAft>
+            </a:pPr>
+            <a:r>
+              <a:rPr sz="1100" i="1">
+                <a:solidFill>
+                  <a:srgbClr val="808080"/>
+                </a:solidFill>
+                <a:latin typeface="Consolas"/>
+              </a:rPr>
+              <a:t>#   AllowUsers admin</a:t>
             </a:r>
           </a:p>
           <a:p>
@@ -5488,7 +6729,7 @@
                 </a:solidFill>
                 <a:latin typeface="Consolas"/>
               </a:rPr>
-              <a:t>systemctl enable hello-trainergw</a:t>
+              <a:t> </a:t>
             </a:r>
           </a:p>
           <a:p>
@@ -5504,199 +6745,7 @@
                 </a:solidFill>
                 <a:latin typeface="Consolas"/>
               </a:rPr>
-              <a:t>systemctl enable --now hello-trainergw   # enable + start in one</a:t>
-            </a:r>
-          </a:p>
-          <a:p>
-            <a:pPr>
-              <a:spcAft>
-                <a:spcPts val="0"/>
-              </a:spcAft>
-            </a:pPr>
-            <a:r>
-              <a:rPr sz="1100">
-                <a:solidFill>
-                  <a:srgbClr val="2D2D2D"/>
-                </a:solidFill>
-                <a:latin typeface="Consolas"/>
-              </a:rPr>
-              <a:t> </a:t>
-            </a:r>
-          </a:p>
-          <a:p>
-            <a:pPr>
-              <a:spcAft>
-                <a:spcPts val="0"/>
-              </a:spcAft>
-            </a:pPr>
-            <a:r>
-              <a:rPr sz="1100" i="1">
-                <a:solidFill>
-                  <a:srgbClr val="808080"/>
-                </a:solidFill>
-                <a:latin typeface="Consolas"/>
-              </a:rPr>
-              <a:t># Check status</a:t>
-            </a:r>
-          </a:p>
-          <a:p>
-            <a:pPr>
-              <a:spcAft>
-                <a:spcPts val="0"/>
-              </a:spcAft>
-            </a:pPr>
-            <a:r>
-              <a:rPr sz="1100">
-                <a:solidFill>
-                  <a:srgbClr val="2D2D2D"/>
-                </a:solidFill>
-                <a:latin typeface="Consolas"/>
-              </a:rPr>
-              <a:t>systemctl status hello-trainergw</a:t>
-            </a:r>
-          </a:p>
-          <a:p>
-            <a:pPr>
-              <a:spcAft>
-                <a:spcPts val="0"/>
-              </a:spcAft>
-            </a:pPr>
-            <a:r>
-              <a:rPr sz="1100">
-                <a:solidFill>
-                  <a:srgbClr val="2D2D2D"/>
-                </a:solidFill>
-                <a:latin typeface="Consolas"/>
-              </a:rPr>
-              <a:t>systemctl is-active hello-trainergw</a:t>
-            </a:r>
-          </a:p>
-          <a:p>
-            <a:pPr>
-              <a:spcAft>
-                <a:spcPts val="0"/>
-              </a:spcAft>
-            </a:pPr>
-            <a:r>
-              <a:rPr sz="1100">
-                <a:solidFill>
-                  <a:srgbClr val="2D2D2D"/>
-                </a:solidFill>
-                <a:latin typeface="Consolas"/>
-              </a:rPr>
-              <a:t>systemctl is-enabled hello-trainergw</a:t>
-            </a:r>
-          </a:p>
-          <a:p>
-            <a:pPr>
-              <a:spcAft>
-                <a:spcPts val="0"/>
-              </a:spcAft>
-            </a:pPr>
-            <a:r>
-              <a:rPr sz="1100">
-                <a:solidFill>
-                  <a:srgbClr val="2D2D2D"/>
-                </a:solidFill>
-                <a:latin typeface="Consolas"/>
-              </a:rPr>
-              <a:t> </a:t>
-            </a:r>
-          </a:p>
-          <a:p>
-            <a:pPr>
-              <a:spcAft>
-                <a:spcPts val="0"/>
-              </a:spcAft>
-            </a:pPr>
-            <a:r>
-              <a:rPr sz="1100" i="1">
-                <a:solidFill>
-                  <a:srgbClr val="808080"/>
-                </a:solidFill>
-                <a:latin typeface="Consolas"/>
-              </a:rPr>
-              <a:t># Override settings without editing the original unit</a:t>
-            </a:r>
-          </a:p>
-          <a:p>
-            <a:pPr>
-              <a:spcAft>
-                <a:spcPts val="0"/>
-              </a:spcAft>
-            </a:pPr>
-            <a:r>
-              <a:rPr sz="1100">
-                <a:solidFill>
-                  <a:srgbClr val="2D2D2D"/>
-                </a:solidFill>
-                <a:latin typeface="Consolas"/>
-              </a:rPr>
-              <a:t>systemctl edit hello-trainergw</a:t>
-            </a:r>
-          </a:p>
-          <a:p>
-            <a:pPr>
-              <a:spcAft>
-                <a:spcPts val="0"/>
-              </a:spcAft>
-            </a:pPr>
-            <a:r>
-              <a:rPr sz="1100" i="1">
-                <a:solidFill>
-                  <a:srgbClr val="808080"/>
-                </a:solidFill>
-                <a:latin typeface="Consolas"/>
-              </a:rPr>
-              <a:t># Opens an editor for a drop-in /etc/systemd/system/hello-trainergw.service.d/override.conf</a:t>
-            </a:r>
-          </a:p>
-          <a:p>
-            <a:pPr>
-              <a:spcAft>
-                <a:spcPts val="0"/>
-              </a:spcAft>
-            </a:pPr>
-            <a:r>
-              <a:rPr sz="1100">
-                <a:solidFill>
-                  <a:srgbClr val="2D2D2D"/>
-                </a:solidFill>
-                <a:latin typeface="Consolas"/>
-              </a:rPr>
-              <a:t> </a:t>
-            </a:r>
-          </a:p>
-          <a:p>
-            <a:pPr>
-              <a:spcAft>
-                <a:spcPts val="0"/>
-              </a:spcAft>
-            </a:pPr>
-            <a:r>
-              <a:rPr sz="1100" i="1">
-                <a:solidFill>
-                  <a:srgbClr val="808080"/>
-                </a:solidFill>
-                <a:latin typeface="Consolas"/>
-              </a:rPr>
-              <a:t># After any unit file change</a:t>
-            </a:r>
-          </a:p>
-          <a:p>
-            <a:pPr>
-              <a:spcAft>
-                <a:spcPts val="0"/>
-              </a:spcAft>
-            </a:pPr>
-            <a:r>
-              <a:rPr sz="1100">
-                <a:solidFill>
-                  <a:srgbClr val="2D2D2D"/>
-                </a:solidFill>
-                <a:latin typeface="Consolas"/>
-              </a:rPr>
-              <a:t>systemctl daemon-reload</a:t>
+              <a:t>systemctl restart sshd</a:t>
             </a:r>
           </a:p>
         </p:txBody>
@@ -5709,8 +6758,8 @@
 </p:sld>
 </file>
 
-<file path=ppt/slides/slide11.xml><?xml version="1.0" encoding="utf-8"?>
-<p:sld xmlns:a="http://schemas.openxmlformats.org/drawingml/2006/main" xmlns:p="http://schemas.openxmlformats.org/presentationml/2006/main" xmlns:r="http://schemas.openxmlformats.org/officeDocument/2006/relationships">
+<file path=ppt/slides/slide4.xml><?xml version="1.0" encoding="utf-8"?>
+<p:sld xmlns:a="http://schemas.openxmlformats.org/drawingml/2006/main" xmlns:r="http://schemas.openxmlformats.org/officeDocument/2006/relationships" xmlns:p="http://schemas.openxmlformats.org/presentationml/2006/main">
   <p:cSld>
     <p:spTree>
       <p:nvGrpSpPr>
@@ -5718,7 +6767,14 @@
         <p:cNvGrpSpPr/>
         <p:nvPr/>
       </p:nvGrpSpPr>
-      <p:grpSpPr/>
+      <p:grpSpPr>
+        <a:xfrm>
+          <a:off x="0" y="0"/>
+          <a:ext cx="0" cy="0"/>
+          <a:chOff x="0" y="0"/>
+          <a:chExt cx="0" cy="0"/>
+        </a:xfrm>
+      </p:grpSpPr>
       <p:sp>
         <p:nvSpPr>
           <p:cNvPr id="2" name="Title 1"/>
@@ -5735,13 +6791,16 @@
           <a:lstStyle/>
           <a:p>
             <a:r>
-              <a:rPr sz="3200" b="1">
-                <a:solidFill>
-                  <a:srgbClr val="CC0066"/>
-                </a:solidFill>
+              <a:rPr sz="3200" b="1" dirty="0" err="1">
                 <a:latin typeface="Calibri"/>
               </a:rPr>
-              <a:t>journalctl Investigation Patterns</a:t>
+              <a:t>systemd</a:t>
+            </a:r>
+            <a:r>
+              <a:rPr sz="3200" b="1" dirty="0">
+                <a:latin typeface="Calibri"/>
+              </a:rPr>
+              <a:t> Service Management</a:t>
             </a:r>
           </a:p>
         </p:txBody>
@@ -5763,7 +6822,7 @@
           <a:noFill/>
         </p:spPr>
         <p:txBody>
-          <a:bodyPr wrap="square" anchor="t" lIns="45720" rIns="45720">
+          <a:bodyPr wrap="square" lIns="45720" rIns="45720" anchor="t">
             <a:spAutoFit/>
           </a:bodyPr>
           <a:lstStyle/>
@@ -5776,7 +6835,7 @@
                 </a:solidFill>
                 <a:latin typeface="Calibri"/>
               </a:rPr>
-              <a:t>How to find what you need without scrolling forever.</a:t>
+              <a:t>Commands you'll use weekly.</a:t>
             </a:r>
           </a:p>
         </p:txBody>
@@ -5824,6 +6883,7 @@
           <a:lstStyle/>
           <a:p>
             <a:pPr algn="ctr"/>
+            <a:endParaRPr/>
           </a:p>
         </p:txBody>
       </p:sp>
@@ -5868,6 +6928,7 @@
           <a:lstStyle/>
           <a:p>
             <a:pPr algn="ctr"/>
+            <a:endParaRPr/>
           </a:p>
         </p:txBody>
       </p:sp>
@@ -5879,8 +6940,8 @@
         </p:nvSpPr>
         <p:spPr>
           <a:xfrm>
-            <a:off x="1005840" y="1874519"/>
-            <a:ext cx="10241280" cy="4389120"/>
+            <a:off x="1271311" y="1760756"/>
+            <a:ext cx="10241280" cy="4616648"/>
           </a:xfrm>
           <a:prstGeom prst="rect">
             <a:avLst/>
@@ -5899,71 +6960,186 @@
               </a:spcAft>
             </a:pPr>
             <a:r>
-              <a:rPr sz="1100" i="1">
+              <a:rPr sz="1400" i="1" dirty="0">
                 <a:solidFill>
                   <a:srgbClr val="808080"/>
                 </a:solidFill>
                 <a:latin typeface="Consolas"/>
               </a:rPr>
-              <a:t># By service</a:t>
-            </a:r>
-          </a:p>
-          <a:p>
-            <a:pPr>
-              <a:spcAft>
-                <a:spcPts val="0"/>
-              </a:spcAft>
-            </a:pPr>
-            <a:r>
-              <a:rPr sz="1100">
-                <a:solidFill>
-                  <a:srgbClr val="2D2D2D"/>
-                </a:solidFill>
-                <a:latin typeface="Consolas"/>
-              </a:rPr>
-              <a:t>journalctl -u hello-trainergw</a:t>
-            </a:r>
-          </a:p>
-          <a:p>
-            <a:pPr>
-              <a:spcAft>
-                <a:spcPts val="0"/>
-              </a:spcAft>
-            </a:pPr>
-            <a:r>
-              <a:rPr sz="1100">
-                <a:solidFill>
-                  <a:srgbClr val="2D2D2D"/>
-                </a:solidFill>
-                <a:latin typeface="Consolas"/>
-              </a:rPr>
-              <a:t>journalctl -u hello-trainergw -f          # follow</a:t>
-            </a:r>
-          </a:p>
-          <a:p>
-            <a:pPr>
-              <a:spcAft>
-                <a:spcPts val="0"/>
-              </a:spcAft>
-            </a:pPr>
-            <a:r>
-              <a:rPr sz="1100">
-                <a:solidFill>
-                  <a:srgbClr val="2D2D2D"/>
-                </a:solidFill>
-                <a:latin typeface="Consolas"/>
-              </a:rPr>
-              <a:t>journalctl -u hello-trainergw --since='1 hour ago'</a:t>
-            </a:r>
-          </a:p>
-          <a:p>
-            <a:pPr>
-              <a:spcAft>
-                <a:spcPts val="0"/>
-              </a:spcAft>
-            </a:pPr>
-            <a:r>
-              <a:rPr sz="1100">
+              <a:t># Start, stop, restart</a:t>
+            </a:r>
+          </a:p>
+          <a:p>
+            <a:pPr>
+              <a:spcAft>
+                <a:spcPts val="0"/>
+              </a:spcAft>
+            </a:pPr>
+            <a:r>
+              <a:rPr sz="1400" dirty="0" err="1">
+                <a:solidFill>
+                  <a:srgbClr val="2D2D2D"/>
+                </a:solidFill>
+                <a:latin typeface="Consolas"/>
+              </a:rPr>
+              <a:t>systemctl</a:t>
+            </a:r>
+            <a:r>
+              <a:rPr sz="1400" dirty="0">
+                <a:solidFill>
+                  <a:srgbClr val="2D2D2D"/>
+                </a:solidFill>
+                <a:latin typeface="Consolas"/>
+              </a:rPr>
+              <a:t> start hello-</a:t>
+            </a:r>
+            <a:r>
+              <a:rPr sz="1400" dirty="0" err="1">
+                <a:solidFill>
+                  <a:srgbClr val="2D2D2D"/>
+                </a:solidFill>
+                <a:latin typeface="Consolas"/>
+              </a:rPr>
+              <a:t>trainergw</a:t>
+            </a:r>
+            <a:endParaRPr sz="1400" dirty="0">
+              <a:solidFill>
+                <a:srgbClr val="2D2D2D"/>
+              </a:solidFill>
+              <a:latin typeface="Consolas"/>
+            </a:endParaRPr>
+          </a:p>
+          <a:p>
+            <a:pPr>
+              <a:spcAft>
+                <a:spcPts val="0"/>
+              </a:spcAft>
+            </a:pPr>
+            <a:r>
+              <a:rPr sz="1400" dirty="0" err="1">
+                <a:solidFill>
+                  <a:srgbClr val="2D2D2D"/>
+                </a:solidFill>
+                <a:latin typeface="Consolas"/>
+              </a:rPr>
+              <a:t>systemctl</a:t>
+            </a:r>
+            <a:r>
+              <a:rPr sz="1400" dirty="0">
+                <a:solidFill>
+                  <a:srgbClr val="2D2D2D"/>
+                </a:solidFill>
+                <a:latin typeface="Consolas"/>
+              </a:rPr>
+              <a:t> stop hello-</a:t>
+            </a:r>
+            <a:r>
+              <a:rPr sz="1400" dirty="0" err="1">
+                <a:solidFill>
+                  <a:srgbClr val="2D2D2D"/>
+                </a:solidFill>
+                <a:latin typeface="Consolas"/>
+              </a:rPr>
+              <a:t>trainergw</a:t>
+            </a:r>
+            <a:endParaRPr sz="1400" dirty="0">
+              <a:solidFill>
+                <a:srgbClr val="2D2D2D"/>
+              </a:solidFill>
+              <a:latin typeface="Consolas"/>
+            </a:endParaRPr>
+          </a:p>
+          <a:p>
+            <a:pPr>
+              <a:spcAft>
+                <a:spcPts val="0"/>
+              </a:spcAft>
+            </a:pPr>
+            <a:r>
+              <a:rPr sz="1400" dirty="0" err="1">
+                <a:solidFill>
+                  <a:srgbClr val="2D2D2D"/>
+                </a:solidFill>
+                <a:latin typeface="Consolas"/>
+              </a:rPr>
+              <a:t>systemctl</a:t>
+            </a:r>
+            <a:r>
+              <a:rPr sz="1400" dirty="0">
+                <a:solidFill>
+                  <a:srgbClr val="2D2D2D"/>
+                </a:solidFill>
+                <a:latin typeface="Consolas"/>
+              </a:rPr>
+              <a:t> restart hello-</a:t>
+            </a:r>
+            <a:r>
+              <a:rPr sz="1400" dirty="0" err="1">
+                <a:solidFill>
+                  <a:srgbClr val="2D2D2D"/>
+                </a:solidFill>
+                <a:latin typeface="Consolas"/>
+              </a:rPr>
+              <a:t>trainergw</a:t>
+            </a:r>
+            <a:endParaRPr sz="1400" dirty="0">
+              <a:solidFill>
+                <a:srgbClr val="2D2D2D"/>
+              </a:solidFill>
+              <a:latin typeface="Consolas"/>
+            </a:endParaRPr>
+          </a:p>
+          <a:p>
+            <a:pPr>
+              <a:spcAft>
+                <a:spcPts val="0"/>
+              </a:spcAft>
+            </a:pPr>
+            <a:r>
+              <a:rPr sz="1400" dirty="0" err="1">
+                <a:solidFill>
+                  <a:srgbClr val="2D2D2D"/>
+                </a:solidFill>
+                <a:latin typeface="Consolas"/>
+              </a:rPr>
+              <a:t>systemctl</a:t>
+            </a:r>
+            <a:r>
+              <a:rPr sz="1400" dirty="0">
+                <a:solidFill>
+                  <a:srgbClr val="2D2D2D"/>
+                </a:solidFill>
+                <a:latin typeface="Consolas"/>
+              </a:rPr>
+              <a:t> reload hello-</a:t>
+            </a:r>
+            <a:r>
+              <a:rPr sz="1400" dirty="0" err="1">
+                <a:solidFill>
+                  <a:srgbClr val="2D2D2D"/>
+                </a:solidFill>
+                <a:latin typeface="Consolas"/>
+              </a:rPr>
+              <a:t>trainergw</a:t>
+            </a:r>
+            <a:r>
+              <a:rPr sz="1400" dirty="0">
+                <a:solidFill>
+                  <a:srgbClr val="2D2D2D"/>
+                </a:solidFill>
+                <a:latin typeface="Consolas"/>
+              </a:rPr>
+              <a:t>    # SIGHUP without restart</a:t>
+            </a:r>
+          </a:p>
+          <a:p>
+            <a:pPr>
+              <a:spcAft>
+                <a:spcPts val="0"/>
+              </a:spcAft>
+            </a:pPr>
+            <a:r>
+              <a:rPr sz="1400" dirty="0">
                 <a:solidFill>
                   <a:srgbClr val="2D2D2D"/>
                 </a:solidFill>
@@ -5979,55 +7155,106 @@
               </a:spcAft>
             </a:pPr>
             <a:r>
-              <a:rPr sz="1100" i="1">
+              <a:rPr sz="1400" i="1" dirty="0">
                 <a:solidFill>
                   <a:srgbClr val="808080"/>
                 </a:solidFill>
                 <a:latin typeface="Consolas"/>
               </a:rPr>
-              <a:t># By time window</a:t>
-            </a:r>
-          </a:p>
-          <a:p>
-            <a:pPr>
-              <a:spcAft>
-                <a:spcPts val="0"/>
-              </a:spcAft>
-            </a:pPr>
-            <a:r>
-              <a:rPr sz="1100">
-                <a:solidFill>
-                  <a:srgbClr val="2D2D2D"/>
-                </a:solidFill>
-                <a:latin typeface="Consolas"/>
-              </a:rPr>
-              <a:t>journalctl --since='2024-01-15 14:00' --until='2024-01-15 15:00'</a:t>
-            </a:r>
-          </a:p>
-          <a:p>
-            <a:pPr>
-              <a:spcAft>
-                <a:spcPts val="0"/>
-              </a:spcAft>
-            </a:pPr>
-            <a:r>
-              <a:rPr sz="1100">
-                <a:solidFill>
-                  <a:srgbClr val="2D2D2D"/>
-                </a:solidFill>
-                <a:latin typeface="Consolas"/>
-              </a:rPr>
-              <a:t>journalctl --since=yesterday</a:t>
-            </a:r>
-          </a:p>
-          <a:p>
-            <a:pPr>
-              <a:spcAft>
-                <a:spcPts val="0"/>
-              </a:spcAft>
-            </a:pPr>
-            <a:r>
-              <a:rPr sz="1100">
+              <a:t># Enable to start at boot</a:t>
+            </a:r>
+          </a:p>
+          <a:p>
+            <a:pPr>
+              <a:spcAft>
+                <a:spcPts val="0"/>
+              </a:spcAft>
+            </a:pPr>
+            <a:r>
+              <a:rPr sz="1400" dirty="0" err="1">
+                <a:solidFill>
+                  <a:srgbClr val="2D2D2D"/>
+                </a:solidFill>
+                <a:latin typeface="Consolas"/>
+              </a:rPr>
+              <a:t>systemctl</a:t>
+            </a:r>
+            <a:r>
+              <a:rPr sz="1400" dirty="0">
+                <a:solidFill>
+                  <a:srgbClr val="2D2D2D"/>
+                </a:solidFill>
+                <a:latin typeface="Consolas"/>
+              </a:rPr>
+              <a:t> enable hello-</a:t>
+            </a:r>
+            <a:r>
+              <a:rPr sz="1400" dirty="0" err="1">
+                <a:solidFill>
+                  <a:srgbClr val="2D2D2D"/>
+                </a:solidFill>
+                <a:latin typeface="Consolas"/>
+              </a:rPr>
+              <a:t>trainergw</a:t>
+            </a:r>
+            <a:endParaRPr sz="1400" dirty="0">
+              <a:solidFill>
+                <a:srgbClr val="2D2D2D"/>
+              </a:solidFill>
+              <a:latin typeface="Consolas"/>
+            </a:endParaRPr>
+          </a:p>
+          <a:p>
+            <a:pPr>
+              <a:spcAft>
+                <a:spcPts val="0"/>
+              </a:spcAft>
+            </a:pPr>
+            <a:r>
+              <a:rPr sz="1400" dirty="0" err="1">
+                <a:solidFill>
+                  <a:srgbClr val="2D2D2D"/>
+                </a:solidFill>
+                <a:latin typeface="Consolas"/>
+              </a:rPr>
+              <a:t>systemctl</a:t>
+            </a:r>
+            <a:r>
+              <a:rPr sz="1400" dirty="0">
+                <a:solidFill>
+                  <a:srgbClr val="2D2D2D"/>
+                </a:solidFill>
+                <a:latin typeface="Consolas"/>
+              </a:rPr>
+              <a:t> enable --now hello-</a:t>
+            </a:r>
+            <a:r>
+              <a:rPr sz="1400" dirty="0" err="1">
+                <a:solidFill>
+                  <a:srgbClr val="2D2D2D"/>
+                </a:solidFill>
+                <a:latin typeface="Consolas"/>
+              </a:rPr>
+              <a:t>trainergw</a:t>
+            </a:r>
+            <a:r>
+              <a:rPr sz="1400" dirty="0">
+                <a:solidFill>
+                  <a:srgbClr val="2D2D2D"/>
+                </a:solidFill>
+                <a:latin typeface="Consolas"/>
+              </a:rPr>
+              <a:t>   # enable + start in one</a:t>
+            </a:r>
+          </a:p>
+          <a:p>
+            <a:pPr>
+              <a:spcAft>
+                <a:spcPts val="0"/>
+              </a:spcAft>
+            </a:pPr>
+            <a:r>
+              <a:rPr sz="1400" dirty="0">
                 <a:solidFill>
                   <a:srgbClr val="2D2D2D"/>
                 </a:solidFill>
@@ -6043,71 +7270,143 @@
               </a:spcAft>
             </a:pPr>
             <a:r>
-              <a:rPr sz="1100" i="1">
+              <a:rPr sz="1400" i="1" dirty="0">
                 <a:solidFill>
                   <a:srgbClr val="808080"/>
                 </a:solidFill>
                 <a:latin typeface="Consolas"/>
               </a:rPr>
-              <a:t># By boot</a:t>
-            </a:r>
-          </a:p>
-          <a:p>
-            <a:pPr>
-              <a:spcAft>
-                <a:spcPts val="0"/>
-              </a:spcAft>
-            </a:pPr>
-            <a:r>
-              <a:rPr sz="1100">
-                <a:solidFill>
-                  <a:srgbClr val="2D2D2D"/>
-                </a:solidFill>
-                <a:latin typeface="Consolas"/>
-              </a:rPr>
-              <a:t>journalctl -b                             # current boot</a:t>
-            </a:r>
-          </a:p>
-          <a:p>
-            <a:pPr>
-              <a:spcAft>
-                <a:spcPts val="0"/>
-              </a:spcAft>
-            </a:pPr>
-            <a:r>
-              <a:rPr sz="1100">
-                <a:solidFill>
-                  <a:srgbClr val="2D2D2D"/>
-                </a:solidFill>
-                <a:latin typeface="Consolas"/>
-              </a:rPr>
-              <a:t>journalctl -b -1                          # previous boot</a:t>
-            </a:r>
-          </a:p>
-          <a:p>
-            <a:pPr>
-              <a:spcAft>
-                <a:spcPts val="0"/>
-              </a:spcAft>
-            </a:pPr>
-            <a:r>
-              <a:rPr sz="1100">
-                <a:solidFill>
-                  <a:srgbClr val="2D2D2D"/>
-                </a:solidFill>
-                <a:latin typeface="Consolas"/>
-              </a:rPr>
-              <a:t>journalctl --list-boots                   # list all stored</a:t>
-            </a:r>
-          </a:p>
-          <a:p>
-            <a:pPr>
-              <a:spcAft>
-                <a:spcPts val="0"/>
-              </a:spcAft>
-            </a:pPr>
-            <a:r>
-              <a:rPr sz="1100">
+              <a:t># Check status</a:t>
+            </a:r>
+          </a:p>
+          <a:p>
+            <a:pPr>
+              <a:spcAft>
+                <a:spcPts val="0"/>
+              </a:spcAft>
+            </a:pPr>
+            <a:r>
+              <a:rPr sz="1400" dirty="0" err="1">
+                <a:solidFill>
+                  <a:srgbClr val="2D2D2D"/>
+                </a:solidFill>
+                <a:latin typeface="Consolas"/>
+              </a:rPr>
+              <a:t>systemctl</a:t>
+            </a:r>
+            <a:r>
+              <a:rPr sz="1400" dirty="0">
+                <a:solidFill>
+                  <a:srgbClr val="2D2D2D"/>
+                </a:solidFill>
+                <a:latin typeface="Consolas"/>
+              </a:rPr>
+              <a:t> status hello-</a:t>
+            </a:r>
+            <a:r>
+              <a:rPr sz="1400" dirty="0" err="1">
+                <a:solidFill>
+                  <a:srgbClr val="2D2D2D"/>
+                </a:solidFill>
+                <a:latin typeface="Consolas"/>
+              </a:rPr>
+              <a:t>trainergw</a:t>
+            </a:r>
+            <a:endParaRPr sz="1400" dirty="0">
+              <a:solidFill>
+                <a:srgbClr val="2D2D2D"/>
+              </a:solidFill>
+              <a:latin typeface="Consolas"/>
+            </a:endParaRPr>
+          </a:p>
+          <a:p>
+            <a:pPr>
+              <a:spcAft>
+                <a:spcPts val="0"/>
+              </a:spcAft>
+            </a:pPr>
+            <a:r>
+              <a:rPr sz="1400" dirty="0" err="1">
+                <a:solidFill>
+                  <a:srgbClr val="2D2D2D"/>
+                </a:solidFill>
+                <a:latin typeface="Consolas"/>
+              </a:rPr>
+              <a:t>systemctl</a:t>
+            </a:r>
+            <a:r>
+              <a:rPr sz="1400" dirty="0">
+                <a:solidFill>
+                  <a:srgbClr val="2D2D2D"/>
+                </a:solidFill>
+                <a:latin typeface="Consolas"/>
+              </a:rPr>
+              <a:t> is-active hello-</a:t>
+            </a:r>
+            <a:r>
+              <a:rPr sz="1400" dirty="0" err="1">
+                <a:solidFill>
+                  <a:srgbClr val="2D2D2D"/>
+                </a:solidFill>
+                <a:latin typeface="Consolas"/>
+              </a:rPr>
+              <a:t>trainergw</a:t>
+            </a:r>
+            <a:endParaRPr sz="1400" dirty="0">
+              <a:solidFill>
+                <a:srgbClr val="2D2D2D"/>
+              </a:solidFill>
+              <a:latin typeface="Consolas"/>
+            </a:endParaRPr>
+          </a:p>
+          <a:p>
+            <a:pPr>
+              <a:spcAft>
+                <a:spcPts val="0"/>
+              </a:spcAft>
+            </a:pPr>
+            <a:r>
+              <a:rPr sz="1400" dirty="0" err="1">
+                <a:solidFill>
+                  <a:srgbClr val="2D2D2D"/>
+                </a:solidFill>
+                <a:latin typeface="Consolas"/>
+              </a:rPr>
+              <a:t>systemctl</a:t>
+            </a:r>
+            <a:r>
+              <a:rPr sz="1400" dirty="0">
+                <a:solidFill>
+                  <a:srgbClr val="2D2D2D"/>
+                </a:solidFill>
+                <a:latin typeface="Consolas"/>
+              </a:rPr>
+              <a:t> is-enabled hello-</a:t>
+            </a:r>
+            <a:r>
+              <a:rPr sz="1400" dirty="0" err="1">
+                <a:solidFill>
+                  <a:srgbClr val="2D2D2D"/>
+                </a:solidFill>
+                <a:latin typeface="Consolas"/>
+              </a:rPr>
+              <a:t>trainergw</a:t>
+            </a:r>
+            <a:endParaRPr sz="1400" dirty="0">
+              <a:solidFill>
+                <a:srgbClr val="2D2D2D"/>
+              </a:solidFill>
+              <a:latin typeface="Consolas"/>
+            </a:endParaRPr>
+          </a:p>
+          <a:p>
+            <a:pPr>
+              <a:spcAft>
+                <a:spcPts val="0"/>
+              </a:spcAft>
+            </a:pPr>
+            <a:r>
+              <a:rPr sz="1400" dirty="0">
                 <a:solidFill>
                   <a:srgbClr val="2D2D2D"/>
                 </a:solidFill>
@@ -6123,55 +7422,148 @@
               </a:spcAft>
             </a:pPr>
             <a:r>
-              <a:rPr sz="1100" i="1">
+              <a:rPr sz="1400" i="1" dirty="0">
                 <a:solidFill>
                   <a:srgbClr val="808080"/>
                 </a:solidFill>
                 <a:latin typeface="Consolas"/>
               </a:rPr>
-              <a:t># By priority (0=emerg, 7=debug)</a:t>
-            </a:r>
-          </a:p>
-          <a:p>
-            <a:pPr>
-              <a:spcAft>
-                <a:spcPts val="0"/>
-              </a:spcAft>
-            </a:pPr>
-            <a:r>
-              <a:rPr sz="1100">
-                <a:solidFill>
-                  <a:srgbClr val="2D2D2D"/>
-                </a:solidFill>
-                <a:latin typeface="Consolas"/>
-              </a:rPr>
-              <a:t>journalctl -p err -b</a:t>
-            </a:r>
-          </a:p>
-          <a:p>
-            <a:pPr>
-              <a:spcAft>
-                <a:spcPts val="0"/>
-              </a:spcAft>
-            </a:pPr>
-            <a:r>
-              <a:rPr sz="1100">
-                <a:solidFill>
-                  <a:srgbClr val="2D2D2D"/>
-                </a:solidFill>
-                <a:latin typeface="Consolas"/>
-              </a:rPr>
-              <a:t>journalctl -p warn..err -b</a:t>
-            </a:r>
-          </a:p>
-          <a:p>
-            <a:pPr>
-              <a:spcAft>
-                <a:spcPts val="0"/>
-              </a:spcAft>
-            </a:pPr>
-            <a:r>
-              <a:rPr sz="1100">
+              <a:t># Override settings without editing the original unit</a:t>
+            </a:r>
+          </a:p>
+          <a:p>
+            <a:pPr>
+              <a:spcAft>
+                <a:spcPts val="0"/>
+              </a:spcAft>
+            </a:pPr>
+            <a:r>
+              <a:rPr sz="1400" dirty="0" err="1">
+                <a:solidFill>
+                  <a:srgbClr val="2D2D2D"/>
+                </a:solidFill>
+                <a:latin typeface="Consolas"/>
+              </a:rPr>
+              <a:t>systemctl</a:t>
+            </a:r>
+            <a:r>
+              <a:rPr sz="1400" dirty="0">
+                <a:solidFill>
+                  <a:srgbClr val="2D2D2D"/>
+                </a:solidFill>
+                <a:latin typeface="Consolas"/>
+              </a:rPr>
+              <a:t> edit hello-</a:t>
+            </a:r>
+            <a:r>
+              <a:rPr sz="1400" dirty="0" err="1">
+                <a:solidFill>
+                  <a:srgbClr val="2D2D2D"/>
+                </a:solidFill>
+                <a:latin typeface="Consolas"/>
+              </a:rPr>
+              <a:t>trainergw</a:t>
+            </a:r>
+            <a:endParaRPr sz="1400" dirty="0">
+              <a:solidFill>
+                <a:srgbClr val="2D2D2D"/>
+              </a:solidFill>
+              <a:latin typeface="Consolas"/>
+            </a:endParaRPr>
+          </a:p>
+          <a:p>
+            <a:pPr>
+              <a:spcAft>
+                <a:spcPts val="0"/>
+              </a:spcAft>
+            </a:pPr>
+            <a:r>
+              <a:rPr sz="1400" i="1" dirty="0">
+                <a:solidFill>
+                  <a:srgbClr val="808080"/>
+                </a:solidFill>
+                <a:latin typeface="Consolas"/>
+              </a:rPr>
+              <a:t># Opens an editor for a drop-in /</a:t>
+            </a:r>
+            <a:r>
+              <a:rPr sz="1400" i="1" dirty="0" err="1">
+                <a:solidFill>
+                  <a:srgbClr val="808080"/>
+                </a:solidFill>
+                <a:latin typeface="Consolas"/>
+              </a:rPr>
+              <a:t>etc</a:t>
+            </a:r>
+            <a:r>
+              <a:rPr sz="1400" i="1" dirty="0">
+                <a:solidFill>
+                  <a:srgbClr val="808080"/>
+                </a:solidFill>
+                <a:latin typeface="Consolas"/>
+              </a:rPr>
+              <a:t>/</a:t>
+            </a:r>
+            <a:r>
+              <a:rPr sz="1400" i="1" dirty="0" err="1">
+                <a:solidFill>
+                  <a:srgbClr val="808080"/>
+                </a:solidFill>
+                <a:latin typeface="Consolas"/>
+              </a:rPr>
+              <a:t>systemd</a:t>
+            </a:r>
+            <a:r>
+              <a:rPr sz="1400" i="1" dirty="0">
+                <a:solidFill>
+                  <a:srgbClr val="808080"/>
+                </a:solidFill>
+                <a:latin typeface="Consolas"/>
+              </a:rPr>
+              <a:t>/system/hello-</a:t>
+            </a:r>
+            <a:r>
+              <a:rPr sz="1400" i="1" dirty="0" err="1">
+                <a:solidFill>
+                  <a:srgbClr val="808080"/>
+                </a:solidFill>
+                <a:latin typeface="Consolas"/>
+              </a:rPr>
+              <a:t>trainergw.service.d</a:t>
+            </a:r>
+            <a:r>
+              <a:rPr sz="1400" i="1" dirty="0">
+                <a:solidFill>
+                  <a:srgbClr val="808080"/>
+                </a:solidFill>
+                <a:latin typeface="Consolas"/>
+              </a:rPr>
+              <a:t>/</a:t>
+            </a:r>
+            <a:r>
+              <a:rPr sz="1400" i="1" dirty="0" err="1">
+                <a:solidFill>
+                  <a:srgbClr val="808080"/>
+                </a:solidFill>
+                <a:latin typeface="Consolas"/>
+              </a:rPr>
+              <a:t>override.conf</a:t>
+            </a:r>
+            <a:endParaRPr sz="1400" i="1" dirty="0">
+              <a:solidFill>
+                <a:srgbClr val="808080"/>
+              </a:solidFill>
+              <a:latin typeface="Consolas"/>
+            </a:endParaRPr>
+          </a:p>
+          <a:p>
+            <a:pPr>
+              <a:spcAft>
+                <a:spcPts val="0"/>
+              </a:spcAft>
+            </a:pPr>
+            <a:r>
+              <a:rPr sz="1400" dirty="0">
                 <a:solidFill>
                   <a:srgbClr val="2D2D2D"/>
                 </a:solidFill>
@@ -6187,93 +7579,38 @@
               </a:spcAft>
             </a:pPr>
             <a:r>
-              <a:rPr sz="1100" i="1">
+              <a:rPr sz="1400" i="1" dirty="0">
                 <a:solidFill>
                   <a:srgbClr val="808080"/>
                 </a:solidFill>
                 <a:latin typeface="Consolas"/>
               </a:rPr>
-              <a:t># By process</a:t>
-            </a:r>
-          </a:p>
-          <a:p>
-            <a:pPr>
-              <a:spcAft>
-                <a:spcPts val="0"/>
-              </a:spcAft>
-            </a:pPr>
-            <a:r>
-              <a:rPr sz="1100">
-                <a:solidFill>
-                  <a:srgbClr val="2D2D2D"/>
-                </a:solidFill>
-                <a:latin typeface="Consolas"/>
-              </a:rPr>
-              <a:t>journalctl _PID=1234</a:t>
-            </a:r>
-          </a:p>
-          <a:p>
-            <a:pPr>
-              <a:spcAft>
-                <a:spcPts val="0"/>
-              </a:spcAft>
-            </a:pPr>
-            <a:r>
-              <a:rPr sz="1100">
-                <a:solidFill>
-                  <a:srgbClr val="2D2D2D"/>
-                </a:solidFill>
-                <a:latin typeface="Consolas"/>
-              </a:rPr>
-              <a:t>journalctl _COMM=hello-trainergw</a:t>
-            </a:r>
-          </a:p>
-          <a:p>
-            <a:pPr>
-              <a:spcAft>
-                <a:spcPts val="0"/>
-              </a:spcAft>
-            </a:pPr>
-            <a:r>
-              <a:rPr sz="1100">
-                <a:solidFill>
-                  <a:srgbClr val="2D2D2D"/>
-                </a:solidFill>
-                <a:latin typeface="Consolas"/>
-              </a:rPr>
-              <a:t> </a:t>
-            </a:r>
-          </a:p>
-          <a:p>
-            <a:pPr>
-              <a:spcAft>
-                <a:spcPts val="0"/>
-              </a:spcAft>
-            </a:pPr>
-            <a:r>
-              <a:rPr sz="1100" i="1">
-                <a:solidFill>
-                  <a:srgbClr val="808080"/>
-                </a:solidFill>
-                <a:latin typeface="Consolas"/>
-              </a:rPr>
-              <a:t># Watch for errors as they happen</a:t>
-            </a:r>
-          </a:p>
-          <a:p>
-            <a:pPr>
-              <a:spcAft>
-                <a:spcPts val="0"/>
-              </a:spcAft>
-            </a:pPr>
-            <a:r>
-              <a:rPr sz="1100">
-                <a:solidFill>
-                  <a:srgbClr val="2D2D2D"/>
-                </a:solidFill>
-                <a:latin typeface="Consolas"/>
-              </a:rPr>
-              <a:t>journalctl -f -p err</a:t>
+              <a:t># After any unit file change</a:t>
+            </a:r>
+          </a:p>
+          <a:p>
+            <a:pPr>
+              <a:spcAft>
+                <a:spcPts val="0"/>
+              </a:spcAft>
+            </a:pPr>
+            <a:r>
+              <a:rPr sz="1400" dirty="0" err="1">
+                <a:solidFill>
+                  <a:srgbClr val="2D2D2D"/>
+                </a:solidFill>
+                <a:latin typeface="Consolas"/>
+              </a:rPr>
+              <a:t>systemctl</a:t>
+            </a:r>
+            <a:r>
+              <a:rPr sz="1400" dirty="0">
+                <a:solidFill>
+                  <a:srgbClr val="2D2D2D"/>
+                </a:solidFill>
+                <a:latin typeface="Consolas"/>
+              </a:rPr>
+              <a:t> daemon-reload</a:t>
             </a:r>
           </a:p>
         </p:txBody>
@@ -6286,8 +7623,8 @@
 </p:sld>
 </file>
 
-<file path=ppt/slides/slide12.xml><?xml version="1.0" encoding="utf-8"?>
-<p:sld xmlns:a="http://schemas.openxmlformats.org/drawingml/2006/main" xmlns:p="http://schemas.openxmlformats.org/presentationml/2006/main" xmlns:r="http://schemas.openxmlformats.org/officeDocument/2006/relationships">
+<file path=ppt/slides/slide5.xml><?xml version="1.0" encoding="utf-8"?>
+<p:sld xmlns:a="http://schemas.openxmlformats.org/drawingml/2006/main" xmlns:r="http://schemas.openxmlformats.org/officeDocument/2006/relationships" xmlns:p="http://schemas.openxmlformats.org/presentationml/2006/main">
   <p:cSld>
     <p:spTree>
       <p:nvGrpSpPr>
@@ -6295,7 +7632,14 @@
         <p:cNvGrpSpPr/>
         <p:nvPr/>
       </p:nvGrpSpPr>
-      <p:grpSpPr/>
+      <p:grpSpPr>
+        <a:xfrm>
+          <a:off x="0" y="0"/>
+          <a:ext cx="0" cy="0"/>
+          <a:chOff x="0" y="0"/>
+          <a:chExt cx="0" cy="0"/>
+        </a:xfrm>
+      </p:grpSpPr>
       <p:sp>
         <p:nvSpPr>
           <p:cNvPr id="2" name="Title 1"/>
@@ -6312,13 +7656,16 @@
           <a:lstStyle/>
           <a:p>
             <a:r>
-              <a:rPr sz="3200" b="1">
-                <a:solidFill>
-                  <a:srgbClr val="CC0066"/>
-                </a:solidFill>
+              <a:rPr sz="3200" b="1" dirty="0" err="1">
                 <a:latin typeface="Calibri"/>
               </a:rPr>
-              <a:t>Persistent Logs &amp; Crash Collection</a:t>
+              <a:t>journalctl</a:t>
+            </a:r>
+            <a:r>
+              <a:rPr sz="3200" b="1" dirty="0">
+                <a:latin typeface="Calibri"/>
+              </a:rPr>
+              <a:t> Investigation Patterns</a:t>
             </a:r>
           </a:p>
         </p:txBody>
@@ -6340,7 +7687,7 @@
           <a:noFill/>
         </p:spPr>
         <p:txBody>
-          <a:bodyPr wrap="square" anchor="t" lIns="45720" rIns="45720">
+          <a:bodyPr wrap="square" lIns="45720" rIns="45720" anchor="t">
             <a:spAutoFit/>
           </a:bodyPr>
           <a:lstStyle/>
@@ -6353,7 +7700,7 @@
                 </a:solidFill>
                 <a:latin typeface="Calibri"/>
               </a:rPr>
-              <a:t>Make sure logs survive a reboot, and crashes get captured.</a:t>
+              <a:t>How to find what you need without scrolling forever.</a:t>
             </a:r>
           </a:p>
         </p:txBody>
@@ -6401,6 +7748,7 @@
           <a:lstStyle/>
           <a:p>
             <a:pPr algn="ctr"/>
+            <a:endParaRPr/>
           </a:p>
         </p:txBody>
       </p:sp>
@@ -6445,6 +7793,7 @@
           <a:lstStyle/>
           <a:p>
             <a:pPr algn="ctr"/>
+            <a:endParaRPr/>
           </a:p>
         </p:txBody>
       </p:sp>
@@ -6456,8 +7805,8 @@
         </p:nvSpPr>
         <p:spPr>
           <a:xfrm>
-            <a:off x="1005840" y="1874519"/>
-            <a:ext cx="10241280" cy="4389120"/>
+            <a:off x="1197864" y="1830765"/>
+            <a:ext cx="10241280" cy="4524315"/>
           </a:xfrm>
           <a:prstGeom prst="rect">
             <a:avLst/>
@@ -6476,119 +7825,135 @@
               </a:spcAft>
             </a:pPr>
             <a:r>
-              <a:rPr sz="1100" i="1">
+              <a:rPr sz="1200" i="1">
                 <a:solidFill>
                   <a:srgbClr val="808080"/>
                 </a:solidFill>
                 <a:latin typeface="Consolas"/>
               </a:rPr>
-              <a:t># Enable persistent journald storage</a:t>
-            </a:r>
-          </a:p>
-          <a:p>
-            <a:pPr>
-              <a:spcAft>
-                <a:spcPts val="0"/>
-              </a:spcAft>
-            </a:pPr>
-            <a:r>
-              <a:rPr sz="1100" i="1">
+              <a:t># By service</a:t>
+            </a:r>
+          </a:p>
+          <a:p>
+            <a:pPr>
+              <a:spcAft>
+                <a:spcPts val="0"/>
+              </a:spcAft>
+            </a:pPr>
+            <a:r>
+              <a:rPr sz="1200">
+                <a:solidFill>
+                  <a:srgbClr val="2D2D2D"/>
+                </a:solidFill>
+                <a:latin typeface="Consolas"/>
+              </a:rPr>
+              <a:t>journalctl -u hello-trainergw</a:t>
+            </a:r>
+          </a:p>
+          <a:p>
+            <a:pPr>
+              <a:spcAft>
+                <a:spcPts val="0"/>
+              </a:spcAft>
+            </a:pPr>
+            <a:r>
+              <a:rPr sz="1200">
+                <a:solidFill>
+                  <a:srgbClr val="2D2D2D"/>
+                </a:solidFill>
+                <a:latin typeface="Consolas"/>
+              </a:rPr>
+              <a:t>journalctl -u hello-trainergw -f          # follow</a:t>
+            </a:r>
+          </a:p>
+          <a:p>
+            <a:pPr>
+              <a:spcAft>
+                <a:spcPts val="0"/>
+              </a:spcAft>
+            </a:pPr>
+            <a:r>
+              <a:rPr sz="1200">
+                <a:solidFill>
+                  <a:srgbClr val="2D2D2D"/>
+                </a:solidFill>
+                <a:latin typeface="Consolas"/>
+              </a:rPr>
+              <a:t>journalctl -u hello-trainergw --since='1 hour ago'</a:t>
+            </a:r>
+          </a:p>
+          <a:p>
+            <a:pPr>
+              <a:spcAft>
+                <a:spcPts val="0"/>
+              </a:spcAft>
+            </a:pPr>
+            <a:r>
+              <a:rPr sz="1200">
+                <a:solidFill>
+                  <a:srgbClr val="2D2D2D"/>
+                </a:solidFill>
+                <a:latin typeface="Consolas"/>
+              </a:rPr>
+              <a:t> </a:t>
+            </a:r>
+          </a:p>
+          <a:p>
+            <a:pPr>
+              <a:spcAft>
+                <a:spcPts val="0"/>
+              </a:spcAft>
+            </a:pPr>
+            <a:r>
+              <a:rPr sz="1200" i="1">
                 <a:solidFill>
                   <a:srgbClr val="808080"/>
                 </a:solidFill>
                 <a:latin typeface="Consolas"/>
               </a:rPr>
-              <a:t># /etc/systemd/journald.conf:</a:t>
-            </a:r>
-          </a:p>
-          <a:p>
-            <a:pPr>
-              <a:spcAft>
-                <a:spcPts val="0"/>
-              </a:spcAft>
-            </a:pPr>
-            <a:r>
-              <a:rPr sz="1100">
-                <a:solidFill>
-                  <a:srgbClr val="2D2D2D"/>
-                </a:solidFill>
-                <a:latin typeface="Consolas"/>
-              </a:rPr>
-              <a:t>[Journal]</a:t>
-            </a:r>
-          </a:p>
-          <a:p>
-            <a:pPr>
-              <a:spcAft>
-                <a:spcPts val="0"/>
-              </a:spcAft>
-            </a:pPr>
-            <a:r>
-              <a:rPr sz="1100">
-                <a:solidFill>
-                  <a:srgbClr val="2D2D2D"/>
-                </a:solidFill>
-                <a:latin typeface="Consolas"/>
-              </a:rPr>
-              <a:t>Storage=persistent</a:t>
-            </a:r>
-          </a:p>
-          <a:p>
-            <a:pPr>
-              <a:spcAft>
-                <a:spcPts val="0"/>
-              </a:spcAft>
-            </a:pPr>
-            <a:r>
-              <a:rPr sz="1100">
-                <a:solidFill>
-                  <a:srgbClr val="2D2D2D"/>
-                </a:solidFill>
-                <a:latin typeface="Consolas"/>
-              </a:rPr>
-              <a:t>SystemMaxUse=200M</a:t>
-            </a:r>
-          </a:p>
-          <a:p>
-            <a:pPr>
-              <a:spcAft>
-                <a:spcPts val="0"/>
-              </a:spcAft>
-            </a:pPr>
-            <a:r>
-              <a:rPr sz="1100">
-                <a:solidFill>
-                  <a:srgbClr val="2D2D2D"/>
-                </a:solidFill>
-                <a:latin typeface="Consolas"/>
-              </a:rPr>
-              <a:t>SystemKeepFree=100M</a:t>
-            </a:r>
-          </a:p>
-          <a:p>
-            <a:pPr>
-              <a:spcAft>
-                <a:spcPts val="0"/>
-              </a:spcAft>
-            </a:pPr>
-            <a:r>
-              <a:rPr sz="1100">
-                <a:solidFill>
-                  <a:srgbClr val="2D2D2D"/>
-                </a:solidFill>
-                <a:latin typeface="Consolas"/>
-              </a:rPr>
-              <a:t>MaxFileSec=1week</a:t>
-            </a:r>
-          </a:p>
-          <a:p>
-            <a:pPr>
-              <a:spcAft>
-                <a:spcPts val="0"/>
-              </a:spcAft>
-            </a:pPr>
-            <a:r>
-              <a:rPr sz="1100">
+              <a:t># By time window</a:t>
+            </a:r>
+          </a:p>
+          <a:p>
+            <a:pPr>
+              <a:spcAft>
+                <a:spcPts val="0"/>
+              </a:spcAft>
+            </a:pPr>
+            <a:r>
+              <a:rPr sz="1200">
+                <a:solidFill>
+                  <a:srgbClr val="2D2D2D"/>
+                </a:solidFill>
+                <a:latin typeface="Consolas"/>
+              </a:rPr>
+              <a:t>journalctl --since='2024-01-15 14:00' --until='2024-01-15 15:00'</a:t>
+            </a:r>
+          </a:p>
+          <a:p>
+            <a:pPr>
+              <a:spcAft>
+                <a:spcPts val="0"/>
+              </a:spcAft>
+            </a:pPr>
+            <a:r>
+              <a:rPr sz="1200">
+                <a:solidFill>
+                  <a:srgbClr val="2D2D2D"/>
+                </a:solidFill>
+                <a:latin typeface="Consolas"/>
+              </a:rPr>
+              <a:t>journalctl --since=yesterday</a:t>
+            </a:r>
+          </a:p>
+          <a:p>
+            <a:pPr>
+              <a:spcAft>
+                <a:spcPts val="0"/>
+              </a:spcAft>
+            </a:pPr>
+            <a:r>
+              <a:rPr sz="1200">
                 <a:solidFill>
                   <a:srgbClr val="2D2D2D"/>
                 </a:solidFill>
@@ -6604,39 +7969,71 @@
               </a:spcAft>
             </a:pPr>
             <a:r>
-              <a:rPr sz="1100">
-                <a:solidFill>
-                  <a:srgbClr val="2D2D2D"/>
-                </a:solidFill>
-                <a:latin typeface="Consolas"/>
-              </a:rPr>
-              <a:t>sudo mkdir -p /var/log/journal</a:t>
-            </a:r>
-          </a:p>
-          <a:p>
-            <a:pPr>
-              <a:spcAft>
-                <a:spcPts val="0"/>
-              </a:spcAft>
-            </a:pPr>
-            <a:r>
-              <a:rPr sz="1100">
-                <a:solidFill>
-                  <a:srgbClr val="2D2D2D"/>
-                </a:solidFill>
-                <a:latin typeface="Consolas"/>
-              </a:rPr>
-              <a:t>sudo systemctl restart systemd-journald</a:t>
-            </a:r>
-          </a:p>
-          <a:p>
-            <a:pPr>
-              <a:spcAft>
-                <a:spcPts val="0"/>
-              </a:spcAft>
-            </a:pPr>
-            <a:r>
-              <a:rPr sz="1100">
+              <a:rPr sz="1200" i="1">
+                <a:solidFill>
+                  <a:srgbClr val="808080"/>
+                </a:solidFill>
+                <a:latin typeface="Consolas"/>
+              </a:rPr>
+              <a:t># By boot</a:t>
+            </a:r>
+          </a:p>
+          <a:p>
+            <a:pPr>
+              <a:spcAft>
+                <a:spcPts val="0"/>
+              </a:spcAft>
+            </a:pPr>
+            <a:r>
+              <a:rPr sz="1200">
+                <a:solidFill>
+                  <a:srgbClr val="2D2D2D"/>
+                </a:solidFill>
+                <a:latin typeface="Consolas"/>
+              </a:rPr>
+              <a:t>journalctl -b                             # current boot</a:t>
+            </a:r>
+          </a:p>
+          <a:p>
+            <a:pPr>
+              <a:spcAft>
+                <a:spcPts val="0"/>
+              </a:spcAft>
+            </a:pPr>
+            <a:r>
+              <a:rPr sz="1200">
+                <a:solidFill>
+                  <a:srgbClr val="2D2D2D"/>
+                </a:solidFill>
+                <a:latin typeface="Consolas"/>
+              </a:rPr>
+              <a:t>journalctl -b -1                          # previous boot</a:t>
+            </a:r>
+          </a:p>
+          <a:p>
+            <a:pPr>
+              <a:spcAft>
+                <a:spcPts val="0"/>
+              </a:spcAft>
+            </a:pPr>
+            <a:r>
+              <a:rPr sz="1200">
+                <a:solidFill>
+                  <a:srgbClr val="2D2D2D"/>
+                </a:solidFill>
+                <a:latin typeface="Consolas"/>
+              </a:rPr>
+              <a:t>journalctl --list-boots                   # list all stored</a:t>
+            </a:r>
+          </a:p>
+          <a:p>
+            <a:pPr>
+              <a:spcAft>
+                <a:spcPts val="0"/>
+              </a:spcAft>
+            </a:pPr>
+            <a:r>
+              <a:rPr sz="1200">
                 <a:solidFill>
                   <a:srgbClr val="2D2D2D"/>
                 </a:solidFill>
@@ -6652,23 +8049,55 @@
               </a:spcAft>
             </a:pPr>
             <a:r>
-              <a:rPr sz="1100" i="1">
+              <a:rPr sz="1200" i="1">
                 <a:solidFill>
                   <a:srgbClr val="808080"/>
                 </a:solidFill>
                 <a:latin typeface="Consolas"/>
               </a:rPr>
-              <a:t># Now journalctl -b -1 will work across reboots</a:t>
-            </a:r>
-          </a:p>
-          <a:p>
-            <a:pPr>
-              <a:spcAft>
-                <a:spcPts val="0"/>
-              </a:spcAft>
-            </a:pPr>
-            <a:r>
-              <a:rPr sz="1100">
+              <a:t># By priority (0=emerg, 7=debug)</a:t>
+            </a:r>
+          </a:p>
+          <a:p>
+            <a:pPr>
+              <a:spcAft>
+                <a:spcPts val="0"/>
+              </a:spcAft>
+            </a:pPr>
+            <a:r>
+              <a:rPr sz="1200">
+                <a:solidFill>
+                  <a:srgbClr val="2D2D2D"/>
+                </a:solidFill>
+                <a:latin typeface="Consolas"/>
+              </a:rPr>
+              <a:t>journalctl -p err -b</a:t>
+            </a:r>
+          </a:p>
+          <a:p>
+            <a:pPr>
+              <a:spcAft>
+                <a:spcPts val="0"/>
+              </a:spcAft>
+            </a:pPr>
+            <a:r>
+              <a:rPr sz="1200">
+                <a:solidFill>
+                  <a:srgbClr val="2D2D2D"/>
+                </a:solidFill>
+                <a:latin typeface="Consolas"/>
+              </a:rPr>
+              <a:t>journalctl -p warn..err -b</a:t>
+            </a:r>
+          </a:p>
+          <a:p>
+            <a:pPr>
+              <a:spcAft>
+                <a:spcPts val="0"/>
+              </a:spcAft>
+            </a:pPr>
+            <a:r>
+              <a:rPr sz="1200">
                 <a:solidFill>
                   <a:srgbClr val="2D2D2D"/>
                 </a:solidFill>
@@ -6684,189 +8113,93 @@
               </a:spcAft>
             </a:pPr>
             <a:r>
-              <a:rPr sz="1100" i="1">
+              <a:rPr sz="1200" i="1">
                 <a:solidFill>
                   <a:srgbClr val="808080"/>
                 </a:solidFill>
                 <a:latin typeface="Consolas"/>
               </a:rPr>
-              <a:t># Capture core dumps for crashed processes</a:t>
-            </a:r>
-          </a:p>
-          <a:p>
-            <a:pPr>
-              <a:spcAft>
-                <a:spcPts val="0"/>
-              </a:spcAft>
-            </a:pPr>
-            <a:r>
-              <a:rPr sz="1100" i="1">
+              <a:t># By process</a:t>
+            </a:r>
+          </a:p>
+          <a:p>
+            <a:pPr>
+              <a:spcAft>
+                <a:spcPts val="0"/>
+              </a:spcAft>
+            </a:pPr>
+            <a:r>
+              <a:rPr sz="1200">
+                <a:solidFill>
+                  <a:srgbClr val="2D2D2D"/>
+                </a:solidFill>
+                <a:latin typeface="Consolas"/>
+              </a:rPr>
+              <a:t>journalctl _PID=1234</a:t>
+            </a:r>
+          </a:p>
+          <a:p>
+            <a:pPr>
+              <a:spcAft>
+                <a:spcPts val="0"/>
+              </a:spcAft>
+            </a:pPr>
+            <a:r>
+              <a:rPr sz="1200">
+                <a:solidFill>
+                  <a:srgbClr val="2D2D2D"/>
+                </a:solidFill>
+                <a:latin typeface="Consolas"/>
+              </a:rPr>
+              <a:t>journalctl _COMM=hello-trainergw</a:t>
+            </a:r>
+          </a:p>
+          <a:p>
+            <a:pPr>
+              <a:spcAft>
+                <a:spcPts val="0"/>
+              </a:spcAft>
+            </a:pPr>
+            <a:r>
+              <a:rPr sz="1200">
+                <a:solidFill>
+                  <a:srgbClr val="2D2D2D"/>
+                </a:solidFill>
+                <a:latin typeface="Consolas"/>
+              </a:rPr>
+              <a:t> </a:t>
+            </a:r>
+          </a:p>
+          <a:p>
+            <a:pPr>
+              <a:spcAft>
+                <a:spcPts val="0"/>
+              </a:spcAft>
+            </a:pPr>
+            <a:r>
+              <a:rPr sz="1200" i="1">
                 <a:solidFill>
                   <a:srgbClr val="808080"/>
                 </a:solidFill>
                 <a:latin typeface="Consolas"/>
               </a:rPr>
-              <a:t># /etc/systemd/coredump.conf:</a:t>
-            </a:r>
-          </a:p>
-          <a:p>
-            <a:pPr>
-              <a:spcAft>
-                <a:spcPts val="0"/>
-              </a:spcAft>
-            </a:pPr>
-            <a:r>
-              <a:rPr sz="1100">
-                <a:solidFill>
-                  <a:srgbClr val="2D2D2D"/>
-                </a:solidFill>
-                <a:latin typeface="Consolas"/>
-              </a:rPr>
-              <a:t>[Coredump]</a:t>
-            </a:r>
-          </a:p>
-          <a:p>
-            <a:pPr>
-              <a:spcAft>
-                <a:spcPts val="0"/>
-              </a:spcAft>
-            </a:pPr>
-            <a:r>
-              <a:rPr sz="1100">
-                <a:solidFill>
-                  <a:srgbClr val="2D2D2D"/>
-                </a:solidFill>
-                <a:latin typeface="Consolas"/>
-              </a:rPr>
-              <a:t>Storage=external</a:t>
-            </a:r>
-          </a:p>
-          <a:p>
-            <a:pPr>
-              <a:spcAft>
-                <a:spcPts val="0"/>
-              </a:spcAft>
-            </a:pPr>
-            <a:r>
-              <a:rPr sz="1100">
-                <a:solidFill>
-                  <a:srgbClr val="2D2D2D"/>
-                </a:solidFill>
-                <a:latin typeface="Consolas"/>
-              </a:rPr>
-              <a:t>Compress=yes</a:t>
-            </a:r>
-          </a:p>
-          <a:p>
-            <a:pPr>
-              <a:spcAft>
-                <a:spcPts val="0"/>
-              </a:spcAft>
-            </a:pPr>
-            <a:r>
-              <a:rPr sz="1100">
-                <a:solidFill>
-                  <a:srgbClr val="2D2D2D"/>
-                </a:solidFill>
-                <a:latin typeface="Consolas"/>
-              </a:rPr>
-              <a:t>ProcessSizeMax=1G</a:t>
-            </a:r>
-          </a:p>
-          <a:p>
-            <a:pPr>
-              <a:spcAft>
-                <a:spcPts val="0"/>
-              </a:spcAft>
-            </a:pPr>
-            <a:r>
-              <a:rPr sz="1100">
-                <a:solidFill>
-                  <a:srgbClr val="2D2D2D"/>
-                </a:solidFill>
-                <a:latin typeface="Consolas"/>
-              </a:rPr>
-              <a:t>ExternalSizeMax=1G</a:t>
-            </a:r>
-          </a:p>
-          <a:p>
-            <a:pPr>
-              <a:spcAft>
-                <a:spcPts val="0"/>
-              </a:spcAft>
-            </a:pPr>
-            <a:r>
-              <a:rPr sz="1100">
-                <a:solidFill>
-                  <a:srgbClr val="2D2D2D"/>
-                </a:solidFill>
-                <a:latin typeface="Consolas"/>
-              </a:rPr>
-              <a:t> </a:t>
-            </a:r>
-          </a:p>
-          <a:p>
-            <a:pPr>
-              <a:spcAft>
-                <a:spcPts val="0"/>
-              </a:spcAft>
-            </a:pPr>
-            <a:r>
-              <a:rPr sz="1100" i="1">
-                <a:solidFill>
-                  <a:srgbClr val="808080"/>
-                </a:solidFill>
-                <a:latin typeface="Consolas"/>
-              </a:rPr>
-              <a:t># List captured crashes</a:t>
-            </a:r>
-          </a:p>
-          <a:p>
-            <a:pPr>
-              <a:spcAft>
-                <a:spcPts val="0"/>
-              </a:spcAft>
-            </a:pPr>
-            <a:r>
-              <a:rPr sz="1100">
-                <a:solidFill>
-                  <a:srgbClr val="2D2D2D"/>
-                </a:solidFill>
-                <a:latin typeface="Consolas"/>
-              </a:rPr>
-              <a:t>coredumpctl list</a:t>
-            </a:r>
-          </a:p>
-          <a:p>
-            <a:pPr>
-              <a:spcAft>
-                <a:spcPts val="0"/>
-              </a:spcAft>
-            </a:pPr>
-            <a:r>
-              <a:rPr sz="1100">
-                <a:solidFill>
-                  <a:srgbClr val="2D2D2D"/>
-                </a:solidFill>
-                <a:latin typeface="Consolas"/>
-              </a:rPr>
-              <a:t>coredumpctl info &lt;PID&gt;</a:t>
-            </a:r>
-          </a:p>
-          <a:p>
-            <a:pPr>
-              <a:spcAft>
-                <a:spcPts val="0"/>
-              </a:spcAft>
-            </a:pPr>
-            <a:r>
-              <a:rPr sz="1100">
-                <a:solidFill>
-                  <a:srgbClr val="2D2D2D"/>
-                </a:solidFill>
-                <a:latin typeface="Consolas"/>
-              </a:rPr>
-              <a:t>coredumpctl gdb &lt;PID&gt;      # opens gdb on the crash</a:t>
+              <a:t># Watch for errors as they happen</a:t>
+            </a:r>
+          </a:p>
+          <a:p>
+            <a:pPr>
+              <a:spcAft>
+                <a:spcPts val="0"/>
+              </a:spcAft>
+            </a:pPr>
+            <a:r>
+              <a:rPr sz="1200">
+                <a:solidFill>
+                  <a:srgbClr val="2D2D2D"/>
+                </a:solidFill>
+                <a:latin typeface="Consolas"/>
+              </a:rPr>
+              <a:t>journalctl -f -p err</a:t>
             </a:r>
           </a:p>
         </p:txBody>
@@ -6879,8 +8212,8 @@
 </p:sld>
 </file>
 
-<file path=ppt/slides/slide13.xml><?xml version="1.0" encoding="utf-8"?>
-<p:sld xmlns:a="http://schemas.openxmlformats.org/drawingml/2006/main" xmlns:p="http://schemas.openxmlformats.org/presentationml/2006/main" xmlns:r="http://schemas.openxmlformats.org/officeDocument/2006/relationships">
+<file path=ppt/slides/slide6.xml><?xml version="1.0" encoding="utf-8"?>
+<p:sld xmlns:a="http://schemas.openxmlformats.org/drawingml/2006/main" xmlns:r="http://schemas.openxmlformats.org/officeDocument/2006/relationships" xmlns:p="http://schemas.openxmlformats.org/presentationml/2006/main">
   <p:cSld>
     <p:spTree>
       <p:nvGrpSpPr>
@@ -6888,7 +8221,14 @@
         <p:cNvGrpSpPr/>
         <p:nvPr/>
       </p:nvGrpSpPr>
-      <p:grpSpPr/>
+      <p:grpSpPr>
+        <a:xfrm>
+          <a:off x="0" y="0"/>
+          <a:ext cx="0" cy="0"/>
+          <a:chOff x="0" y="0"/>
+          <a:chExt cx="0" cy="0"/>
+        </a:xfrm>
+      </p:grpSpPr>
       <p:sp>
         <p:nvSpPr>
           <p:cNvPr id="2" name="Title 1"/>
@@ -6905,13 +8245,10 @@
           <a:lstStyle/>
           <a:p>
             <a:r>
-              <a:rPr sz="3200" b="1">
-                <a:solidFill>
-                  <a:srgbClr val="CC0066"/>
-                </a:solidFill>
+              <a:rPr sz="3200" b="1" dirty="0">
                 <a:latin typeface="Calibri"/>
               </a:rPr>
-              <a:t>Networking in the Field</a:t>
+              <a:t>Persistent Logs &amp; Crash Collection</a:t>
             </a:r>
           </a:p>
         </p:txBody>
@@ -6933,7 +8270,945 @@
           <a:noFill/>
         </p:spPr>
         <p:txBody>
-          <a:bodyPr wrap="square" anchor="t" lIns="45720" rIns="45720">
+          <a:bodyPr wrap="square" lIns="45720" rIns="45720" anchor="t">
+            <a:spAutoFit/>
+          </a:bodyPr>
+          <a:lstStyle/>
+          <a:p>
+            <a:pPr algn="l"/>
+            <a:r>
+              <a:rPr sz="1500" b="0" i="1">
+                <a:solidFill>
+                  <a:srgbClr val="666666"/>
+                </a:solidFill>
+                <a:latin typeface="Calibri"/>
+              </a:rPr>
+              <a:t>Make sure logs survive a reboot, and crashes get captured.</a:t>
+            </a:r>
+          </a:p>
+        </p:txBody>
+      </p:sp>
+      <p:sp>
+        <p:nvSpPr>
+          <p:cNvPr id="4" name="Rounded Rectangle 3"/>
+          <p:cNvSpPr/>
+          <p:nvPr/>
+        </p:nvSpPr>
+        <p:spPr>
+          <a:xfrm>
+            <a:off x="822960" y="1783080"/>
+            <a:ext cx="10515600" cy="4572000"/>
+          </a:xfrm>
+          <a:prstGeom prst="roundRect">
+            <a:avLst/>
+          </a:prstGeom>
+          <a:solidFill>
+            <a:srgbClr val="F5F5F5"/>
+          </a:solidFill>
+          <a:ln w="6350">
+            <a:solidFill>
+              <a:srgbClr val="D0D0D0"/>
+            </a:solidFill>
+          </a:ln>
+          <a:effectLst/>
+        </p:spPr>
+        <p:style>
+          <a:lnRef idx="1">
+            <a:schemeClr val="accent1"/>
+          </a:lnRef>
+          <a:fillRef idx="3">
+            <a:schemeClr val="accent1"/>
+          </a:fillRef>
+          <a:effectRef idx="2">
+            <a:schemeClr val="accent1"/>
+          </a:effectRef>
+          <a:fontRef idx="minor">
+            <a:schemeClr val="lt1"/>
+          </a:fontRef>
+        </p:style>
+        <p:txBody>
+          <a:bodyPr rtlCol="0" anchor="ctr"/>
+          <a:lstStyle/>
+          <a:p>
+            <a:pPr algn="ctr"/>
+            <a:endParaRPr/>
+          </a:p>
+        </p:txBody>
+      </p:sp>
+      <p:sp>
+        <p:nvSpPr>
+          <p:cNvPr id="5" name="Rectangle 4"/>
+          <p:cNvSpPr/>
+          <p:nvPr/>
+        </p:nvSpPr>
+        <p:spPr>
+          <a:xfrm>
+            <a:off x="822960" y="1783080"/>
+            <a:ext cx="73152" cy="4572000"/>
+          </a:xfrm>
+          <a:prstGeom prst="rect">
+            <a:avLst/>
+          </a:prstGeom>
+          <a:solidFill>
+            <a:srgbClr val="CC0066"/>
+          </a:solidFill>
+          <a:ln>
+            <a:noFill/>
+          </a:ln>
+          <a:effectLst/>
+        </p:spPr>
+        <p:style>
+          <a:lnRef idx="1">
+            <a:schemeClr val="accent1"/>
+          </a:lnRef>
+          <a:fillRef idx="3">
+            <a:schemeClr val="accent1"/>
+          </a:fillRef>
+          <a:effectRef idx="2">
+            <a:schemeClr val="accent1"/>
+          </a:effectRef>
+          <a:fontRef idx="minor">
+            <a:schemeClr val="lt1"/>
+          </a:fontRef>
+        </p:style>
+        <p:txBody>
+          <a:bodyPr rtlCol="0" anchor="ctr"/>
+          <a:lstStyle/>
+          <a:p>
+            <a:pPr algn="ctr"/>
+            <a:endParaRPr/>
+          </a:p>
+        </p:txBody>
+      </p:sp>
+      <p:sp>
+        <p:nvSpPr>
+          <p:cNvPr id="6" name="TextBox 5"/>
+          <p:cNvSpPr txBox="1"/>
+          <p:nvPr/>
+        </p:nvSpPr>
+        <p:spPr>
+          <a:xfrm>
+            <a:off x="1197864" y="1714590"/>
+            <a:ext cx="10241280" cy="4708981"/>
+          </a:xfrm>
+          <a:prstGeom prst="rect">
+            <a:avLst/>
+          </a:prstGeom>
+          <a:noFill/>
+        </p:spPr>
+        <p:txBody>
+          <a:bodyPr wrap="square" lIns="45720" rIns="45720">
+            <a:spAutoFit/>
+          </a:bodyPr>
+          <a:lstStyle/>
+          <a:p>
+            <a:pPr>
+              <a:spcAft>
+                <a:spcPts val="0"/>
+              </a:spcAft>
+            </a:pPr>
+            <a:r>
+              <a:rPr sz="1200" i="1" dirty="0">
+                <a:solidFill>
+                  <a:srgbClr val="808080"/>
+                </a:solidFill>
+                <a:latin typeface="Consolas"/>
+              </a:rPr>
+              <a:t># Enable persistent </a:t>
+            </a:r>
+            <a:r>
+              <a:rPr sz="1200" i="1" dirty="0" err="1">
+                <a:solidFill>
+                  <a:srgbClr val="808080"/>
+                </a:solidFill>
+                <a:latin typeface="Consolas"/>
+              </a:rPr>
+              <a:t>journald</a:t>
+            </a:r>
+            <a:r>
+              <a:rPr sz="1200" i="1" dirty="0">
+                <a:solidFill>
+                  <a:srgbClr val="808080"/>
+                </a:solidFill>
+                <a:latin typeface="Consolas"/>
+              </a:rPr>
+              <a:t> storage</a:t>
+            </a:r>
+          </a:p>
+          <a:p>
+            <a:pPr>
+              <a:spcAft>
+                <a:spcPts val="0"/>
+              </a:spcAft>
+            </a:pPr>
+            <a:r>
+              <a:rPr sz="1200" i="1" dirty="0">
+                <a:solidFill>
+                  <a:srgbClr val="808080"/>
+                </a:solidFill>
+                <a:latin typeface="Consolas"/>
+              </a:rPr>
+              <a:t># /</a:t>
+            </a:r>
+            <a:r>
+              <a:rPr sz="1200" i="1" dirty="0" err="1">
+                <a:solidFill>
+                  <a:srgbClr val="808080"/>
+                </a:solidFill>
+                <a:latin typeface="Consolas"/>
+              </a:rPr>
+              <a:t>etc</a:t>
+            </a:r>
+            <a:r>
+              <a:rPr sz="1200" i="1" dirty="0">
+                <a:solidFill>
+                  <a:srgbClr val="808080"/>
+                </a:solidFill>
+                <a:latin typeface="Consolas"/>
+              </a:rPr>
+              <a:t>/</a:t>
+            </a:r>
+            <a:r>
+              <a:rPr sz="1200" i="1" dirty="0" err="1">
+                <a:solidFill>
+                  <a:srgbClr val="808080"/>
+                </a:solidFill>
+                <a:latin typeface="Consolas"/>
+              </a:rPr>
+              <a:t>systemd</a:t>
+            </a:r>
+            <a:r>
+              <a:rPr sz="1200" i="1" dirty="0">
+                <a:solidFill>
+                  <a:srgbClr val="808080"/>
+                </a:solidFill>
+                <a:latin typeface="Consolas"/>
+              </a:rPr>
+              <a:t>/</a:t>
+            </a:r>
+            <a:r>
+              <a:rPr sz="1200" i="1" dirty="0" err="1">
+                <a:solidFill>
+                  <a:srgbClr val="808080"/>
+                </a:solidFill>
+                <a:latin typeface="Consolas"/>
+              </a:rPr>
+              <a:t>journald.conf</a:t>
+            </a:r>
+            <a:r>
+              <a:rPr sz="1200" i="1" dirty="0">
+                <a:solidFill>
+                  <a:srgbClr val="808080"/>
+                </a:solidFill>
+                <a:latin typeface="Consolas"/>
+              </a:rPr>
+              <a:t>:</a:t>
+            </a:r>
+          </a:p>
+          <a:p>
+            <a:pPr>
+              <a:spcAft>
+                <a:spcPts val="0"/>
+              </a:spcAft>
+            </a:pPr>
+            <a:r>
+              <a:rPr sz="1200" dirty="0">
+                <a:solidFill>
+                  <a:srgbClr val="2D2D2D"/>
+                </a:solidFill>
+                <a:latin typeface="Consolas"/>
+              </a:rPr>
+              <a:t>[Journal]</a:t>
+            </a:r>
+          </a:p>
+          <a:p>
+            <a:pPr>
+              <a:spcAft>
+                <a:spcPts val="0"/>
+              </a:spcAft>
+            </a:pPr>
+            <a:r>
+              <a:rPr sz="1200" dirty="0">
+                <a:solidFill>
+                  <a:srgbClr val="2D2D2D"/>
+                </a:solidFill>
+                <a:latin typeface="Consolas"/>
+              </a:rPr>
+              <a:t>Storage=persistent</a:t>
+            </a:r>
+          </a:p>
+          <a:p>
+            <a:pPr>
+              <a:spcAft>
+                <a:spcPts val="0"/>
+              </a:spcAft>
+            </a:pPr>
+            <a:r>
+              <a:rPr sz="1200" dirty="0" err="1">
+                <a:solidFill>
+                  <a:srgbClr val="2D2D2D"/>
+                </a:solidFill>
+                <a:latin typeface="Consolas"/>
+              </a:rPr>
+              <a:t>SystemMaxUse</a:t>
+            </a:r>
+            <a:r>
+              <a:rPr sz="1200" dirty="0">
+                <a:solidFill>
+                  <a:srgbClr val="2D2D2D"/>
+                </a:solidFill>
+                <a:latin typeface="Consolas"/>
+              </a:rPr>
+              <a:t>=200M</a:t>
+            </a:r>
+          </a:p>
+          <a:p>
+            <a:pPr>
+              <a:spcAft>
+                <a:spcPts val="0"/>
+              </a:spcAft>
+            </a:pPr>
+            <a:r>
+              <a:rPr sz="1200" dirty="0" err="1">
+                <a:solidFill>
+                  <a:srgbClr val="2D2D2D"/>
+                </a:solidFill>
+                <a:latin typeface="Consolas"/>
+              </a:rPr>
+              <a:t>SystemKeepFree</a:t>
+            </a:r>
+            <a:r>
+              <a:rPr sz="1200" dirty="0">
+                <a:solidFill>
+                  <a:srgbClr val="2D2D2D"/>
+                </a:solidFill>
+                <a:latin typeface="Consolas"/>
+              </a:rPr>
+              <a:t>=100M</a:t>
+            </a:r>
+          </a:p>
+          <a:p>
+            <a:pPr>
+              <a:spcAft>
+                <a:spcPts val="0"/>
+              </a:spcAft>
+            </a:pPr>
+            <a:r>
+              <a:rPr sz="1200" dirty="0" err="1">
+                <a:solidFill>
+                  <a:srgbClr val="2D2D2D"/>
+                </a:solidFill>
+                <a:latin typeface="Consolas"/>
+              </a:rPr>
+              <a:t>MaxFileSec</a:t>
+            </a:r>
+            <a:r>
+              <a:rPr sz="1200" dirty="0">
+                <a:solidFill>
+                  <a:srgbClr val="2D2D2D"/>
+                </a:solidFill>
+                <a:latin typeface="Consolas"/>
+              </a:rPr>
+              <a:t>=1week</a:t>
+            </a:r>
+          </a:p>
+          <a:p>
+            <a:pPr>
+              <a:spcAft>
+                <a:spcPts val="0"/>
+              </a:spcAft>
+            </a:pPr>
+            <a:r>
+              <a:rPr sz="1200" dirty="0">
+                <a:solidFill>
+                  <a:srgbClr val="2D2D2D"/>
+                </a:solidFill>
+                <a:latin typeface="Consolas"/>
+              </a:rPr>
+              <a:t> </a:t>
+            </a:r>
+          </a:p>
+          <a:p>
+            <a:pPr>
+              <a:spcAft>
+                <a:spcPts val="0"/>
+              </a:spcAft>
+            </a:pPr>
+            <a:r>
+              <a:rPr sz="1200" dirty="0" err="1">
+                <a:solidFill>
+                  <a:srgbClr val="2D2D2D"/>
+                </a:solidFill>
+                <a:latin typeface="Consolas"/>
+              </a:rPr>
+              <a:t>sudo</a:t>
+            </a:r>
+            <a:r>
+              <a:rPr sz="1200" dirty="0">
+                <a:solidFill>
+                  <a:srgbClr val="2D2D2D"/>
+                </a:solidFill>
+                <a:latin typeface="Consolas"/>
+              </a:rPr>
+              <a:t> </a:t>
+            </a:r>
+            <a:r>
+              <a:rPr sz="1200" dirty="0" err="1">
+                <a:solidFill>
+                  <a:srgbClr val="2D2D2D"/>
+                </a:solidFill>
+                <a:latin typeface="Consolas"/>
+              </a:rPr>
+              <a:t>mkdir</a:t>
+            </a:r>
+            <a:r>
+              <a:rPr sz="1200" dirty="0">
+                <a:solidFill>
+                  <a:srgbClr val="2D2D2D"/>
+                </a:solidFill>
+                <a:latin typeface="Consolas"/>
+              </a:rPr>
+              <a:t> -p /var/log/journal</a:t>
+            </a:r>
+          </a:p>
+          <a:p>
+            <a:pPr>
+              <a:spcAft>
+                <a:spcPts val="0"/>
+              </a:spcAft>
+            </a:pPr>
+            <a:r>
+              <a:rPr sz="1200" dirty="0" err="1">
+                <a:solidFill>
+                  <a:srgbClr val="2D2D2D"/>
+                </a:solidFill>
+                <a:latin typeface="Consolas"/>
+              </a:rPr>
+              <a:t>sudo</a:t>
+            </a:r>
+            <a:r>
+              <a:rPr sz="1200" dirty="0">
+                <a:solidFill>
+                  <a:srgbClr val="2D2D2D"/>
+                </a:solidFill>
+                <a:latin typeface="Consolas"/>
+              </a:rPr>
+              <a:t> </a:t>
+            </a:r>
+            <a:r>
+              <a:rPr sz="1200" dirty="0" err="1">
+                <a:solidFill>
+                  <a:srgbClr val="2D2D2D"/>
+                </a:solidFill>
+                <a:latin typeface="Consolas"/>
+              </a:rPr>
+              <a:t>systemctl</a:t>
+            </a:r>
+            <a:r>
+              <a:rPr sz="1200" dirty="0">
+                <a:solidFill>
+                  <a:srgbClr val="2D2D2D"/>
+                </a:solidFill>
+                <a:latin typeface="Consolas"/>
+              </a:rPr>
+              <a:t> restart </a:t>
+            </a:r>
+            <a:r>
+              <a:rPr sz="1200" dirty="0" err="1">
+                <a:solidFill>
+                  <a:srgbClr val="2D2D2D"/>
+                </a:solidFill>
+                <a:latin typeface="Consolas"/>
+              </a:rPr>
+              <a:t>systemd-journald</a:t>
+            </a:r>
+            <a:endParaRPr sz="1200" dirty="0">
+              <a:solidFill>
+                <a:srgbClr val="2D2D2D"/>
+              </a:solidFill>
+              <a:latin typeface="Consolas"/>
+            </a:endParaRPr>
+          </a:p>
+          <a:p>
+            <a:pPr>
+              <a:spcAft>
+                <a:spcPts val="0"/>
+              </a:spcAft>
+            </a:pPr>
+            <a:r>
+              <a:rPr sz="1200" dirty="0">
+                <a:solidFill>
+                  <a:srgbClr val="2D2D2D"/>
+                </a:solidFill>
+                <a:latin typeface="Consolas"/>
+              </a:rPr>
+              <a:t> </a:t>
+            </a:r>
+          </a:p>
+          <a:p>
+            <a:pPr>
+              <a:spcAft>
+                <a:spcPts val="0"/>
+              </a:spcAft>
+            </a:pPr>
+            <a:r>
+              <a:rPr sz="1200" i="1" dirty="0">
+                <a:solidFill>
+                  <a:srgbClr val="808080"/>
+                </a:solidFill>
+                <a:latin typeface="Consolas"/>
+              </a:rPr>
+              <a:t># Now </a:t>
+            </a:r>
+            <a:r>
+              <a:rPr sz="1200" i="1" dirty="0" err="1">
+                <a:solidFill>
+                  <a:srgbClr val="808080"/>
+                </a:solidFill>
+                <a:latin typeface="Consolas"/>
+              </a:rPr>
+              <a:t>journalctl</a:t>
+            </a:r>
+            <a:r>
+              <a:rPr sz="1200" i="1" dirty="0">
+                <a:solidFill>
+                  <a:srgbClr val="808080"/>
+                </a:solidFill>
+                <a:latin typeface="Consolas"/>
+              </a:rPr>
+              <a:t> -b -1 will work across reboots</a:t>
+            </a:r>
+          </a:p>
+          <a:p>
+            <a:pPr>
+              <a:spcAft>
+                <a:spcPts val="0"/>
+              </a:spcAft>
+            </a:pPr>
+            <a:r>
+              <a:rPr sz="1200" dirty="0">
+                <a:solidFill>
+                  <a:srgbClr val="2D2D2D"/>
+                </a:solidFill>
+                <a:latin typeface="Consolas"/>
+              </a:rPr>
+              <a:t> </a:t>
+            </a:r>
+          </a:p>
+          <a:p>
+            <a:pPr>
+              <a:spcAft>
+                <a:spcPts val="0"/>
+              </a:spcAft>
+            </a:pPr>
+            <a:r>
+              <a:rPr sz="1200" i="1" dirty="0">
+                <a:solidFill>
+                  <a:srgbClr val="808080"/>
+                </a:solidFill>
+                <a:latin typeface="Consolas"/>
+              </a:rPr>
+              <a:t># Capture core dumps for crashed processes</a:t>
+            </a:r>
+          </a:p>
+          <a:p>
+            <a:pPr>
+              <a:spcAft>
+                <a:spcPts val="0"/>
+              </a:spcAft>
+            </a:pPr>
+            <a:r>
+              <a:rPr sz="1200" i="1" dirty="0">
+                <a:solidFill>
+                  <a:srgbClr val="808080"/>
+                </a:solidFill>
+                <a:latin typeface="Consolas"/>
+              </a:rPr>
+              <a:t># /</a:t>
+            </a:r>
+            <a:r>
+              <a:rPr sz="1200" i="1" dirty="0" err="1">
+                <a:solidFill>
+                  <a:srgbClr val="808080"/>
+                </a:solidFill>
+                <a:latin typeface="Consolas"/>
+              </a:rPr>
+              <a:t>etc</a:t>
+            </a:r>
+            <a:r>
+              <a:rPr sz="1200" i="1" dirty="0">
+                <a:solidFill>
+                  <a:srgbClr val="808080"/>
+                </a:solidFill>
+                <a:latin typeface="Consolas"/>
+              </a:rPr>
+              <a:t>/</a:t>
+            </a:r>
+            <a:r>
+              <a:rPr sz="1200" i="1" dirty="0" err="1">
+                <a:solidFill>
+                  <a:srgbClr val="808080"/>
+                </a:solidFill>
+                <a:latin typeface="Consolas"/>
+              </a:rPr>
+              <a:t>systemd</a:t>
+            </a:r>
+            <a:r>
+              <a:rPr sz="1200" i="1" dirty="0">
+                <a:solidFill>
+                  <a:srgbClr val="808080"/>
+                </a:solidFill>
+                <a:latin typeface="Consolas"/>
+              </a:rPr>
+              <a:t>/</a:t>
+            </a:r>
+            <a:r>
+              <a:rPr sz="1200" i="1" dirty="0" err="1">
+                <a:solidFill>
+                  <a:srgbClr val="808080"/>
+                </a:solidFill>
+                <a:latin typeface="Consolas"/>
+              </a:rPr>
+              <a:t>coredump.conf</a:t>
+            </a:r>
+            <a:r>
+              <a:rPr sz="1200" i="1" dirty="0">
+                <a:solidFill>
+                  <a:srgbClr val="808080"/>
+                </a:solidFill>
+                <a:latin typeface="Consolas"/>
+              </a:rPr>
+              <a:t>:</a:t>
+            </a:r>
+          </a:p>
+          <a:p>
+            <a:pPr>
+              <a:spcAft>
+                <a:spcPts val="0"/>
+              </a:spcAft>
+            </a:pPr>
+            <a:r>
+              <a:rPr sz="1200" dirty="0">
+                <a:solidFill>
+                  <a:srgbClr val="2D2D2D"/>
+                </a:solidFill>
+                <a:latin typeface="Consolas"/>
+              </a:rPr>
+              <a:t>[</a:t>
+            </a:r>
+            <a:r>
+              <a:rPr sz="1200" dirty="0" err="1">
+                <a:solidFill>
+                  <a:srgbClr val="2D2D2D"/>
+                </a:solidFill>
+                <a:latin typeface="Consolas"/>
+              </a:rPr>
+              <a:t>Coredump</a:t>
+            </a:r>
+            <a:r>
+              <a:rPr sz="1200" dirty="0">
+                <a:solidFill>
+                  <a:srgbClr val="2D2D2D"/>
+                </a:solidFill>
+                <a:latin typeface="Consolas"/>
+              </a:rPr>
+              <a:t>]</a:t>
+            </a:r>
+          </a:p>
+          <a:p>
+            <a:pPr>
+              <a:spcAft>
+                <a:spcPts val="0"/>
+              </a:spcAft>
+            </a:pPr>
+            <a:r>
+              <a:rPr sz="1200" dirty="0">
+                <a:solidFill>
+                  <a:srgbClr val="2D2D2D"/>
+                </a:solidFill>
+                <a:latin typeface="Consolas"/>
+              </a:rPr>
+              <a:t>Storage=external</a:t>
+            </a:r>
+          </a:p>
+          <a:p>
+            <a:pPr>
+              <a:spcAft>
+                <a:spcPts val="0"/>
+              </a:spcAft>
+            </a:pPr>
+            <a:r>
+              <a:rPr sz="1200" dirty="0">
+                <a:solidFill>
+                  <a:srgbClr val="2D2D2D"/>
+                </a:solidFill>
+                <a:latin typeface="Consolas"/>
+              </a:rPr>
+              <a:t>Compress=yes</a:t>
+            </a:r>
+          </a:p>
+          <a:p>
+            <a:pPr>
+              <a:spcAft>
+                <a:spcPts val="0"/>
+              </a:spcAft>
+            </a:pPr>
+            <a:r>
+              <a:rPr sz="1200" dirty="0" err="1">
+                <a:solidFill>
+                  <a:srgbClr val="2D2D2D"/>
+                </a:solidFill>
+                <a:latin typeface="Consolas"/>
+              </a:rPr>
+              <a:t>ProcessSizeMax</a:t>
+            </a:r>
+            <a:r>
+              <a:rPr sz="1200" dirty="0">
+                <a:solidFill>
+                  <a:srgbClr val="2D2D2D"/>
+                </a:solidFill>
+                <a:latin typeface="Consolas"/>
+              </a:rPr>
+              <a:t>=1G</a:t>
+            </a:r>
+          </a:p>
+          <a:p>
+            <a:pPr>
+              <a:spcAft>
+                <a:spcPts val="0"/>
+              </a:spcAft>
+            </a:pPr>
+            <a:r>
+              <a:rPr sz="1200" dirty="0" err="1">
+                <a:solidFill>
+                  <a:srgbClr val="2D2D2D"/>
+                </a:solidFill>
+                <a:latin typeface="Consolas"/>
+              </a:rPr>
+              <a:t>ExternalSizeMax</a:t>
+            </a:r>
+            <a:r>
+              <a:rPr sz="1200" dirty="0">
+                <a:solidFill>
+                  <a:srgbClr val="2D2D2D"/>
+                </a:solidFill>
+                <a:latin typeface="Consolas"/>
+              </a:rPr>
+              <a:t>=1G</a:t>
+            </a:r>
+          </a:p>
+          <a:p>
+            <a:pPr>
+              <a:spcAft>
+                <a:spcPts val="0"/>
+              </a:spcAft>
+            </a:pPr>
+            <a:r>
+              <a:rPr sz="1200" dirty="0">
+                <a:solidFill>
+                  <a:srgbClr val="2D2D2D"/>
+                </a:solidFill>
+                <a:latin typeface="Consolas"/>
+              </a:rPr>
+              <a:t> </a:t>
+            </a:r>
+          </a:p>
+          <a:p>
+            <a:pPr>
+              <a:spcAft>
+                <a:spcPts val="0"/>
+              </a:spcAft>
+            </a:pPr>
+            <a:r>
+              <a:rPr sz="1200" i="1" dirty="0">
+                <a:solidFill>
+                  <a:srgbClr val="808080"/>
+                </a:solidFill>
+                <a:latin typeface="Consolas"/>
+              </a:rPr>
+              <a:t># List captured crashes</a:t>
+            </a:r>
+          </a:p>
+          <a:p>
+            <a:pPr>
+              <a:spcAft>
+                <a:spcPts val="0"/>
+              </a:spcAft>
+            </a:pPr>
+            <a:r>
+              <a:rPr sz="1200" dirty="0" err="1">
+                <a:solidFill>
+                  <a:srgbClr val="2D2D2D"/>
+                </a:solidFill>
+                <a:latin typeface="Consolas"/>
+              </a:rPr>
+              <a:t>coredumpctl</a:t>
+            </a:r>
+            <a:r>
+              <a:rPr sz="1200" dirty="0">
+                <a:solidFill>
+                  <a:srgbClr val="2D2D2D"/>
+                </a:solidFill>
+                <a:latin typeface="Consolas"/>
+              </a:rPr>
+              <a:t> list</a:t>
+            </a:r>
+          </a:p>
+          <a:p>
+            <a:pPr>
+              <a:spcAft>
+                <a:spcPts val="0"/>
+              </a:spcAft>
+            </a:pPr>
+            <a:r>
+              <a:rPr sz="1200" dirty="0" err="1">
+                <a:solidFill>
+                  <a:srgbClr val="2D2D2D"/>
+                </a:solidFill>
+                <a:latin typeface="Consolas"/>
+              </a:rPr>
+              <a:t>coredumpctl</a:t>
+            </a:r>
+            <a:r>
+              <a:rPr sz="1200" dirty="0">
+                <a:solidFill>
+                  <a:srgbClr val="2D2D2D"/>
+                </a:solidFill>
+                <a:latin typeface="Consolas"/>
+              </a:rPr>
+              <a:t> info &lt;PID&gt;</a:t>
+            </a:r>
+          </a:p>
+          <a:p>
+            <a:pPr>
+              <a:spcAft>
+                <a:spcPts val="0"/>
+              </a:spcAft>
+            </a:pPr>
+            <a:r>
+              <a:rPr sz="1200" dirty="0" err="1">
+                <a:solidFill>
+                  <a:srgbClr val="2D2D2D"/>
+                </a:solidFill>
+                <a:latin typeface="Consolas"/>
+              </a:rPr>
+              <a:t>coredumpctl</a:t>
+            </a:r>
+            <a:r>
+              <a:rPr sz="1200" dirty="0">
+                <a:solidFill>
+                  <a:srgbClr val="2D2D2D"/>
+                </a:solidFill>
+                <a:latin typeface="Consolas"/>
+              </a:rPr>
+              <a:t> </a:t>
+            </a:r>
+            <a:r>
+              <a:rPr sz="1200" dirty="0" err="1">
+                <a:solidFill>
+                  <a:srgbClr val="2D2D2D"/>
+                </a:solidFill>
+                <a:latin typeface="Consolas"/>
+              </a:rPr>
+              <a:t>gdb</a:t>
+            </a:r>
+            <a:r>
+              <a:rPr sz="1200" dirty="0">
+                <a:solidFill>
+                  <a:srgbClr val="2D2D2D"/>
+                </a:solidFill>
+                <a:latin typeface="Consolas"/>
+              </a:rPr>
+              <a:t> &lt;PID&gt;      # opens </a:t>
+            </a:r>
+            <a:r>
+              <a:rPr sz="1200" dirty="0" err="1">
+                <a:solidFill>
+                  <a:srgbClr val="2D2D2D"/>
+                </a:solidFill>
+                <a:latin typeface="Consolas"/>
+              </a:rPr>
+              <a:t>gdb</a:t>
+            </a:r>
+            <a:r>
+              <a:rPr sz="1200" dirty="0">
+                <a:solidFill>
+                  <a:srgbClr val="2D2D2D"/>
+                </a:solidFill>
+                <a:latin typeface="Consolas"/>
+              </a:rPr>
+              <a:t> on the crash</a:t>
+            </a:r>
+          </a:p>
+        </p:txBody>
+      </p:sp>
+    </p:spTree>
+  </p:cSld>
+  <p:clrMapOvr>
+    <a:masterClrMapping/>
+  </p:clrMapOvr>
+</p:sld>
+</file>
+
+<file path=ppt/slides/slide7.xml><?xml version="1.0" encoding="utf-8"?>
+<p:sld xmlns:a="http://schemas.openxmlformats.org/drawingml/2006/main" xmlns:r="http://schemas.openxmlformats.org/officeDocument/2006/relationships" xmlns:p="http://schemas.openxmlformats.org/presentationml/2006/main">
+  <p:cSld>
+    <p:spTree>
+      <p:nvGrpSpPr>
+        <p:cNvPr id="1" name=""/>
+        <p:cNvGrpSpPr/>
+        <p:nvPr/>
+      </p:nvGrpSpPr>
+      <p:grpSpPr>
+        <a:xfrm>
+          <a:off x="0" y="0"/>
+          <a:ext cx="0" cy="0"/>
+          <a:chOff x="0" y="0"/>
+          <a:chExt cx="0" cy="0"/>
+        </a:xfrm>
+      </p:grpSpPr>
+      <p:sp>
+        <p:nvSpPr>
+          <p:cNvPr id="2" name="Title 1"/>
+          <p:cNvSpPr>
+            <a:spLocks noGrp="1"/>
+          </p:cNvSpPr>
+          <p:nvPr>
+            <p:ph type="title"/>
+          </p:nvPr>
+        </p:nvSpPr>
+        <p:spPr/>
+        <p:txBody>
+          <a:bodyPr/>
+          <a:lstStyle/>
+          <a:p>
+            <a:r>
+              <a:rPr sz="3200" b="1" dirty="0">
+                <a:latin typeface="Calibri"/>
+              </a:rPr>
+              <a:t>Networking in the Field</a:t>
+            </a:r>
+          </a:p>
+        </p:txBody>
+      </p:sp>
+      <p:sp>
+        <p:nvSpPr>
+          <p:cNvPr id="3" name="TextBox 2"/>
+          <p:cNvSpPr txBox="1"/>
+          <p:nvPr/>
+        </p:nvSpPr>
+        <p:spPr>
+          <a:xfrm>
+            <a:off x="822960" y="1417320"/>
+            <a:ext cx="10515600" cy="365760"/>
+          </a:xfrm>
+          <a:prstGeom prst="rect">
+            <a:avLst/>
+          </a:prstGeom>
+          <a:noFill/>
+        </p:spPr>
+        <p:txBody>
+          <a:bodyPr wrap="square" lIns="45720" rIns="45720" anchor="t">
             <a:spAutoFit/>
           </a:bodyPr>
           <a:lstStyle/>
@@ -6960,7 +9235,7 @@
         <p:spPr>
           <a:xfrm>
             <a:off x="822960" y="1783080"/>
-            <a:ext cx="10515600" cy="1828800"/>
+            <a:ext cx="10515600" cy="1620957"/>
           </a:xfrm>
           <a:prstGeom prst="rect">
             <a:avLst/>
@@ -6979,7 +9254,7 @@
               </a:spcAft>
             </a:pPr>
             <a:r>
-              <a:rPr sz="1500" b="1" i="0">
+              <a:rPr b="1" i="0">
                 <a:solidFill>
                   <a:srgbClr val="CC0066"/>
                 </a:solidFill>
@@ -6995,7 +9270,7 @@
               </a:spcAft>
             </a:pPr>
             <a:r>
-              <a:rPr sz="1300" b="0" i="0">
+              <a:rPr sz="1600" b="0" i="0">
                 <a:solidFill>
                   <a:srgbClr val="333333"/>
                 </a:solidFill>
@@ -7011,7 +9286,7 @@
               </a:spcAft>
             </a:pPr>
             <a:r>
-              <a:rPr sz="1300" b="0" i="0">
+              <a:rPr sz="1600" b="0" i="0">
                 <a:solidFill>
                   <a:srgbClr val="333333"/>
                 </a:solidFill>
@@ -7027,7 +9302,7 @@
               </a:spcAft>
             </a:pPr>
             <a:r>
-              <a:rPr sz="1300" b="0" i="0">
+              <a:rPr sz="1600" b="0" i="0">
                 <a:solidFill>
                   <a:srgbClr val="333333"/>
                 </a:solidFill>
@@ -7043,7 +9318,7 @@
               </a:spcAft>
             </a:pPr>
             <a:r>
-              <a:rPr sz="1300" b="0" i="0">
+              <a:rPr sz="1600" b="0" i="0">
                 <a:solidFill>
                   <a:srgbClr val="333333"/>
                 </a:solidFill>
@@ -7097,6 +9372,7 @@
           <a:lstStyle/>
           <a:p>
             <a:pPr algn="ctr"/>
+            <a:endParaRPr/>
           </a:p>
         </p:txBody>
       </p:sp>
@@ -7141,6 +9417,7 @@
           <a:lstStyle/>
           <a:p>
             <a:pPr algn="ctr"/>
+            <a:endParaRPr/>
           </a:p>
         </p:txBody>
       </p:sp>
@@ -7152,8 +9429,8 @@
         </p:nvSpPr>
         <p:spPr>
           <a:xfrm>
-            <a:off x="1005840" y="3749039"/>
-            <a:ext cx="10241280" cy="2468879"/>
+            <a:off x="1197864" y="3657600"/>
+            <a:ext cx="10241280" cy="2677656"/>
           </a:xfrm>
           <a:prstGeom prst="rect">
             <a:avLst/>
@@ -7172,7 +9449,7 @@
               </a:spcAft>
             </a:pPr>
             <a:r>
-              <a:rPr sz="1100" i="1">
+              <a:rPr sz="1400" i="1">
                 <a:solidFill>
                   <a:srgbClr val="808080"/>
                 </a:solidFill>
@@ -7188,7 +9465,7 @@
               </a:spcAft>
             </a:pPr>
             <a:r>
-              <a:rPr sz="1100">
+              <a:rPr sz="1400">
                 <a:solidFill>
                   <a:srgbClr val="2D2D2D"/>
                 </a:solidFill>
@@ -7204,7 +9481,7 @@
               </a:spcAft>
             </a:pPr>
             <a:r>
-              <a:rPr sz="1100">
+              <a:rPr sz="1400">
                 <a:solidFill>
                   <a:srgbClr val="2D2D2D"/>
                 </a:solidFill>
@@ -7220,7 +9497,7 @@
               </a:spcAft>
             </a:pPr>
             <a:r>
-              <a:rPr sz="1100">
+              <a:rPr sz="1400">
                 <a:solidFill>
                   <a:srgbClr val="2D2D2D"/>
                 </a:solidFill>
@@ -7236,7 +9513,7 @@
               </a:spcAft>
             </a:pPr>
             <a:r>
-              <a:rPr sz="1100">
+              <a:rPr sz="1400">
                 <a:solidFill>
                   <a:srgbClr val="2D2D2D"/>
                 </a:solidFill>
@@ -7252,7 +9529,7 @@
               </a:spcAft>
             </a:pPr>
             <a:r>
-              <a:rPr sz="1100">
+              <a:rPr sz="1400">
                 <a:solidFill>
                   <a:srgbClr val="2D2D2D"/>
                 </a:solidFill>
@@ -7268,7 +9545,7 @@
               </a:spcAft>
             </a:pPr>
             <a:r>
-              <a:rPr sz="1100">
+              <a:rPr sz="1400">
                 <a:solidFill>
                   <a:srgbClr val="2D2D2D"/>
                 </a:solidFill>
@@ -7284,7 +9561,7 @@
               </a:spcAft>
             </a:pPr>
             <a:r>
-              <a:rPr sz="1100">
+              <a:rPr sz="1400">
                 <a:solidFill>
                   <a:srgbClr val="2D2D2D"/>
                 </a:solidFill>
@@ -7300,7 +9577,7 @@
               </a:spcAft>
             </a:pPr>
             <a:r>
-              <a:rPr sz="1100">
+              <a:rPr sz="1400">
                 <a:solidFill>
                   <a:srgbClr val="2D2D2D"/>
                 </a:solidFill>
@@ -7316,7 +9593,7 @@
               </a:spcAft>
             </a:pPr>
             <a:r>
-              <a:rPr sz="1100" i="1">
+              <a:rPr sz="1400" i="1">
                 <a:solidFill>
                   <a:srgbClr val="808080"/>
                 </a:solidFill>
@@ -7332,7 +9609,7 @@
               </a:spcAft>
             </a:pPr>
             <a:r>
-              <a:rPr sz="1100">
+              <a:rPr sz="1400">
                 <a:solidFill>
                   <a:srgbClr val="2D2D2D"/>
                 </a:solidFill>
@@ -7348,7 +9625,7 @@
               </a:spcAft>
             </a:pPr>
             <a:r>
-              <a:rPr sz="1100">
+              <a:rPr sz="1400">
                 <a:solidFill>
                   <a:srgbClr val="2D2D2D"/>
                 </a:solidFill>
@@ -7367,8 +9644,8 @@
 </p:sld>
 </file>
 
-<file path=ppt/slides/slide14.xml><?xml version="1.0" encoding="utf-8"?>
-<p:sld xmlns:a="http://schemas.openxmlformats.org/drawingml/2006/main" xmlns:p="http://schemas.openxmlformats.org/presentationml/2006/main" xmlns:r="http://schemas.openxmlformats.org/officeDocument/2006/relationships">
+<file path=ppt/slides/slide8.xml><?xml version="1.0" encoding="utf-8"?>
+<p:sld xmlns:a="http://schemas.openxmlformats.org/drawingml/2006/main" xmlns:r="http://schemas.openxmlformats.org/officeDocument/2006/relationships" xmlns:p="http://schemas.openxmlformats.org/presentationml/2006/main">
   <p:cSld>
     <p:spTree>
       <p:nvGrpSpPr>
@@ -7376,7 +9653,14 @@
         <p:cNvGrpSpPr/>
         <p:nvPr/>
       </p:nvGrpSpPr>
-      <p:grpSpPr/>
+      <p:grpSpPr>
+        <a:xfrm>
+          <a:off x="0" y="0"/>
+          <a:ext cx="0" cy="0"/>
+          <a:chOff x="0" y="0"/>
+          <a:chExt cx="0" cy="0"/>
+        </a:xfrm>
+      </p:grpSpPr>
       <p:sp>
         <p:nvSpPr>
           <p:cNvPr id="2" name="Title 1"/>
@@ -7393,10 +9677,7 @@
           <a:lstStyle/>
           <a:p>
             <a:r>
-              <a:rPr sz="3200" b="1">
-                <a:solidFill>
-                  <a:srgbClr val="CC0066"/>
-                </a:solidFill>
+              <a:rPr sz="3200" b="1" dirty="0">
                 <a:latin typeface="Calibri"/>
               </a:rPr>
               <a:t>Storage Reliability</a:t>
@@ -7421,7 +9702,7 @@
           <a:noFill/>
         </p:spPr>
         <p:txBody>
-          <a:bodyPr wrap="square" anchor="t" lIns="45720" rIns="45720">
+          <a:bodyPr wrap="square" lIns="45720" rIns="45720" anchor="t">
             <a:spAutoFit/>
           </a:bodyPr>
           <a:lstStyle/>
@@ -7448,7 +9729,7 @@
         <p:spPr>
           <a:xfrm>
             <a:off x="822960" y="1783080"/>
-            <a:ext cx="10515600" cy="4572000"/>
+            <a:ext cx="10515600" cy="4452501"/>
           </a:xfrm>
           <a:prstGeom prst="rect">
             <a:avLst/>
@@ -7467,7 +9748,7 @@
               </a:spcAft>
             </a:pPr>
             <a:r>
-              <a:rPr sz="1500" b="1" i="0">
+              <a:rPr b="1" i="0">
                 <a:solidFill>
                   <a:srgbClr val="CC0066"/>
                 </a:solidFill>
@@ -7483,7 +9764,7 @@
               </a:spcAft>
             </a:pPr>
             <a:r>
-              <a:rPr sz="1300" b="0" i="0">
+              <a:rPr sz="1600" b="0" i="0">
                 <a:solidFill>
                   <a:srgbClr val="333333"/>
                 </a:solidFill>
@@ -7499,7 +9780,7 @@
               </a:spcAft>
             </a:pPr>
             <a:r>
-              <a:rPr sz="1300" b="0" i="0">
+              <a:rPr sz="1600" b="0" i="0">
                 <a:solidFill>
                   <a:srgbClr val="333333"/>
                 </a:solidFill>
@@ -7515,7 +9796,7 @@
               </a:spcAft>
             </a:pPr>
             <a:r>
-              <a:rPr sz="1300" b="0" i="0">
+              <a:rPr sz="1600" b="0" i="0">
                 <a:solidFill>
                   <a:srgbClr val="333333"/>
                 </a:solidFill>
@@ -7531,7 +9812,7 @@
               </a:spcAft>
             </a:pPr>
             <a:r>
-              <a:rPr sz="1300" b="0" i="0">
+              <a:rPr sz="1600" b="0" i="0">
                 <a:solidFill>
                   <a:srgbClr val="333333"/>
                 </a:solidFill>
@@ -7547,7 +9828,7 @@
               </a:spcAft>
             </a:pPr>
             <a:r>
-              <a:rPr sz="1500" b="1" i="0">
+              <a:rPr b="1" i="0">
                 <a:solidFill>
                   <a:srgbClr val="CC0066"/>
                 </a:solidFill>
@@ -7563,7 +9844,7 @@
               </a:spcAft>
             </a:pPr>
             <a:r>
-              <a:rPr sz="1300" b="0" i="0">
+              <a:rPr sz="1600" b="0" i="0">
                 <a:solidFill>
                   <a:srgbClr val="333333"/>
                 </a:solidFill>
@@ -7579,7 +9860,7 @@
               </a:spcAft>
             </a:pPr>
             <a:r>
-              <a:rPr sz="1300" b="0" i="0">
+              <a:rPr sz="1600" b="0" i="0">
                 <a:solidFill>
                   <a:srgbClr val="333333"/>
                 </a:solidFill>
@@ -7595,7 +9876,7 @@
               </a:spcAft>
             </a:pPr>
             <a:r>
-              <a:rPr sz="1300" b="0" i="0">
+              <a:rPr sz="1600" b="0" i="0">
                 <a:solidFill>
                   <a:srgbClr val="333333"/>
                 </a:solidFill>
@@ -7611,7 +9892,7 @@
               </a:spcAft>
             </a:pPr>
             <a:r>
-              <a:rPr sz="1300" b="0" i="0">
+              <a:rPr sz="1600" b="0" i="0">
                 <a:solidFill>
                   <a:srgbClr val="333333"/>
                 </a:solidFill>
@@ -7627,7 +9908,7 @@
               </a:spcAft>
             </a:pPr>
             <a:r>
-              <a:rPr sz="1300" b="0" i="0">
+              <a:rPr sz="1600" b="0" i="0">
                 <a:solidFill>
                   <a:srgbClr val="333333"/>
                 </a:solidFill>
@@ -7643,7 +9924,7 @@
               </a:spcAft>
             </a:pPr>
             <a:r>
-              <a:rPr sz="1500" b="1" i="0">
+              <a:rPr b="1" i="0">
                 <a:solidFill>
                   <a:srgbClr val="663399"/>
                 </a:solidFill>
@@ -7659,7 +9940,7 @@
               </a:spcAft>
             </a:pPr>
             <a:r>
-              <a:rPr sz="1200" b="0" i="0">
+              <a:rPr sz="1600" b="0" i="0">
                 <a:solidFill>
                   <a:srgbClr val="333333"/>
                 </a:solidFill>
@@ -7675,7 +9956,7 @@
               </a:spcAft>
             </a:pPr>
             <a:r>
-              <a:rPr sz="1200" b="0" i="0">
+              <a:rPr sz="1600" b="0" i="0">
                 <a:solidFill>
                   <a:srgbClr val="333333"/>
                 </a:solidFill>
@@ -7694,8 +9975,8 @@
 </p:sld>
 </file>
 
-<file path=ppt/slides/slide15.xml><?xml version="1.0" encoding="utf-8"?>
-<p:sld xmlns:a="http://schemas.openxmlformats.org/drawingml/2006/main" xmlns:p="http://schemas.openxmlformats.org/presentationml/2006/main" xmlns:r="http://schemas.openxmlformats.org/officeDocument/2006/relationships">
+<file path=ppt/slides/slide9.xml><?xml version="1.0" encoding="utf-8"?>
+<p:sld xmlns:a="http://schemas.openxmlformats.org/drawingml/2006/main" xmlns:r="http://schemas.openxmlformats.org/officeDocument/2006/relationships" xmlns:p="http://schemas.openxmlformats.org/presentationml/2006/main">
   <p:cSld>
     <p:spTree>
       <p:nvGrpSpPr>
@@ -7703,7 +9984,14 @@
         <p:cNvGrpSpPr/>
         <p:nvPr/>
       </p:nvGrpSpPr>
-      <p:grpSpPr/>
+      <p:grpSpPr>
+        <a:xfrm>
+          <a:off x="0" y="0"/>
+          <a:ext cx="0" cy="0"/>
+          <a:chOff x="0" y="0"/>
+          <a:chExt cx="0" cy="0"/>
+        </a:xfrm>
+      </p:grpSpPr>
       <p:sp>
         <p:nvSpPr>
           <p:cNvPr id="2" name="Title 1"/>
@@ -7720,10 +10008,7 @@
           <a:lstStyle/>
           <a:p>
             <a:r>
-              <a:rPr sz="3200" b="1">
-                <a:solidFill>
-                  <a:srgbClr val="CC0066"/>
-                </a:solidFill>
+              <a:rPr sz="3200" b="1" dirty="0">
                 <a:latin typeface="Calibri"/>
               </a:rPr>
               <a:t>Hands-On Lab</a:t>
@@ -7748,7 +10033,7 @@
           <a:noFill/>
         </p:spPr>
         <p:txBody>
-          <a:bodyPr wrap="square" anchor="t" lIns="45720" rIns="45720">
+          <a:bodyPr wrap="square" lIns="45720" rIns="45720" anchor="t">
             <a:spAutoFit/>
           </a:bodyPr>
           <a:lstStyle/>
@@ -7809,6 +10094,7 @@
           <a:lstStyle/>
           <a:p>
             <a:pPr algn="ctr"/>
+            <a:endParaRPr/>
           </a:p>
         </p:txBody>
       </p:sp>
@@ -7853,6 +10139,7 @@
           <a:lstStyle/>
           <a:p>
             <a:pPr algn="ctr"/>
+            <a:endParaRPr/>
           </a:p>
         </p:txBody>
       </p:sp>
@@ -7864,8 +10151,8 @@
         </p:nvSpPr>
         <p:spPr>
           <a:xfrm>
-            <a:off x="1005840" y="1874519"/>
-            <a:ext cx="10241280" cy="4389120"/>
+            <a:off x="1291959" y="1783080"/>
+            <a:ext cx="10241280" cy="4662815"/>
           </a:xfrm>
           <a:prstGeom prst="rect">
             <a:avLst/>
@@ -7884,7 +10171,7 @@
               </a:spcAft>
             </a:pPr>
             <a:r>
-              <a:rPr sz="1000" i="1">
+              <a:rPr sz="1100" i="1">
                 <a:solidFill>
                   <a:srgbClr val="808080"/>
                 </a:solidFill>
@@ -7900,7 +10187,7 @@
               </a:spcAft>
             </a:pPr>
             <a:r>
-              <a:rPr sz="1000">
+              <a:rPr sz="1100">
                 <a:solidFill>
                   <a:srgbClr val="2D2D2D"/>
                 </a:solidFill>
@@ -7916,7 +10203,7 @@
               </a:spcAft>
             </a:pPr>
             <a:r>
-              <a:rPr sz="1000">
+              <a:rPr sz="1100">
                 <a:solidFill>
                   <a:srgbClr val="2D2D2D"/>
                 </a:solidFill>
@@ -7932,7 +10219,7 @@
               </a:spcAft>
             </a:pPr>
             <a:r>
-              <a:rPr sz="1000" i="1">
+              <a:rPr sz="1100" i="1">
                 <a:solidFill>
                   <a:srgbClr val="808080"/>
                 </a:solidFill>
@@ -7948,7 +10235,7 @@
               </a:spcAft>
             </a:pPr>
             <a:r>
-              <a:rPr sz="1000">
+              <a:rPr sz="1100">
                 <a:solidFill>
                   <a:srgbClr val="2D2D2D"/>
                 </a:solidFill>
@@ -7964,7 +10251,7 @@
               </a:spcAft>
             </a:pPr>
             <a:r>
-              <a:rPr sz="1000" i="1">
+              <a:rPr sz="1100" i="1">
                 <a:solidFill>
                   <a:srgbClr val="808080"/>
                 </a:solidFill>
@@ -7980,7 +10267,7 @@
               </a:spcAft>
             </a:pPr>
             <a:r>
-              <a:rPr sz="1000">
+              <a:rPr sz="1100">
                 <a:solidFill>
                   <a:srgbClr val="2D2D2D"/>
                 </a:solidFill>
@@ -7996,7 +10283,7 @@
               </a:spcAft>
             </a:pPr>
             <a:r>
-              <a:rPr sz="1000">
+              <a:rPr sz="1100">
                 <a:solidFill>
                   <a:srgbClr val="2D2D2D"/>
                 </a:solidFill>
@@ -8012,7 +10299,7 @@
               </a:spcAft>
             </a:pPr>
             <a:r>
-              <a:rPr sz="1000">
+              <a:rPr sz="1100">
                 <a:solidFill>
                   <a:srgbClr val="2D2D2D"/>
                 </a:solidFill>
@@ -8028,7 +10315,7 @@
               </a:spcAft>
             </a:pPr>
             <a:r>
-              <a:rPr sz="1000">
+              <a:rPr sz="1100">
                 <a:solidFill>
                   <a:srgbClr val="2D2D2D"/>
                 </a:solidFill>
@@ -8044,7 +10331,7 @@
               </a:spcAft>
             </a:pPr>
             <a:r>
-              <a:rPr sz="1000">
+              <a:rPr sz="1100">
                 <a:solidFill>
                   <a:srgbClr val="2D2D2D"/>
                 </a:solidFill>
@@ -8060,7 +10347,7 @@
               </a:spcAft>
             </a:pPr>
             <a:r>
-              <a:rPr sz="1000">
+              <a:rPr sz="1100">
                 <a:solidFill>
                   <a:srgbClr val="2D2D2D"/>
                 </a:solidFill>
@@ -8076,7 +10363,7 @@
               </a:spcAft>
             </a:pPr>
             <a:r>
-              <a:rPr sz="1000" i="1">
+              <a:rPr sz="1100" i="1">
                 <a:solidFill>
                   <a:srgbClr val="808080"/>
                 </a:solidFill>
@@ -8092,7 +10379,7 @@
               </a:spcAft>
             </a:pPr>
             <a:r>
-              <a:rPr sz="1000">
+              <a:rPr sz="1100">
                 <a:solidFill>
                   <a:srgbClr val="2D2D2D"/>
                 </a:solidFill>
@@ -8108,7 +10395,7 @@
               </a:spcAft>
             </a:pPr>
             <a:r>
-              <a:rPr sz="1000">
+              <a:rPr sz="1100">
                 <a:solidFill>
                   <a:srgbClr val="2D2D2D"/>
                 </a:solidFill>
@@ -8124,7 +10411,7 @@
               </a:spcAft>
             </a:pPr>
             <a:r>
-              <a:rPr sz="1000" i="1">
+              <a:rPr sz="1100" i="1">
                 <a:solidFill>
                   <a:srgbClr val="808080"/>
                 </a:solidFill>
@@ -8140,7 +10427,7 @@
               </a:spcAft>
             </a:pPr>
             <a:r>
-              <a:rPr sz="1000">
+              <a:rPr sz="1100">
                 <a:solidFill>
                   <a:srgbClr val="2D2D2D"/>
                 </a:solidFill>
@@ -8156,7 +10443,7 @@
               </a:spcAft>
             </a:pPr>
             <a:r>
-              <a:rPr sz="1000">
+              <a:rPr sz="1100">
                 <a:solidFill>
                   <a:srgbClr val="2D2D2D"/>
                 </a:solidFill>
@@ -8172,7 +10459,7 @@
               </a:spcAft>
             </a:pPr>
             <a:r>
-              <a:rPr sz="1000">
+              <a:rPr sz="1100">
                 <a:solidFill>
                   <a:srgbClr val="2D2D2D"/>
                 </a:solidFill>
@@ -8188,7 +10475,7 @@
               </a:spcAft>
             </a:pPr>
             <a:r>
-              <a:rPr sz="1000" i="1">
+              <a:rPr sz="1100" i="1">
                 <a:solidFill>
                   <a:srgbClr val="808080"/>
                 </a:solidFill>
@@ -8204,7 +10491,7 @@
               </a:spcAft>
             </a:pPr>
             <a:r>
-              <a:rPr sz="1000">
+              <a:rPr sz="1100">
                 <a:solidFill>
                   <a:srgbClr val="2D2D2D"/>
                 </a:solidFill>
@@ -8220,7 +10507,7 @@
               </a:spcAft>
             </a:pPr>
             <a:r>
-              <a:rPr sz="1000">
+              <a:rPr sz="1100">
                 <a:solidFill>
                   <a:srgbClr val="2D2D2D"/>
                 </a:solidFill>
@@ -8236,7 +10523,7 @@
               </a:spcAft>
             </a:pPr>
             <a:r>
-              <a:rPr sz="1000">
+              <a:rPr sz="1100">
                 <a:solidFill>
                   <a:srgbClr val="2D2D2D"/>
                 </a:solidFill>
@@ -8252,7 +10539,7 @@
               </a:spcAft>
             </a:pPr>
             <a:r>
-              <a:rPr sz="1000" i="1">
+              <a:rPr sz="1100" i="1">
                 <a:solidFill>
                   <a:srgbClr val="808080"/>
                 </a:solidFill>
@@ -8268,7 +10555,7 @@
               </a:spcAft>
             </a:pPr>
             <a:r>
-              <a:rPr sz="1000">
+              <a:rPr sz="1100">
                 <a:solidFill>
                   <a:srgbClr val="2D2D2D"/>
                 </a:solidFill>
@@ -8284,7 +10571,7 @@
               </a:spcAft>
             </a:pPr>
             <a:r>
-              <a:rPr sz="1000">
+              <a:rPr sz="1100">
                 <a:solidFill>
                   <a:srgbClr val="2D2D2D"/>
                 </a:solidFill>
@@ -8300,1578 +10587,13 @@
               </a:spcAft>
             </a:pPr>
             <a:r>
-              <a:rPr sz="1000">
+              <a:rPr sz="1100">
                 <a:solidFill>
                   <a:srgbClr val="2D2D2D"/>
                 </a:solidFill>
                 <a:latin typeface="Consolas"/>
               </a:rPr>
               <a:t>poweroff</a:t>
-            </a:r>
-          </a:p>
-        </p:txBody>
-      </p:sp>
-    </p:spTree>
-  </p:cSld>
-  <p:clrMapOvr>
-    <a:masterClrMapping/>
-  </p:clrMapOvr>
-</p:sld>
-</file>
-
-<file path=ppt/slides/slide16.xml><?xml version="1.0" encoding="utf-8"?>
-<p:sld xmlns:a="http://schemas.openxmlformats.org/drawingml/2006/main" xmlns:p="http://schemas.openxmlformats.org/presentationml/2006/main" xmlns:r="http://schemas.openxmlformats.org/officeDocument/2006/relationships">
-  <p:cSld>
-    <p:spTree>
-      <p:nvGrpSpPr>
-        <p:cNvPr id="1" name=""/>
-        <p:cNvGrpSpPr/>
-        <p:nvPr/>
-      </p:nvGrpSpPr>
-      <p:grpSpPr/>
-      <p:sp>
-        <p:nvSpPr>
-          <p:cNvPr id="2" name="Title 1"/>
-          <p:cNvSpPr>
-            <a:spLocks noGrp="1"/>
-          </p:cNvSpPr>
-          <p:nvPr>
-            <p:ph type="title"/>
-          </p:nvPr>
-        </p:nvSpPr>
-        <p:spPr/>
-        <p:txBody>
-          <a:bodyPr/>
-          <a:lstStyle/>
-          <a:p>
-            <a:r>
-              <a:rPr sz="3200" b="1">
-                <a:solidFill>
-                  <a:srgbClr val="663399"/>
-                </a:solidFill>
-                <a:latin typeface="Calibri"/>
-              </a:rPr>
-              <a:t>Session Summary</a:t>
-            </a:r>
-          </a:p>
-        </p:txBody>
-      </p:sp>
-      <p:sp>
-        <p:nvSpPr>
-          <p:cNvPr id="3" name="TextBox 2"/>
-          <p:cNvSpPr txBox="1"/>
-          <p:nvPr/>
-        </p:nvSpPr>
-        <p:spPr>
-          <a:xfrm>
-            <a:off x="822960" y="1417320"/>
-            <a:ext cx="10515600" cy="365760"/>
-          </a:xfrm>
-          <a:prstGeom prst="rect">
-            <a:avLst/>
-          </a:prstGeom>
-          <a:noFill/>
-        </p:spPr>
-        <p:txBody>
-          <a:bodyPr wrap="square" anchor="t" lIns="45720" rIns="45720">
-            <a:spAutoFit/>
-          </a:bodyPr>
-          <a:lstStyle/>
-          <a:p>
-            <a:pPr algn="l"/>
-            <a:r>
-              <a:rPr sz="1500" b="0" i="1">
-                <a:solidFill>
-                  <a:srgbClr val="666666"/>
-                </a:solidFill>
-                <a:latin typeface="Calibri"/>
-              </a:rPr>
-              <a:t>5 things to remember from this session.</a:t>
-            </a:r>
-          </a:p>
-        </p:txBody>
-      </p:sp>
-      <p:sp>
-        <p:nvSpPr>
-          <p:cNvPr id="4" name="Rounded Rectangle 3"/>
-          <p:cNvSpPr/>
-          <p:nvPr/>
-        </p:nvSpPr>
-        <p:spPr>
-          <a:xfrm>
-            <a:off x="822960" y="1874519"/>
-            <a:ext cx="457200" cy="548640"/>
-          </a:xfrm>
-          <a:prstGeom prst="roundRect">
-            <a:avLst/>
-          </a:prstGeom>
-          <a:solidFill>
-            <a:srgbClr val="CC0066"/>
-          </a:solidFill>
-          <a:ln>
-            <a:noFill/>
-          </a:ln>
-          <a:effectLst/>
-        </p:spPr>
-        <p:style>
-          <a:lnRef idx="1">
-            <a:schemeClr val="accent1"/>
-          </a:lnRef>
-          <a:fillRef idx="3">
-            <a:schemeClr val="accent1"/>
-          </a:fillRef>
-          <a:effectRef idx="2">
-            <a:schemeClr val="accent1"/>
-          </a:effectRef>
-          <a:fontRef idx="minor">
-            <a:schemeClr val="lt1"/>
-          </a:fontRef>
-        </p:style>
-        <p:txBody>
-          <a:bodyPr rtlCol="0" anchor="ctr" lIns="0" rIns="0"/>
-          <a:lstStyle/>
-          <a:p>
-            <a:pPr algn="ctr"/>
-            <a:r>
-              <a:rPr sz="2200" b="1">
-                <a:solidFill>
-                  <a:srgbClr val="FFFFFF"/>
-                </a:solidFill>
-                <a:latin typeface="Calibri"/>
-              </a:rPr>
-              <a:t>1</a:t>
-            </a:r>
-          </a:p>
-        </p:txBody>
-      </p:sp>
-      <p:sp>
-        <p:nvSpPr>
-          <p:cNvPr id="5" name="TextBox 4"/>
-          <p:cNvSpPr txBox="1"/>
-          <p:nvPr/>
-        </p:nvSpPr>
-        <p:spPr>
-          <a:xfrm>
-            <a:off x="1417320" y="1874519"/>
-            <a:ext cx="10058400" cy="320040"/>
-          </a:xfrm>
-          <a:prstGeom prst="rect">
-            <a:avLst/>
-          </a:prstGeom>
-          <a:noFill/>
-        </p:spPr>
-        <p:txBody>
-          <a:bodyPr wrap="square" anchor="t" lIns="45720" rIns="45720">
-            <a:spAutoFit/>
-          </a:bodyPr>
-          <a:lstStyle/>
-          <a:p>
-            <a:pPr algn="l"/>
-            <a:r>
-              <a:rPr sz="1600" b="1" i="0">
-                <a:solidFill>
-                  <a:srgbClr val="663399"/>
-                </a:solidFill>
-                <a:latin typeface="Calibri"/>
-              </a:rPr>
-              <a:t>SSH hygiene is non-negotiable on shipped devices</a:t>
-            </a:r>
-          </a:p>
-        </p:txBody>
-      </p:sp>
-      <p:sp>
-        <p:nvSpPr>
-          <p:cNvPr id="6" name="TextBox 5"/>
-          <p:cNvSpPr txBox="1"/>
-          <p:nvPr/>
-        </p:nvSpPr>
-        <p:spPr>
-          <a:xfrm>
-            <a:off x="1417320" y="2185415"/>
-            <a:ext cx="10058400" cy="320040"/>
-          </a:xfrm>
-          <a:prstGeom prst="rect">
-            <a:avLst/>
-          </a:prstGeom>
-          <a:noFill/>
-        </p:spPr>
-        <p:txBody>
-          <a:bodyPr wrap="square" anchor="t" lIns="45720" rIns="45720">
-            <a:spAutoFit/>
-          </a:bodyPr>
-          <a:lstStyle/>
-          <a:p>
-            <a:pPr algn="l"/>
-            <a:r>
-              <a:rPr sz="1300" b="0" i="0">
-                <a:solidFill>
-                  <a:srgbClr val="333333"/>
-                </a:solidFill>
-                <a:latin typeface="Calibri"/>
-              </a:rPr>
-              <a:t>Keys only, no root, allowed users specified — bake it into the image</a:t>
-            </a:r>
-          </a:p>
-        </p:txBody>
-      </p:sp>
-      <p:sp>
-        <p:nvSpPr>
-          <p:cNvPr id="7" name="Rounded Rectangle 6"/>
-          <p:cNvSpPr/>
-          <p:nvPr/>
-        </p:nvSpPr>
-        <p:spPr>
-          <a:xfrm>
-            <a:off x="822960" y="2587752"/>
-            <a:ext cx="457200" cy="548640"/>
-          </a:xfrm>
-          <a:prstGeom prst="roundRect">
-            <a:avLst/>
-          </a:prstGeom>
-          <a:solidFill>
-            <a:srgbClr val="CC0066"/>
-          </a:solidFill>
-          <a:ln>
-            <a:noFill/>
-          </a:ln>
-          <a:effectLst/>
-        </p:spPr>
-        <p:style>
-          <a:lnRef idx="1">
-            <a:schemeClr val="accent1"/>
-          </a:lnRef>
-          <a:fillRef idx="3">
-            <a:schemeClr val="accent1"/>
-          </a:fillRef>
-          <a:effectRef idx="2">
-            <a:schemeClr val="accent1"/>
-          </a:effectRef>
-          <a:fontRef idx="minor">
-            <a:schemeClr val="lt1"/>
-          </a:fontRef>
-        </p:style>
-        <p:txBody>
-          <a:bodyPr rtlCol="0" anchor="ctr" lIns="0" rIns="0"/>
-          <a:lstStyle/>
-          <a:p>
-            <a:pPr algn="ctr"/>
-            <a:r>
-              <a:rPr sz="2200" b="1">
-                <a:solidFill>
-                  <a:srgbClr val="FFFFFF"/>
-                </a:solidFill>
-                <a:latin typeface="Calibri"/>
-              </a:rPr>
-              <a:t>2</a:t>
-            </a:r>
-          </a:p>
-        </p:txBody>
-      </p:sp>
-      <p:sp>
-        <p:nvSpPr>
-          <p:cNvPr id="8" name="TextBox 7"/>
-          <p:cNvSpPr txBox="1"/>
-          <p:nvPr/>
-        </p:nvSpPr>
-        <p:spPr>
-          <a:xfrm>
-            <a:off x="1417320" y="2587752"/>
-            <a:ext cx="10058400" cy="320040"/>
-          </a:xfrm>
-          <a:prstGeom prst="rect">
-            <a:avLst/>
-          </a:prstGeom>
-          <a:noFill/>
-        </p:spPr>
-        <p:txBody>
-          <a:bodyPr wrap="square" anchor="t" lIns="45720" rIns="45720">
-            <a:spAutoFit/>
-          </a:bodyPr>
-          <a:lstStyle/>
-          <a:p>
-            <a:pPr algn="l"/>
-            <a:r>
-              <a:rPr sz="1600" b="1" i="0">
-                <a:solidFill>
-                  <a:srgbClr val="663399"/>
-                </a:solidFill>
-                <a:latin typeface="Calibri"/>
-              </a:rPr>
-              <a:t>systemctl + journalctl cover 90% of ops tasks</a:t>
-            </a:r>
-          </a:p>
-        </p:txBody>
-      </p:sp>
-      <p:sp>
-        <p:nvSpPr>
-          <p:cNvPr id="9" name="TextBox 8"/>
-          <p:cNvSpPr txBox="1"/>
-          <p:nvPr/>
-        </p:nvSpPr>
-        <p:spPr>
-          <a:xfrm>
-            <a:off x="1417320" y="2898648"/>
-            <a:ext cx="10058400" cy="320040"/>
-          </a:xfrm>
-          <a:prstGeom prst="rect">
-            <a:avLst/>
-          </a:prstGeom>
-          <a:noFill/>
-        </p:spPr>
-        <p:txBody>
-          <a:bodyPr wrap="square" anchor="t" lIns="45720" rIns="45720">
-            <a:spAutoFit/>
-          </a:bodyPr>
-          <a:lstStyle/>
-          <a:p>
-            <a:pPr algn="l"/>
-            <a:r>
-              <a:rPr sz="1300" b="0" i="0">
-                <a:solidFill>
-                  <a:srgbClr val="333333"/>
-                </a:solidFill>
-                <a:latin typeface="Calibri"/>
-              </a:rPr>
-              <a:t>Status, start/stop, edit overrides, query logs by service/time/boot</a:t>
-            </a:r>
-          </a:p>
-        </p:txBody>
-      </p:sp>
-      <p:sp>
-        <p:nvSpPr>
-          <p:cNvPr id="10" name="Rounded Rectangle 9"/>
-          <p:cNvSpPr/>
-          <p:nvPr/>
-        </p:nvSpPr>
-        <p:spPr>
-          <a:xfrm>
-            <a:off x="822960" y="3300984"/>
-            <a:ext cx="457200" cy="548640"/>
-          </a:xfrm>
-          <a:prstGeom prst="roundRect">
-            <a:avLst/>
-          </a:prstGeom>
-          <a:solidFill>
-            <a:srgbClr val="CC0066"/>
-          </a:solidFill>
-          <a:ln>
-            <a:noFill/>
-          </a:ln>
-          <a:effectLst/>
-        </p:spPr>
-        <p:style>
-          <a:lnRef idx="1">
-            <a:schemeClr val="accent1"/>
-          </a:lnRef>
-          <a:fillRef idx="3">
-            <a:schemeClr val="accent1"/>
-          </a:fillRef>
-          <a:effectRef idx="2">
-            <a:schemeClr val="accent1"/>
-          </a:effectRef>
-          <a:fontRef idx="minor">
-            <a:schemeClr val="lt1"/>
-          </a:fontRef>
-        </p:style>
-        <p:txBody>
-          <a:bodyPr rtlCol="0" anchor="ctr" lIns="0" rIns="0"/>
-          <a:lstStyle/>
-          <a:p>
-            <a:pPr algn="ctr"/>
-            <a:r>
-              <a:rPr sz="2200" b="1">
-                <a:solidFill>
-                  <a:srgbClr val="FFFFFF"/>
-                </a:solidFill>
-                <a:latin typeface="Calibri"/>
-              </a:rPr>
-              <a:t>3</a:t>
-            </a:r>
-          </a:p>
-        </p:txBody>
-      </p:sp>
-      <p:sp>
-        <p:nvSpPr>
-          <p:cNvPr id="11" name="TextBox 10"/>
-          <p:cNvSpPr txBox="1"/>
-          <p:nvPr/>
-        </p:nvSpPr>
-        <p:spPr>
-          <a:xfrm>
-            <a:off x="1417320" y="3300984"/>
-            <a:ext cx="10058400" cy="320040"/>
-          </a:xfrm>
-          <a:prstGeom prst="rect">
-            <a:avLst/>
-          </a:prstGeom>
-          <a:noFill/>
-        </p:spPr>
-        <p:txBody>
-          <a:bodyPr wrap="square" anchor="t" lIns="45720" rIns="45720">
-            <a:spAutoFit/>
-          </a:bodyPr>
-          <a:lstStyle/>
-          <a:p>
-            <a:pPr algn="l"/>
-            <a:r>
-              <a:rPr sz="1600" b="1" i="0">
-                <a:solidFill>
-                  <a:srgbClr val="663399"/>
-                </a:solidFill>
-                <a:latin typeface="Calibri"/>
-              </a:rPr>
-              <a:t>Persistent journald survives reboots</a:t>
-            </a:r>
-          </a:p>
-        </p:txBody>
-      </p:sp>
-      <p:sp>
-        <p:nvSpPr>
-          <p:cNvPr id="12" name="TextBox 11"/>
-          <p:cNvSpPr txBox="1"/>
-          <p:nvPr/>
-        </p:nvSpPr>
-        <p:spPr>
-          <a:xfrm>
-            <a:off x="1417320" y="3611879"/>
-            <a:ext cx="10058400" cy="320040"/>
-          </a:xfrm>
-          <a:prstGeom prst="rect">
-            <a:avLst/>
-          </a:prstGeom>
-          <a:noFill/>
-        </p:spPr>
-        <p:txBody>
-          <a:bodyPr wrap="square" anchor="t" lIns="45720" rIns="45720">
-            <a:spAutoFit/>
-          </a:bodyPr>
-          <a:lstStyle/>
-          <a:p>
-            <a:pPr algn="l"/>
-            <a:r>
-              <a:rPr sz="1300" b="0" i="0">
-                <a:solidFill>
-                  <a:srgbClr val="333333"/>
-                </a:solidFill>
-                <a:latin typeface="Calibri"/>
-              </a:rPr>
-              <a:t>Worth enabling for field debugging — bound the size</a:t>
-            </a:r>
-          </a:p>
-        </p:txBody>
-      </p:sp>
-      <p:sp>
-        <p:nvSpPr>
-          <p:cNvPr id="13" name="Rounded Rectangle 12"/>
-          <p:cNvSpPr/>
-          <p:nvPr/>
-        </p:nvSpPr>
-        <p:spPr>
-          <a:xfrm>
-            <a:off x="822960" y="4014215"/>
-            <a:ext cx="457200" cy="548640"/>
-          </a:xfrm>
-          <a:prstGeom prst="roundRect">
-            <a:avLst/>
-          </a:prstGeom>
-          <a:solidFill>
-            <a:srgbClr val="CC0066"/>
-          </a:solidFill>
-          <a:ln>
-            <a:noFill/>
-          </a:ln>
-          <a:effectLst/>
-        </p:spPr>
-        <p:style>
-          <a:lnRef idx="1">
-            <a:schemeClr val="accent1"/>
-          </a:lnRef>
-          <a:fillRef idx="3">
-            <a:schemeClr val="accent1"/>
-          </a:fillRef>
-          <a:effectRef idx="2">
-            <a:schemeClr val="accent1"/>
-          </a:effectRef>
-          <a:fontRef idx="minor">
-            <a:schemeClr val="lt1"/>
-          </a:fontRef>
-        </p:style>
-        <p:txBody>
-          <a:bodyPr rtlCol="0" anchor="ctr" lIns="0" rIns="0"/>
-          <a:lstStyle/>
-          <a:p>
-            <a:pPr algn="ctr"/>
-            <a:r>
-              <a:rPr sz="2200" b="1">
-                <a:solidFill>
-                  <a:srgbClr val="FFFFFF"/>
-                </a:solidFill>
-                <a:latin typeface="Calibri"/>
-              </a:rPr>
-              <a:t>4</a:t>
-            </a:r>
-          </a:p>
-        </p:txBody>
-      </p:sp>
-      <p:sp>
-        <p:nvSpPr>
-          <p:cNvPr id="14" name="TextBox 13"/>
-          <p:cNvSpPr txBox="1"/>
-          <p:nvPr/>
-        </p:nvSpPr>
-        <p:spPr>
-          <a:xfrm>
-            <a:off x="1417320" y="4014215"/>
-            <a:ext cx="10058400" cy="320040"/>
-          </a:xfrm>
-          <a:prstGeom prst="rect">
-            <a:avLst/>
-          </a:prstGeom>
-          <a:noFill/>
-        </p:spPr>
-        <p:txBody>
-          <a:bodyPr wrap="square" anchor="t" lIns="45720" rIns="45720">
-            <a:spAutoFit/>
-          </a:bodyPr>
-          <a:lstStyle/>
-          <a:p>
-            <a:pPr algn="l"/>
-            <a:r>
-              <a:rPr sz="1600" b="1" i="0">
-                <a:solidFill>
-                  <a:srgbClr val="663399"/>
-                </a:solidFill>
-                <a:latin typeface="Calibri"/>
-              </a:rPr>
-              <a:t>Networking field issues follow a pattern</a:t>
-            </a:r>
-          </a:p>
-        </p:txBody>
-      </p:sp>
-      <p:sp>
-        <p:nvSpPr>
-          <p:cNvPr id="15" name="TextBox 14"/>
-          <p:cNvSpPr txBox="1"/>
-          <p:nvPr/>
-        </p:nvSpPr>
-        <p:spPr>
-          <a:xfrm>
-            <a:off x="1417320" y="4325112"/>
-            <a:ext cx="10058400" cy="320040"/>
-          </a:xfrm>
-          <a:prstGeom prst="rect">
-            <a:avLst/>
-          </a:prstGeom>
-          <a:noFill/>
-        </p:spPr>
-        <p:txBody>
-          <a:bodyPr wrap="square" anchor="t" lIns="45720" rIns="45720">
-            <a:spAutoFit/>
-          </a:bodyPr>
-          <a:lstStyle/>
-          <a:p>
-            <a:pPr algn="l"/>
-            <a:r>
-              <a:rPr sz="1300" b="0" i="0">
-                <a:solidFill>
-                  <a:srgbClr val="333333"/>
-                </a:solidFill>
-                <a:latin typeface="Calibri"/>
-              </a:rPr>
-              <a:t>IP → route → DNS → ping → check journald for systemd-networkd or NM</a:t>
-            </a:r>
-          </a:p>
-        </p:txBody>
-      </p:sp>
-      <p:sp>
-        <p:nvSpPr>
-          <p:cNvPr id="16" name="Rounded Rectangle 15"/>
-          <p:cNvSpPr/>
-          <p:nvPr/>
-        </p:nvSpPr>
-        <p:spPr>
-          <a:xfrm>
-            <a:off x="822960" y="4727448"/>
-            <a:ext cx="457200" cy="548640"/>
-          </a:xfrm>
-          <a:prstGeom prst="roundRect">
-            <a:avLst/>
-          </a:prstGeom>
-          <a:solidFill>
-            <a:srgbClr val="CC0066"/>
-          </a:solidFill>
-          <a:ln>
-            <a:noFill/>
-          </a:ln>
-          <a:effectLst/>
-        </p:spPr>
-        <p:style>
-          <a:lnRef idx="1">
-            <a:schemeClr val="accent1"/>
-          </a:lnRef>
-          <a:fillRef idx="3">
-            <a:schemeClr val="accent1"/>
-          </a:fillRef>
-          <a:effectRef idx="2">
-            <a:schemeClr val="accent1"/>
-          </a:effectRef>
-          <a:fontRef idx="minor">
-            <a:schemeClr val="lt1"/>
-          </a:fontRef>
-        </p:style>
-        <p:txBody>
-          <a:bodyPr rtlCol="0" anchor="ctr" lIns="0" rIns="0"/>
-          <a:lstStyle/>
-          <a:p>
-            <a:pPr algn="ctr"/>
-            <a:r>
-              <a:rPr sz="2200" b="1">
-                <a:solidFill>
-                  <a:srgbClr val="FFFFFF"/>
-                </a:solidFill>
-                <a:latin typeface="Calibri"/>
-              </a:rPr>
-              <a:t>5</a:t>
-            </a:r>
-          </a:p>
-        </p:txBody>
-      </p:sp>
-      <p:sp>
-        <p:nvSpPr>
-          <p:cNvPr id="17" name="TextBox 16"/>
-          <p:cNvSpPr txBox="1"/>
-          <p:nvPr/>
-        </p:nvSpPr>
-        <p:spPr>
-          <a:xfrm>
-            <a:off x="1417320" y="4727448"/>
-            <a:ext cx="10058400" cy="320040"/>
-          </a:xfrm>
-          <a:prstGeom prst="rect">
-            <a:avLst/>
-          </a:prstGeom>
-          <a:noFill/>
-        </p:spPr>
-        <p:txBody>
-          <a:bodyPr wrap="square" anchor="t" lIns="45720" rIns="45720">
-            <a:spAutoFit/>
-          </a:bodyPr>
-          <a:lstStyle/>
-          <a:p>
-            <a:pPr algn="l"/>
-            <a:r>
-              <a:rPr sz="1600" b="1" i="0">
-                <a:solidFill>
-                  <a:srgbClr val="663399"/>
-                </a:solidFill>
-                <a:latin typeface="Calibri"/>
-              </a:rPr>
-              <a:t>Storage reliability needs design, not luck</a:t>
-            </a:r>
-          </a:p>
-        </p:txBody>
-      </p:sp>
-      <p:sp>
-        <p:nvSpPr>
-          <p:cNvPr id="18" name="TextBox 17"/>
-          <p:cNvSpPr txBox="1"/>
-          <p:nvPr/>
-        </p:nvSpPr>
-        <p:spPr>
-          <a:xfrm>
-            <a:off x="1417320" y="5038344"/>
-            <a:ext cx="10058400" cy="320040"/>
-          </a:xfrm>
-          <a:prstGeom prst="rect">
-            <a:avLst/>
-          </a:prstGeom>
-          <a:noFill/>
-        </p:spPr>
-        <p:txBody>
-          <a:bodyPr wrap="square" anchor="t" lIns="45720" rIns="45720">
-            <a:spAutoFit/>
-          </a:bodyPr>
-          <a:lstStyle/>
-          <a:p>
-            <a:pPr algn="l"/>
-            <a:r>
-              <a:rPr sz="1300" b="0" i="0">
-                <a:solidFill>
-                  <a:srgbClr val="333333"/>
-                </a:solidFill>
-                <a:latin typeface="Calibri"/>
-              </a:rPr>
-              <a:t>tmpfs for volatile, RO+overlay for tamper-resistant, fs choice matters</a:t>
-            </a:r>
-          </a:p>
-        </p:txBody>
-      </p:sp>
-      <p:sp>
-        <p:nvSpPr>
-          <p:cNvPr id="19" name="Rounded Rectangle 18"/>
-          <p:cNvSpPr/>
-          <p:nvPr/>
-        </p:nvSpPr>
-        <p:spPr>
-          <a:xfrm>
-            <a:off x="822960" y="5669280"/>
-            <a:ext cx="10561320" cy="640080"/>
-          </a:xfrm>
-          <a:prstGeom prst="roundRect">
-            <a:avLst/>
-          </a:prstGeom>
-          <a:solidFill>
-            <a:srgbClr val="FBE6F0"/>
-          </a:solidFill>
-          <a:ln>
-            <a:noFill/>
-          </a:ln>
-          <a:effectLst/>
-        </p:spPr>
-        <p:style>
-          <a:lnRef idx="1">
-            <a:schemeClr val="accent1"/>
-          </a:lnRef>
-          <a:fillRef idx="3">
-            <a:schemeClr val="accent1"/>
-          </a:fillRef>
-          <a:effectRef idx="2">
-            <a:schemeClr val="accent1"/>
-          </a:effectRef>
-          <a:fontRef idx="minor">
-            <a:schemeClr val="lt1"/>
-          </a:fontRef>
-        </p:style>
-        <p:txBody>
-          <a:bodyPr rtlCol="0" anchor="ctr" lIns="228600"/>
-          <a:lstStyle/>
-          <a:p>
-            <a:pPr algn="ctr"/>
-            <a:r>
-              <a:rPr sz="1400" b="1">
-                <a:solidFill>
-                  <a:srgbClr val="663399"/>
-                </a:solidFill>
-                <a:latin typeface="Calibri"/>
-              </a:rPr>
-              <a:t>Next session  →  </a:t>
-            </a:r>
-            <a:r>
-              <a:rPr sz="1400">
-                <a:solidFill>
-                  <a:srgbClr val="333333"/>
-                </a:solidFill>
-                <a:latin typeface="Calibri"/>
-              </a:rPr>
-              <a:t>Deploying and Debugging Applications (90 min)</a:t>
-            </a:r>
-          </a:p>
-        </p:txBody>
-      </p:sp>
-    </p:spTree>
-  </p:cSld>
-  <p:clrMapOvr>
-    <a:masterClrMapping/>
-  </p:clrMapOvr>
-</p:sld>
-</file>
-
-<file path=ppt/slides/slide7.xml><?xml version="1.0" encoding="utf-8"?>
-<p:sld xmlns:a="http://schemas.openxmlformats.org/drawingml/2006/main" xmlns:p="http://schemas.openxmlformats.org/presentationml/2006/main" xmlns:r="http://schemas.openxmlformats.org/officeDocument/2006/relationships">
-  <p:cSld>
-    <p:spTree>
-      <p:nvGrpSpPr>
-        <p:cNvPr id="1" name=""/>
-        <p:cNvGrpSpPr/>
-        <p:nvPr/>
-      </p:nvGrpSpPr>
-      <p:grpSpPr/>
-      <p:sp>
-        <p:nvSpPr>
-          <p:cNvPr id="2" name="Title 1"/>
-          <p:cNvSpPr>
-            <a:spLocks noGrp="1"/>
-          </p:cNvSpPr>
-          <p:nvPr>
-            <p:ph type="ctrTitle"/>
-          </p:nvPr>
-        </p:nvSpPr>
-        <p:spPr/>
-        <p:txBody>
-          <a:bodyPr/>
-          <a:lstStyle/>
-          <a:p>
-            <a:r>
-              <a:rPr sz="4400" b="1">
-                <a:solidFill>
-                  <a:srgbClr val="FFFFFF"/>
-                </a:solidFill>
-                <a:latin typeface="Calibri"/>
-              </a:rPr>
-              <a:t>Day-to-Day Operations</a:t>
-            </a:r>
-          </a:p>
-        </p:txBody>
-      </p:sp>
-      <p:sp>
-        <p:nvSpPr>
-          <p:cNvPr id="3" name="Subtitle 2"/>
-          <p:cNvSpPr>
-            <a:spLocks noGrp="1"/>
-          </p:cNvSpPr>
-          <p:nvPr>
-            <p:ph type="subTitle" idx="1"/>
-          </p:nvPr>
-        </p:nvSpPr>
-        <p:spPr/>
-        <p:txBody>
-          <a:bodyPr/>
-          <a:lstStyle/>
-          <a:p>
-            <a:r>
-              <a:rPr sz="2200" i="1">
-                <a:solidFill>
-                  <a:srgbClr val="FFFFFF"/>
-                </a:solidFill>
-                <a:latin typeface="Calibri"/>
-              </a:rPr>
-              <a:t>Day 4 • Session 3 • 105 minutes</a:t>
-            </a:r>
-          </a:p>
-          <a:p>
-            <a:r>
-              <a:rPr sz="1800">
-                <a:solidFill>
-                  <a:srgbClr val="FFFFFF"/>
-                </a:solidFill>
-                <a:latin typeface="Calibri"/>
-              </a:rPr>
-              <a:t>Running a Yocto-built Linux in production</a:t>
-            </a:r>
-          </a:p>
-        </p:txBody>
-      </p:sp>
-    </p:spTree>
-  </p:cSld>
-  <p:clrMapOvr>
-    <a:masterClrMapping/>
-  </p:clrMapOvr>
-</p:sld>
-</file>
-
-<file path=ppt/slides/slide8.xml><?xml version="1.0" encoding="utf-8"?>
-<p:sld xmlns:a="http://schemas.openxmlformats.org/drawingml/2006/main" xmlns:p="http://schemas.openxmlformats.org/presentationml/2006/main" xmlns:r="http://schemas.openxmlformats.org/officeDocument/2006/relationships">
-  <p:cSld>
-    <p:spTree>
-      <p:nvGrpSpPr>
-        <p:cNvPr id="1" name=""/>
-        <p:cNvGrpSpPr/>
-        <p:nvPr/>
-      </p:nvGrpSpPr>
-      <p:grpSpPr/>
-      <p:sp>
-        <p:nvSpPr>
-          <p:cNvPr id="2" name="Title 1"/>
-          <p:cNvSpPr>
-            <a:spLocks noGrp="1"/>
-          </p:cNvSpPr>
-          <p:nvPr>
-            <p:ph type="title"/>
-          </p:nvPr>
-        </p:nvSpPr>
-        <p:spPr/>
-        <p:txBody>
-          <a:bodyPr/>
-          <a:lstStyle/>
-          <a:p>
-            <a:r>
-              <a:rPr sz="3200" b="1">
-                <a:solidFill>
-                  <a:srgbClr val="CC0066"/>
-                </a:solidFill>
-                <a:latin typeface="Calibri"/>
-              </a:rPr>
-              <a:t>Session Agenda</a:t>
-            </a:r>
-          </a:p>
-        </p:txBody>
-      </p:sp>
-      <p:sp>
-        <p:nvSpPr>
-          <p:cNvPr id="3" name="TextBox 2"/>
-          <p:cNvSpPr txBox="1"/>
-          <p:nvPr/>
-        </p:nvSpPr>
-        <p:spPr>
-          <a:xfrm>
-            <a:off x="822960" y="1463040"/>
-            <a:ext cx="10515600" cy="5029200"/>
-          </a:xfrm>
-          <a:prstGeom prst="rect">
-            <a:avLst/>
-          </a:prstGeom>
-          <a:noFill/>
-        </p:spPr>
-        <p:txBody>
-          <a:bodyPr wrap="square" lIns="45720" rIns="45720">
-            <a:spAutoFit/>
-          </a:bodyPr>
-          <a:lstStyle/>
-          <a:p>
-            <a:pPr>
-              <a:spcAft>
-                <a:spcPts val="600"/>
-              </a:spcAft>
-            </a:pPr>
-            <a:r>
-              <a:rPr sz="2000" b="0" i="0">
-                <a:solidFill>
-                  <a:srgbClr val="333333"/>
-                </a:solidFill>
-                <a:latin typeface="Calibri"/>
-              </a:rPr>
-              <a:t>1.  User access and SSH key management</a:t>
-            </a:r>
-          </a:p>
-          <a:p>
-            <a:pPr>
-              <a:spcAft>
-                <a:spcPts val="600"/>
-              </a:spcAft>
-            </a:pPr>
-            <a:r>
-              <a:rPr sz="2000" b="0" i="0">
-                <a:solidFill>
-                  <a:srgbClr val="333333"/>
-                </a:solidFill>
-                <a:latin typeface="Calibri"/>
-              </a:rPr>
-              <a:t>2.  systemd service management</a:t>
-            </a:r>
-          </a:p>
-          <a:p>
-            <a:pPr>
-              <a:spcAft>
-                <a:spcPts val="600"/>
-              </a:spcAft>
-            </a:pPr>
-            <a:r>
-              <a:rPr sz="2000" b="0" i="0">
-                <a:solidFill>
-                  <a:srgbClr val="333333"/>
-                </a:solidFill>
-                <a:latin typeface="Calibri"/>
-              </a:rPr>
-              <a:t>3.  journalctl patterns for investigation</a:t>
-            </a:r>
-          </a:p>
-          <a:p>
-            <a:pPr>
-              <a:spcAft>
-                <a:spcPts val="600"/>
-              </a:spcAft>
-            </a:pPr>
-            <a:r>
-              <a:rPr sz="2000" b="0" i="0">
-                <a:solidFill>
-                  <a:srgbClr val="333333"/>
-                </a:solidFill>
-                <a:latin typeface="Calibri"/>
-              </a:rPr>
-              <a:t>4.  Persistent logs and crash collection</a:t>
-            </a:r>
-          </a:p>
-          <a:p>
-            <a:pPr>
-              <a:spcAft>
-                <a:spcPts val="600"/>
-              </a:spcAft>
-            </a:pPr>
-            <a:r>
-              <a:rPr sz="2000" b="0" i="0">
-                <a:solidFill>
-                  <a:srgbClr val="333333"/>
-                </a:solidFill>
-                <a:latin typeface="Calibri"/>
-              </a:rPr>
-              <a:t>5.  Networking in the field</a:t>
-            </a:r>
-          </a:p>
-          <a:p>
-            <a:pPr>
-              <a:spcAft>
-                <a:spcPts val="600"/>
-              </a:spcAft>
-            </a:pPr>
-            <a:r>
-              <a:rPr sz="2000" b="0" i="0">
-                <a:solidFill>
-                  <a:srgbClr val="333333"/>
-                </a:solidFill>
-                <a:latin typeface="Calibri"/>
-              </a:rPr>
-              <a:t>6.  Storage reliability — fs checks, wear</a:t>
-            </a:r>
-          </a:p>
-          <a:p>
-            <a:pPr>
-              <a:spcAft>
-                <a:spcPts val="600"/>
-              </a:spcAft>
-            </a:pPr>
-            <a:r>
-              <a:rPr sz="2000" b="0" i="0">
-                <a:solidFill>
-                  <a:srgbClr val="333333"/>
-                </a:solidFill>
-                <a:latin typeface="Calibri"/>
-              </a:rPr>
-              <a:t>7.  Hands-on lab</a:t>
-            </a:r>
-          </a:p>
-        </p:txBody>
-      </p:sp>
-    </p:spTree>
-  </p:cSld>
-  <p:clrMapOvr>
-    <a:masterClrMapping/>
-  </p:clrMapOvr>
-</p:sld>
-</file>
-
-<file path=ppt/slides/slide9.xml><?xml version="1.0" encoding="utf-8"?>
-<p:sld xmlns:a="http://schemas.openxmlformats.org/drawingml/2006/main" xmlns:p="http://schemas.openxmlformats.org/presentationml/2006/main" xmlns:r="http://schemas.openxmlformats.org/officeDocument/2006/relationships">
-  <p:cSld>
-    <p:spTree>
-      <p:nvGrpSpPr>
-        <p:cNvPr id="1" name=""/>
-        <p:cNvGrpSpPr/>
-        <p:nvPr/>
-      </p:nvGrpSpPr>
-      <p:grpSpPr/>
-      <p:sp>
-        <p:nvSpPr>
-          <p:cNvPr id="2" name="Title 1"/>
-          <p:cNvSpPr>
-            <a:spLocks noGrp="1"/>
-          </p:cNvSpPr>
-          <p:nvPr>
-            <p:ph type="title"/>
-          </p:nvPr>
-        </p:nvSpPr>
-        <p:spPr/>
-        <p:txBody>
-          <a:bodyPr/>
-          <a:lstStyle/>
-          <a:p>
-            <a:r>
-              <a:rPr sz="3200" b="1">
-                <a:solidFill>
-                  <a:srgbClr val="CC0066"/>
-                </a:solidFill>
-                <a:latin typeface="Calibri"/>
-              </a:rPr>
-              <a:t>User Access &amp; SSH Keys</a:t>
-            </a:r>
-          </a:p>
-        </p:txBody>
-      </p:sp>
-      <p:sp>
-        <p:nvSpPr>
-          <p:cNvPr id="3" name="TextBox 2"/>
-          <p:cNvSpPr txBox="1"/>
-          <p:nvPr/>
-        </p:nvSpPr>
-        <p:spPr>
-          <a:xfrm>
-            <a:off x="822960" y="1417320"/>
-            <a:ext cx="10515600" cy="365760"/>
-          </a:xfrm>
-          <a:prstGeom prst="rect">
-            <a:avLst/>
-          </a:prstGeom>
-          <a:noFill/>
-        </p:spPr>
-        <p:txBody>
-          <a:bodyPr wrap="square" anchor="t" lIns="45720" rIns="45720">
-            <a:spAutoFit/>
-          </a:bodyPr>
-          <a:lstStyle/>
-          <a:p>
-            <a:pPr algn="l"/>
-            <a:r>
-              <a:rPr sz="1500" b="0" i="1">
-                <a:solidFill>
-                  <a:srgbClr val="666666"/>
-                </a:solidFill>
-                <a:latin typeface="Calibri"/>
-              </a:rPr>
-              <a:t>Day-1 security on every device you ship.</a:t>
-            </a:r>
-          </a:p>
-        </p:txBody>
-      </p:sp>
-      <p:sp>
-        <p:nvSpPr>
-          <p:cNvPr id="4" name="Rounded Rectangle 3"/>
-          <p:cNvSpPr/>
-          <p:nvPr/>
-        </p:nvSpPr>
-        <p:spPr>
-          <a:xfrm>
-            <a:off x="822960" y="1783080"/>
-            <a:ext cx="10515600" cy="4572000"/>
-          </a:xfrm>
-          <a:prstGeom prst="roundRect">
-            <a:avLst/>
-          </a:prstGeom>
-          <a:solidFill>
-            <a:srgbClr val="F5F5F5"/>
-          </a:solidFill>
-          <a:ln w="6350">
-            <a:solidFill>
-              <a:srgbClr val="D0D0D0"/>
-            </a:solidFill>
-          </a:ln>
-          <a:effectLst/>
-        </p:spPr>
-        <p:style>
-          <a:lnRef idx="1">
-            <a:schemeClr val="accent1"/>
-          </a:lnRef>
-          <a:fillRef idx="3">
-            <a:schemeClr val="accent1"/>
-          </a:fillRef>
-          <a:effectRef idx="2">
-            <a:schemeClr val="accent1"/>
-          </a:effectRef>
-          <a:fontRef idx="minor">
-            <a:schemeClr val="lt1"/>
-          </a:fontRef>
-        </p:style>
-        <p:txBody>
-          <a:bodyPr rtlCol="0" anchor="ctr"/>
-          <a:lstStyle/>
-          <a:p>
-            <a:pPr algn="ctr"/>
-          </a:p>
-        </p:txBody>
-      </p:sp>
-      <p:sp>
-        <p:nvSpPr>
-          <p:cNvPr id="5" name="Rectangle 4"/>
-          <p:cNvSpPr/>
-          <p:nvPr/>
-        </p:nvSpPr>
-        <p:spPr>
-          <a:xfrm>
-            <a:off x="822960" y="1783080"/>
-            <a:ext cx="73152" cy="4572000"/>
-          </a:xfrm>
-          <a:prstGeom prst="rect">
-            <a:avLst/>
-          </a:prstGeom>
-          <a:solidFill>
-            <a:srgbClr val="CC0066"/>
-          </a:solidFill>
-          <a:ln>
-            <a:noFill/>
-          </a:ln>
-          <a:effectLst/>
-        </p:spPr>
-        <p:style>
-          <a:lnRef idx="1">
-            <a:schemeClr val="accent1"/>
-          </a:lnRef>
-          <a:fillRef idx="3">
-            <a:schemeClr val="accent1"/>
-          </a:fillRef>
-          <a:effectRef idx="2">
-            <a:schemeClr val="accent1"/>
-          </a:effectRef>
-          <a:fontRef idx="minor">
-            <a:schemeClr val="lt1"/>
-          </a:fontRef>
-        </p:style>
-        <p:txBody>
-          <a:bodyPr rtlCol="0" anchor="ctr"/>
-          <a:lstStyle/>
-          <a:p>
-            <a:pPr algn="ctr"/>
-          </a:p>
-        </p:txBody>
-      </p:sp>
-      <p:sp>
-        <p:nvSpPr>
-          <p:cNvPr id="6" name="TextBox 5"/>
-          <p:cNvSpPr txBox="1"/>
-          <p:nvPr/>
-        </p:nvSpPr>
-        <p:spPr>
-          <a:xfrm>
-            <a:off x="1005840" y="1874519"/>
-            <a:ext cx="10241280" cy="4389120"/>
-          </a:xfrm>
-          <a:prstGeom prst="rect">
-            <a:avLst/>
-          </a:prstGeom>
-          <a:noFill/>
-        </p:spPr>
-        <p:txBody>
-          <a:bodyPr wrap="square" lIns="45720" rIns="45720">
-            <a:spAutoFit/>
-          </a:bodyPr>
-          <a:lstStyle/>
-          <a:p>
-            <a:pPr>
-              <a:spcAft>
-                <a:spcPts val="0"/>
-              </a:spcAft>
-            </a:pPr>
-            <a:r>
-              <a:rPr sz="1000" i="1">
-                <a:solidFill>
-                  <a:srgbClr val="808080"/>
-                </a:solidFill>
-                <a:latin typeface="Consolas"/>
-              </a:rPr>
-              <a:t># Create a non-root maintenance user</a:t>
-            </a:r>
-          </a:p>
-          <a:p>
-            <a:pPr>
-              <a:spcAft>
-                <a:spcPts val="0"/>
-              </a:spcAft>
-            </a:pPr>
-            <a:r>
-              <a:rPr sz="1000">
-                <a:solidFill>
-                  <a:srgbClr val="2D2D2D"/>
-                </a:solidFill>
-                <a:latin typeface="Consolas"/>
-              </a:rPr>
-              <a:t>sudo adduser --disabled-password --gecos '' admin</a:t>
-            </a:r>
-          </a:p>
-          <a:p>
-            <a:pPr>
-              <a:spcAft>
-                <a:spcPts val="0"/>
-              </a:spcAft>
-            </a:pPr>
-            <a:r>
-              <a:rPr sz="1000">
-                <a:solidFill>
-                  <a:srgbClr val="2D2D2D"/>
-                </a:solidFill>
-                <a:latin typeface="Consolas"/>
-              </a:rPr>
-              <a:t>sudo usermod -aG sudo admin</a:t>
-            </a:r>
-          </a:p>
-          <a:p>
-            <a:pPr>
-              <a:spcAft>
-                <a:spcPts val="0"/>
-              </a:spcAft>
-            </a:pPr>
-            <a:r>
-              <a:rPr sz="1000">
-                <a:solidFill>
-                  <a:srgbClr val="2D2D2D"/>
-                </a:solidFill>
-                <a:latin typeface="Consolas"/>
-              </a:rPr>
-              <a:t> </a:t>
-            </a:r>
-          </a:p>
-          <a:p>
-            <a:pPr>
-              <a:spcAft>
-                <a:spcPts val="0"/>
-              </a:spcAft>
-            </a:pPr>
-            <a:r>
-              <a:rPr sz="1000" i="1">
-                <a:solidFill>
-                  <a:srgbClr val="808080"/>
-                </a:solidFill>
-                <a:latin typeface="Consolas"/>
-              </a:rPr>
-              <a:t># Deploy your public key (from your workstation, into the image)</a:t>
-            </a:r>
-          </a:p>
-          <a:p>
-            <a:pPr>
-              <a:spcAft>
-                <a:spcPts val="0"/>
-              </a:spcAft>
-            </a:pPr>
-            <a:r>
-              <a:rPr sz="1000" i="1">
-                <a:solidFill>
-                  <a:srgbClr val="808080"/>
-                </a:solidFill>
-                <a:latin typeface="Consolas"/>
-              </a:rPr>
-              <a:t># Either:</a:t>
-            </a:r>
-          </a:p>
-          <a:p>
-            <a:pPr>
-              <a:spcAft>
-                <a:spcPts val="0"/>
-              </a:spcAft>
-            </a:pPr>
-            <a:r>
-              <a:rPr sz="1000" i="1">
-                <a:solidFill>
-                  <a:srgbClr val="808080"/>
-                </a:solidFill>
-                <a:latin typeface="Consolas"/>
-              </a:rPr>
-              <a:t>#   - Ship in image: write authorized_keys into ROOTFS_POSTPROCESS_COMMAND</a:t>
-            </a:r>
-          </a:p>
-          <a:p>
-            <a:pPr>
-              <a:spcAft>
-                <a:spcPts val="0"/>
-              </a:spcAft>
-            </a:pPr>
-            <a:r>
-              <a:rPr sz="1000" i="1">
-                <a:solidFill>
-                  <a:srgbClr val="808080"/>
-                </a:solidFill>
-                <a:latin typeface="Consolas"/>
-              </a:rPr>
-              <a:t>#   - Deploy at first boot via a systemd one-shot service</a:t>
-            </a:r>
-          </a:p>
-          <a:p>
-            <a:pPr>
-              <a:spcAft>
-                <a:spcPts val="0"/>
-              </a:spcAft>
-            </a:pPr>
-            <a:r>
-              <a:rPr sz="1000">
-                <a:solidFill>
-                  <a:srgbClr val="2D2D2D"/>
-                </a:solidFill>
-                <a:latin typeface="Consolas"/>
-              </a:rPr>
-              <a:t> </a:t>
-            </a:r>
-          </a:p>
-          <a:p>
-            <a:pPr>
-              <a:spcAft>
-                <a:spcPts val="0"/>
-              </a:spcAft>
-            </a:pPr>
-            <a:r>
-              <a:rPr sz="1000" i="1">
-                <a:solidFill>
-                  <a:srgbClr val="808080"/>
-                </a:solidFill>
-                <a:latin typeface="Consolas"/>
-              </a:rPr>
-              <a:t># On a running device:</a:t>
-            </a:r>
-          </a:p>
-          <a:p>
-            <a:pPr>
-              <a:spcAft>
-                <a:spcPts val="0"/>
-              </a:spcAft>
-            </a:pPr>
-            <a:r>
-              <a:rPr sz="1000">
-                <a:solidFill>
-                  <a:srgbClr val="2D2D2D"/>
-                </a:solidFill>
-                <a:latin typeface="Consolas"/>
-              </a:rPr>
-              <a:t>mkdir -p /home/admin/.ssh &amp;&amp; chmod 700 /home/admin/.ssh</a:t>
-            </a:r>
-          </a:p>
-          <a:p>
-            <a:pPr>
-              <a:spcAft>
-                <a:spcPts val="0"/>
-              </a:spcAft>
-            </a:pPr>
-            <a:r>
-              <a:rPr sz="1000">
-                <a:solidFill>
-                  <a:srgbClr val="2D2D2D"/>
-                </a:solidFill>
-                <a:latin typeface="Consolas"/>
-              </a:rPr>
-              <a:t>echo "ssh-ed25519 AAAAC..." &gt; /home/admin/.ssh/authorized_keys</a:t>
-            </a:r>
-          </a:p>
-          <a:p>
-            <a:pPr>
-              <a:spcAft>
-                <a:spcPts val="0"/>
-              </a:spcAft>
-            </a:pPr>
-            <a:r>
-              <a:rPr sz="1000">
-                <a:solidFill>
-                  <a:srgbClr val="2D2D2D"/>
-                </a:solidFill>
-                <a:latin typeface="Consolas"/>
-              </a:rPr>
-              <a:t>chmod 600 /home/admin/.ssh/authorized_keys</a:t>
-            </a:r>
-          </a:p>
-          <a:p>
-            <a:pPr>
-              <a:spcAft>
-                <a:spcPts val="0"/>
-              </a:spcAft>
-            </a:pPr>
-            <a:r>
-              <a:rPr sz="1000">
-                <a:solidFill>
-                  <a:srgbClr val="2D2D2D"/>
-                </a:solidFill>
-                <a:latin typeface="Consolas"/>
-              </a:rPr>
-              <a:t>chown -R admin:admin /home/admin/.ssh</a:t>
-            </a:r>
-          </a:p>
-          <a:p>
-            <a:pPr>
-              <a:spcAft>
-                <a:spcPts val="0"/>
-              </a:spcAft>
-            </a:pPr>
-            <a:r>
-              <a:rPr sz="1000">
-                <a:solidFill>
-                  <a:srgbClr val="2D2D2D"/>
-                </a:solidFill>
-                <a:latin typeface="Consolas"/>
-              </a:rPr>
-              <a:t> </a:t>
-            </a:r>
-          </a:p>
-          <a:p>
-            <a:pPr>
-              <a:spcAft>
-                <a:spcPts val="0"/>
-              </a:spcAft>
-            </a:pPr>
-            <a:r>
-              <a:rPr sz="1000" i="1">
-                <a:solidFill>
-                  <a:srgbClr val="808080"/>
-                </a:solidFill>
-                <a:latin typeface="Consolas"/>
-              </a:rPr>
-              <a:t># Lock down sshd</a:t>
-            </a:r>
-          </a:p>
-          <a:p>
-            <a:pPr>
-              <a:spcAft>
-                <a:spcPts val="0"/>
-              </a:spcAft>
-            </a:pPr>
-            <a:r>
-              <a:rPr sz="1000" i="1">
-                <a:solidFill>
-                  <a:srgbClr val="808080"/>
-                </a:solidFill>
-                <a:latin typeface="Consolas"/>
-              </a:rPr>
-              <a:t># /etc/ssh/sshd_config:</a:t>
-            </a:r>
-          </a:p>
-          <a:p>
-            <a:pPr>
-              <a:spcAft>
-                <a:spcPts val="0"/>
-              </a:spcAft>
-            </a:pPr>
-            <a:r>
-              <a:rPr sz="1000" i="1">
-                <a:solidFill>
-                  <a:srgbClr val="808080"/>
-                </a:solidFill>
-                <a:latin typeface="Consolas"/>
-              </a:rPr>
-              <a:t>#   PasswordAuthentication no</a:t>
-            </a:r>
-          </a:p>
-          <a:p>
-            <a:pPr>
-              <a:spcAft>
-                <a:spcPts val="0"/>
-              </a:spcAft>
-            </a:pPr>
-            <a:r>
-              <a:rPr sz="1000" i="1">
-                <a:solidFill>
-                  <a:srgbClr val="808080"/>
-                </a:solidFill>
-                <a:latin typeface="Consolas"/>
-              </a:rPr>
-              <a:t>#   PermitRootLogin no</a:t>
-            </a:r>
-          </a:p>
-          <a:p>
-            <a:pPr>
-              <a:spcAft>
-                <a:spcPts val="0"/>
-              </a:spcAft>
-            </a:pPr>
-            <a:r>
-              <a:rPr sz="1000" i="1">
-                <a:solidFill>
-                  <a:srgbClr val="808080"/>
-                </a:solidFill>
-                <a:latin typeface="Consolas"/>
-              </a:rPr>
-              <a:t>#   AllowUsers admin</a:t>
-            </a:r>
-          </a:p>
-          <a:p>
-            <a:pPr>
-              <a:spcAft>
-                <a:spcPts val="0"/>
-              </a:spcAft>
-            </a:pPr>
-            <a:r>
-              <a:rPr sz="1000">
-                <a:solidFill>
-                  <a:srgbClr val="2D2D2D"/>
-                </a:solidFill>
-                <a:latin typeface="Consolas"/>
-              </a:rPr>
-              <a:t> </a:t>
-            </a:r>
-          </a:p>
-          <a:p>
-            <a:pPr>
-              <a:spcAft>
-                <a:spcPts val="0"/>
-              </a:spcAft>
-            </a:pPr>
-            <a:r>
-              <a:rPr sz="1000">
-                <a:solidFill>
-                  <a:srgbClr val="2D2D2D"/>
-                </a:solidFill>
-                <a:latin typeface="Consolas"/>
-              </a:rPr>
-              <a:t>systemctl restart sshd</a:t>
             </a:r>
           </a:p>
         </p:txBody>
